--- a/2026/LEC/05-2 Оценка надежности предсказаний ВР.pptx
+++ b/2026/LEC/05-2 Оценка надежности предсказаний ВР.pptx
@@ -5,7 +5,7 @@
     <p:sldMasterId id="2147483648" r:id="rId1"/>
   </p:sldMasterIdLst>
   <p:notesMasterIdLst>
-    <p:notesMasterId r:id="rId29"/>
+    <p:notesMasterId r:id="rId30"/>
   </p:notesMasterIdLst>
   <p:sldIdLst>
     <p:sldId id="477" r:id="rId2"/>
@@ -20,21 +20,22 @@
     <p:sldId id="466" r:id="rId11"/>
     <p:sldId id="467" r:id="rId12"/>
     <p:sldId id="487" r:id="rId13"/>
-    <p:sldId id="470" r:id="rId14"/>
-    <p:sldId id="471" r:id="rId15"/>
-    <p:sldId id="475" r:id="rId16"/>
-    <p:sldId id="474" r:id="rId17"/>
-    <p:sldId id="473" r:id="rId18"/>
-    <p:sldId id="483" r:id="rId19"/>
-    <p:sldId id="481" r:id="rId20"/>
-    <p:sldId id="480" r:id="rId21"/>
-    <p:sldId id="484" r:id="rId22"/>
-    <p:sldId id="488" r:id="rId23"/>
-    <p:sldId id="485" r:id="rId24"/>
-    <p:sldId id="472" r:id="rId25"/>
-    <p:sldId id="479" r:id="rId26"/>
-    <p:sldId id="468" r:id="rId27"/>
-    <p:sldId id="461" r:id="rId28"/>
+    <p:sldId id="471" r:id="rId14"/>
+    <p:sldId id="475" r:id="rId15"/>
+    <p:sldId id="489" r:id="rId16"/>
+    <p:sldId id="490" r:id="rId17"/>
+    <p:sldId id="474" r:id="rId18"/>
+    <p:sldId id="473" r:id="rId19"/>
+    <p:sldId id="483" r:id="rId20"/>
+    <p:sldId id="481" r:id="rId21"/>
+    <p:sldId id="480" r:id="rId22"/>
+    <p:sldId id="484" r:id="rId23"/>
+    <p:sldId id="488" r:id="rId24"/>
+    <p:sldId id="485" r:id="rId25"/>
+    <p:sldId id="472" r:id="rId26"/>
+    <p:sldId id="479" r:id="rId27"/>
+    <p:sldId id="468" r:id="rId28"/>
+    <p:sldId id="461" r:id="rId29"/>
   </p:sldIdLst>
   <p:sldSz cx="12192000" cy="6858000"/>
   <p:notesSz cx="6858000" cy="9144000"/>
@@ -223,7 +224,7 @@
           <a:p>
             <a:fld id="{C730246F-5962-E14A-AAF2-985CCFDAC345}" type="datetimeFigureOut">
               <a:rPr lang="ru-RU" smtClean="0"/>
-              <a:t>20.08.2025</a:t>
+              <a:t>09.04.2026</a:t>
             </a:fld>
             <a:endParaRPr lang="ru-RU"/>
           </a:p>
@@ -490,6 +491,2536 @@
 </p:notesMaster>
 </file>
 
+<file path=ppt/notesSlides/notesSlide1.xml><?xml version="1.0" encoding="utf-8"?>
+<p:notes xmlns:a="http://schemas.openxmlformats.org/drawingml/2006/main" xmlns:r="http://schemas.openxmlformats.org/officeDocument/2006/relationships" xmlns:p="http://schemas.openxmlformats.org/presentationml/2006/main">
+  <p:cSld>
+    <p:spTree>
+      <p:nvGrpSpPr>
+        <p:cNvPr id="1" name=""/>
+        <p:cNvGrpSpPr/>
+        <p:nvPr/>
+      </p:nvGrpSpPr>
+      <p:grpSpPr>
+        <a:xfrm>
+          <a:off x="0" y="0"/>
+          <a:ext cx="0" cy="0"/>
+          <a:chOff x="0" y="0"/>
+          <a:chExt cx="0" cy="0"/>
+        </a:xfrm>
+      </p:grpSpPr>
+      <p:sp>
+        <p:nvSpPr>
+          <p:cNvPr id="2" name="Образ слайда 1"/>
+          <p:cNvSpPr>
+            <a:spLocks noGrp="1" noRot="1" noChangeAspect="1"/>
+          </p:cNvSpPr>
+          <p:nvPr>
+            <p:ph type="sldImg"/>
+          </p:nvPr>
+        </p:nvSpPr>
+        <p:spPr/>
+      </p:sp>
+      <p:sp>
+        <p:nvSpPr>
+          <p:cNvPr id="3" name="Заметки 2"/>
+          <p:cNvSpPr>
+            <a:spLocks noGrp="1"/>
+          </p:cNvSpPr>
+          <p:nvPr>
+            <p:ph type="body" idx="1"/>
+          </p:nvPr>
+        </p:nvSpPr>
+        <p:spPr/>
+        <p:txBody>
+          <a:bodyPr/>
+          <a:lstStyle/>
+          <a:p>
+            <a:r>
+              <a:rPr lang="ru-RU" sz="900" b="1" i="0" kern="1200" dirty="0">
+                <a:solidFill>
+                  <a:schemeClr val="tx1"/>
+                </a:solidFill>
+                <a:effectLst/>
+                <a:latin typeface="+mn-lt"/>
+                <a:ea typeface="+mn-ea"/>
+                <a:cs typeface="+mn-cs"/>
+              </a:rPr>
+              <a:t>🔍 Что такое </a:t>
+            </a:r>
+            <a:r>
+              <a:rPr lang="ru-RU" sz="900" b="1" i="0" kern="1200" dirty="0" err="1">
+                <a:solidFill>
+                  <a:schemeClr val="tx1"/>
+                </a:solidFill>
+                <a:effectLst/>
+                <a:latin typeface="+mn-lt"/>
+                <a:ea typeface="+mn-ea"/>
+                <a:cs typeface="+mn-cs"/>
+              </a:rPr>
+              <a:t>Conformal</a:t>
+            </a:r>
+            <a:r>
+              <a:rPr lang="ru-RU" sz="900" b="1" i="0" kern="1200" dirty="0">
+                <a:solidFill>
+                  <a:schemeClr val="tx1"/>
+                </a:solidFill>
+                <a:effectLst/>
+                <a:latin typeface="+mn-lt"/>
+                <a:ea typeface="+mn-ea"/>
+                <a:cs typeface="+mn-cs"/>
+              </a:rPr>
+              <a:t> </a:t>
+            </a:r>
+            <a:r>
+              <a:rPr lang="ru-RU" sz="900" b="1" i="0" kern="1200" dirty="0" err="1">
+                <a:solidFill>
+                  <a:schemeClr val="tx1"/>
+                </a:solidFill>
+                <a:effectLst/>
+                <a:latin typeface="+mn-lt"/>
+                <a:ea typeface="+mn-ea"/>
+                <a:cs typeface="+mn-cs"/>
+              </a:rPr>
+              <a:t>Prediction</a:t>
+            </a:r>
+            <a:r>
+              <a:rPr lang="ru-RU" sz="900" b="1" i="0" kern="1200" dirty="0">
+                <a:solidFill>
+                  <a:schemeClr val="tx1"/>
+                </a:solidFill>
+                <a:effectLst/>
+                <a:latin typeface="+mn-lt"/>
+                <a:ea typeface="+mn-ea"/>
+                <a:cs typeface="+mn-cs"/>
+              </a:rPr>
+              <a:t>?</a:t>
+            </a:r>
+          </a:p>
+          <a:p>
+            <a:r>
+              <a:rPr lang="ru-RU" sz="900" b="0" i="0" kern="1200" dirty="0" err="1">
+                <a:solidFill>
+                  <a:schemeClr val="tx1"/>
+                </a:solidFill>
+                <a:effectLst/>
+                <a:latin typeface="+mn-lt"/>
+                <a:ea typeface="+mn-ea"/>
+                <a:cs typeface="+mn-cs"/>
+              </a:rPr>
+              <a:t>Conformal</a:t>
+            </a:r>
+            <a:r>
+              <a:rPr lang="ru-RU" sz="900" b="0" i="0" kern="1200" dirty="0">
+                <a:solidFill>
+                  <a:schemeClr val="tx1"/>
+                </a:solidFill>
+                <a:effectLst/>
+                <a:latin typeface="+mn-lt"/>
+                <a:ea typeface="+mn-ea"/>
+                <a:cs typeface="+mn-cs"/>
+              </a:rPr>
+              <a:t> </a:t>
+            </a:r>
+            <a:r>
+              <a:rPr lang="ru-RU" sz="900" b="0" i="0" kern="1200" dirty="0" err="1">
+                <a:solidFill>
+                  <a:schemeClr val="tx1"/>
+                </a:solidFill>
+                <a:effectLst/>
+                <a:latin typeface="+mn-lt"/>
+                <a:ea typeface="+mn-ea"/>
+                <a:cs typeface="+mn-cs"/>
+              </a:rPr>
+              <a:t>Prediction</a:t>
+            </a:r>
+            <a:r>
+              <a:rPr lang="ru-RU" sz="900" b="0" i="0" kern="1200" dirty="0">
+                <a:solidFill>
+                  <a:schemeClr val="tx1"/>
+                </a:solidFill>
+                <a:effectLst/>
+                <a:latin typeface="+mn-lt"/>
+                <a:ea typeface="+mn-ea"/>
+                <a:cs typeface="+mn-cs"/>
+              </a:rPr>
+              <a:t> (Конформное прогнозирование) — это метод непараметрической оценки неопределенности , который позволяет строить калиброванные доверительные интервалы для прогнозов, полученных с помощью любой модели машинного обучения.</a:t>
+            </a:r>
+          </a:p>
+          <a:p>
+            <a:r>
+              <a:rPr lang="ru-RU" sz="900" b="0" i="0" kern="1200" dirty="0">
+                <a:solidFill>
+                  <a:schemeClr val="tx1"/>
+                </a:solidFill>
+                <a:effectLst/>
+                <a:latin typeface="+mn-lt"/>
+                <a:ea typeface="+mn-ea"/>
+                <a:cs typeface="+mn-cs"/>
+              </a:rPr>
+              <a:t>Особенность этого подхода в том, что он:</a:t>
+            </a:r>
+          </a:p>
+          <a:p>
+            <a:r>
+              <a:rPr lang="ru-RU" sz="900" b="0" i="0" kern="1200" dirty="0">
+                <a:solidFill>
+                  <a:schemeClr val="tx1"/>
+                </a:solidFill>
+                <a:effectLst/>
+                <a:latin typeface="+mn-lt"/>
+                <a:ea typeface="+mn-ea"/>
+                <a:cs typeface="+mn-cs"/>
+              </a:rPr>
+              <a:t>Не предполагает нормальности распределения ошибок .</a:t>
+            </a:r>
+          </a:p>
+          <a:p>
+            <a:r>
+              <a:rPr lang="ru-RU" sz="900" b="0" i="0" kern="1200" dirty="0">
+                <a:solidFill>
+                  <a:schemeClr val="tx1"/>
+                </a:solidFill>
+                <a:effectLst/>
+                <a:latin typeface="+mn-lt"/>
+                <a:ea typeface="+mn-ea"/>
+                <a:cs typeface="+mn-cs"/>
+              </a:rPr>
+              <a:t>Не требует повторного обучения модели .</a:t>
+            </a:r>
+          </a:p>
+          <a:p>
+            <a:r>
+              <a:rPr lang="ru-RU" sz="900" b="0" i="0" kern="1200" dirty="0">
+                <a:solidFill>
+                  <a:schemeClr val="tx1"/>
+                </a:solidFill>
+                <a:effectLst/>
+                <a:latin typeface="+mn-lt"/>
+                <a:ea typeface="+mn-ea"/>
+                <a:cs typeface="+mn-cs"/>
+              </a:rPr>
+              <a:t>Работает с любыми моделями (линейными, деревьями решений, </a:t>
+            </a:r>
+            <a:r>
+              <a:rPr lang="ru-RU" sz="900" b="0" i="0" kern="1200" dirty="0" err="1">
+                <a:solidFill>
+                  <a:schemeClr val="tx1"/>
+                </a:solidFill>
+                <a:effectLst/>
+                <a:latin typeface="+mn-lt"/>
+                <a:ea typeface="+mn-ea"/>
+                <a:cs typeface="+mn-cs"/>
+              </a:rPr>
+              <a:t>нейросетями</a:t>
+            </a:r>
+            <a:r>
+              <a:rPr lang="ru-RU" sz="900" b="0" i="0" kern="1200" dirty="0">
+                <a:solidFill>
+                  <a:schemeClr val="tx1"/>
+                </a:solidFill>
+                <a:effectLst/>
+                <a:latin typeface="+mn-lt"/>
+                <a:ea typeface="+mn-ea"/>
+                <a:cs typeface="+mn-cs"/>
+              </a:rPr>
+              <a:t> и т.д.).</a:t>
+            </a:r>
+          </a:p>
+          <a:p>
+            <a:r>
+              <a:rPr lang="ru-RU" sz="900" b="0" i="0" kern="1200" dirty="0">
+                <a:solidFill>
+                  <a:schemeClr val="tx1"/>
+                </a:solidFill>
+                <a:effectLst/>
+                <a:latin typeface="+mn-lt"/>
+                <a:ea typeface="+mn-ea"/>
+                <a:cs typeface="+mn-cs"/>
+              </a:rPr>
+              <a:t>Гарантирует калибровку : например, 95% интервал действительно покроет 95% реальных значений при условии, что данные независимы и одинаково распределены (</a:t>
+            </a:r>
+            <a:r>
+              <a:rPr lang="ru-RU" sz="900" b="0" i="0" kern="1200" dirty="0" err="1">
+                <a:solidFill>
+                  <a:schemeClr val="tx1"/>
+                </a:solidFill>
+                <a:effectLst/>
+                <a:latin typeface="+mn-lt"/>
+                <a:ea typeface="+mn-ea"/>
+                <a:cs typeface="+mn-cs"/>
+              </a:rPr>
+              <a:t>i.i.d</a:t>
+            </a:r>
+            <a:r>
+              <a:rPr lang="ru-RU" sz="900" b="0" i="0" kern="1200" dirty="0">
+                <a:solidFill>
+                  <a:schemeClr val="tx1"/>
+                </a:solidFill>
+                <a:effectLst/>
+                <a:latin typeface="+mn-lt"/>
+                <a:ea typeface="+mn-ea"/>
+                <a:cs typeface="+mn-cs"/>
+              </a:rPr>
+              <a:t>.).</a:t>
+            </a:r>
+          </a:p>
+          <a:p>
+            <a:r>
+              <a:rPr lang="ru-RU" sz="900" b="1" i="0" kern="1200" dirty="0">
+                <a:solidFill>
+                  <a:schemeClr val="tx1"/>
+                </a:solidFill>
+                <a:effectLst/>
+                <a:latin typeface="+mn-lt"/>
+                <a:ea typeface="+mn-ea"/>
+                <a:cs typeface="+mn-cs"/>
+              </a:rPr>
+              <a:t>💡 Основная идея</a:t>
+            </a:r>
+          </a:p>
+          <a:p>
+            <a:r>
+              <a:rPr lang="ru-RU" sz="900" b="0" i="0" kern="1200" dirty="0">
+                <a:solidFill>
+                  <a:schemeClr val="tx1"/>
+                </a:solidFill>
+                <a:effectLst/>
+                <a:latin typeface="+mn-lt"/>
+                <a:ea typeface="+mn-ea"/>
+                <a:cs typeface="+mn-cs"/>
+              </a:rPr>
+              <a:t>Конформное прогнозирование использует перекрестную проверку или разделение на обучающую и калибровочную выборки , чтобы определить, насколько "конформны" новые наблюдения по сравнению с уже известными.</a:t>
+            </a:r>
+          </a:p>
+          <a:p>
+            <a:r>
+              <a:rPr lang="ru-RU" sz="900" b="1" i="0" kern="1200" dirty="0">
+                <a:solidFill>
+                  <a:schemeClr val="tx1"/>
+                </a:solidFill>
+                <a:effectLst/>
+                <a:latin typeface="+mn-lt"/>
+                <a:ea typeface="+mn-ea"/>
+                <a:cs typeface="+mn-cs"/>
+              </a:rPr>
+              <a:t>Шаги работы:</a:t>
+            </a:r>
+          </a:p>
+          <a:p>
+            <a:r>
+              <a:rPr lang="ru-RU" sz="900" b="0" i="0" kern="1200" dirty="0">
+                <a:solidFill>
+                  <a:schemeClr val="tx1"/>
+                </a:solidFill>
+                <a:effectLst/>
+                <a:latin typeface="+mn-lt"/>
+                <a:ea typeface="+mn-ea"/>
+                <a:cs typeface="+mn-cs"/>
+              </a:rPr>
+              <a:t>Обучите модель на обучающей выборке.</a:t>
+            </a:r>
+          </a:p>
+          <a:p>
+            <a:r>
+              <a:rPr lang="ru-RU" sz="900" b="0" i="0" kern="1200" dirty="0">
+                <a:solidFill>
+                  <a:schemeClr val="tx1"/>
+                </a:solidFill>
+                <a:effectLst/>
+                <a:latin typeface="+mn-lt"/>
+                <a:ea typeface="+mn-ea"/>
+                <a:cs typeface="+mn-cs"/>
+              </a:rPr>
+              <a:t>Используйте отдельную часть данных (калибровочную) для вычисления </a:t>
+            </a:r>
+            <a:r>
+              <a:rPr lang="ru-RU" sz="900" b="0" i="0" kern="1200" dirty="0" err="1">
+                <a:solidFill>
+                  <a:schemeClr val="tx1"/>
+                </a:solidFill>
+                <a:effectLst/>
+                <a:latin typeface="+mn-lt"/>
+                <a:ea typeface="+mn-ea"/>
+                <a:cs typeface="+mn-cs"/>
+              </a:rPr>
+              <a:t>неконформности</a:t>
+            </a:r>
+            <a:r>
+              <a:rPr lang="ru-RU" sz="900" b="0" i="0" kern="1200" dirty="0">
+                <a:solidFill>
+                  <a:schemeClr val="tx1"/>
+                </a:solidFill>
+                <a:effectLst/>
+                <a:latin typeface="+mn-lt"/>
+                <a:ea typeface="+mn-ea"/>
+                <a:cs typeface="+mn-cs"/>
+              </a:rPr>
+              <a:t> (</a:t>
+            </a:r>
+            <a:r>
+              <a:rPr lang="ru-RU" sz="900" b="0" i="0" kern="1200" dirty="0" err="1">
+                <a:solidFill>
+                  <a:schemeClr val="tx1"/>
+                </a:solidFill>
+                <a:effectLst/>
+                <a:latin typeface="+mn-lt"/>
+                <a:ea typeface="+mn-ea"/>
+                <a:cs typeface="+mn-cs"/>
+              </a:rPr>
+              <a:t>nonconformity</a:t>
+            </a:r>
+            <a:r>
+              <a:rPr lang="ru-RU" sz="900" b="0" i="0" kern="1200" dirty="0">
+                <a:solidFill>
+                  <a:schemeClr val="tx1"/>
+                </a:solidFill>
+                <a:effectLst/>
+                <a:latin typeface="+mn-lt"/>
+                <a:ea typeface="+mn-ea"/>
+                <a:cs typeface="+mn-cs"/>
+              </a:rPr>
+              <a:t> </a:t>
+            </a:r>
+            <a:r>
+              <a:rPr lang="ru-RU" sz="900" b="0" i="0" kern="1200" dirty="0" err="1">
+                <a:solidFill>
+                  <a:schemeClr val="tx1"/>
+                </a:solidFill>
+                <a:effectLst/>
+                <a:latin typeface="+mn-lt"/>
+                <a:ea typeface="+mn-ea"/>
+                <a:cs typeface="+mn-cs"/>
+              </a:rPr>
+              <a:t>scores</a:t>
+            </a:r>
+            <a:r>
+              <a:rPr lang="ru-RU" sz="900" b="0" i="0" kern="1200" dirty="0">
+                <a:solidFill>
+                  <a:schemeClr val="tx1"/>
+                </a:solidFill>
+                <a:effectLst/>
+                <a:latin typeface="+mn-lt"/>
+                <a:ea typeface="+mn-ea"/>
+                <a:cs typeface="+mn-cs"/>
+              </a:rPr>
+              <a:t>) — меры того, насколько новое значение отличается от предсказанного.</a:t>
+            </a:r>
+          </a:p>
+          <a:p>
+            <a:r>
+              <a:rPr lang="ru-RU" sz="900" b="0" i="0" kern="1200" dirty="0">
+                <a:solidFill>
+                  <a:schemeClr val="tx1"/>
+                </a:solidFill>
+                <a:effectLst/>
+                <a:latin typeface="+mn-lt"/>
+                <a:ea typeface="+mn-ea"/>
+                <a:cs typeface="+mn-cs"/>
+              </a:rPr>
+              <a:t>На основе этих </a:t>
+            </a:r>
+            <a:r>
+              <a:rPr lang="ru-RU" sz="900" b="0" i="0" kern="1200" dirty="0" err="1">
+                <a:solidFill>
+                  <a:schemeClr val="tx1"/>
+                </a:solidFill>
+                <a:effectLst/>
+                <a:latin typeface="+mn-lt"/>
+                <a:ea typeface="+mn-ea"/>
+                <a:cs typeface="+mn-cs"/>
+              </a:rPr>
+              <a:t>неконформностей</a:t>
+            </a:r>
+            <a:r>
+              <a:rPr lang="ru-RU" sz="900" b="0" i="0" kern="1200" dirty="0">
+                <a:solidFill>
+                  <a:schemeClr val="tx1"/>
+                </a:solidFill>
+                <a:effectLst/>
+                <a:latin typeface="+mn-lt"/>
+                <a:ea typeface="+mn-ea"/>
+                <a:cs typeface="+mn-cs"/>
+              </a:rPr>
+              <a:t> постройте доверительный интервал , который будет содержать будущее значение с заданной вероятностью (например, 90%, 95%).</a:t>
+            </a:r>
+          </a:p>
+          <a:p>
+            <a:r>
+              <a:rPr lang="ru-RU" sz="900" b="1" i="0" kern="1200" dirty="0">
+                <a:solidFill>
+                  <a:schemeClr val="tx1"/>
+                </a:solidFill>
+                <a:effectLst/>
+                <a:latin typeface="+mn-lt"/>
+                <a:ea typeface="+mn-ea"/>
+                <a:cs typeface="+mn-cs"/>
+              </a:rPr>
+              <a:t>📊 Пример: регрессия</a:t>
+            </a:r>
+          </a:p>
+          <a:p>
+            <a:r>
+              <a:rPr lang="ru-RU" sz="900" b="0" i="0" kern="1200" dirty="0">
+                <a:solidFill>
+                  <a:schemeClr val="tx1"/>
+                </a:solidFill>
+                <a:effectLst/>
+                <a:latin typeface="+mn-lt"/>
+                <a:ea typeface="+mn-ea"/>
+                <a:cs typeface="+mn-cs"/>
+              </a:rPr>
+              <a:t>Предположим, у нас есть временной ряд </a:t>
+            </a:r>
+            <a:r>
+              <a:rPr lang="ru-RU" sz="900" b="0" i="1" kern="1200" dirty="0">
+                <a:solidFill>
+                  <a:schemeClr val="tx1"/>
+                </a:solidFill>
+                <a:effectLst/>
+                <a:latin typeface="+mn-lt"/>
+                <a:ea typeface="+mn-ea"/>
+                <a:cs typeface="+mn-cs"/>
+              </a:rPr>
+              <a:t>y</a:t>
+            </a:r>
+            <a:r>
+              <a:rPr lang="ru-RU" sz="900" b="0" i="0" kern="1200" dirty="0">
+                <a:solidFill>
+                  <a:schemeClr val="tx1"/>
+                </a:solidFill>
+                <a:effectLst/>
+                <a:latin typeface="+mn-lt"/>
+                <a:ea typeface="+mn-ea"/>
+                <a:cs typeface="+mn-cs"/>
+              </a:rPr>
+              <a:t>1​,</a:t>
+            </a:r>
+            <a:r>
+              <a:rPr lang="ru-RU" sz="900" b="0" i="1" kern="1200" dirty="0">
+                <a:solidFill>
+                  <a:schemeClr val="tx1"/>
+                </a:solidFill>
+                <a:effectLst/>
+                <a:latin typeface="+mn-lt"/>
+                <a:ea typeface="+mn-ea"/>
+                <a:cs typeface="+mn-cs"/>
+              </a:rPr>
+              <a:t>y</a:t>
+            </a:r>
+            <a:r>
+              <a:rPr lang="ru-RU" sz="900" b="0" i="0" kern="1200" dirty="0">
+                <a:solidFill>
+                  <a:schemeClr val="tx1"/>
+                </a:solidFill>
+                <a:effectLst/>
+                <a:latin typeface="+mn-lt"/>
+                <a:ea typeface="+mn-ea"/>
+                <a:cs typeface="+mn-cs"/>
+              </a:rPr>
+              <a:t>2​,...,</a:t>
+            </a:r>
+            <a:r>
+              <a:rPr lang="ru-RU" sz="900" b="0" i="1" kern="1200" dirty="0" err="1">
+                <a:solidFill>
+                  <a:schemeClr val="tx1"/>
+                </a:solidFill>
+                <a:effectLst/>
+                <a:latin typeface="+mn-lt"/>
+                <a:ea typeface="+mn-ea"/>
+                <a:cs typeface="+mn-cs"/>
+              </a:rPr>
+              <a:t>yT</a:t>
+            </a:r>
+            <a:r>
+              <a:rPr lang="ru-RU" sz="900" b="0" i="0" kern="1200" dirty="0">
+                <a:solidFill>
+                  <a:schemeClr val="tx1"/>
+                </a:solidFill>
+                <a:effectLst/>
+                <a:latin typeface="+mn-lt"/>
+                <a:ea typeface="+mn-ea"/>
+                <a:cs typeface="+mn-cs"/>
+              </a:rPr>
+              <a:t>​ . Мы хотим построить прогноз на </a:t>
+            </a:r>
+            <a:r>
+              <a:rPr lang="ru-RU" sz="900" b="0" i="1" kern="1200" dirty="0">
+                <a:solidFill>
+                  <a:schemeClr val="tx1"/>
+                </a:solidFill>
+                <a:effectLst/>
+                <a:latin typeface="+mn-lt"/>
+                <a:ea typeface="+mn-ea"/>
+                <a:cs typeface="+mn-cs"/>
+              </a:rPr>
+              <a:t>h</a:t>
+            </a:r>
+            <a:r>
+              <a:rPr lang="ru-RU" sz="900" b="0" i="0" kern="1200" dirty="0">
+                <a:solidFill>
+                  <a:schemeClr val="tx1"/>
+                </a:solidFill>
+                <a:effectLst/>
+                <a:latin typeface="+mn-lt"/>
+                <a:ea typeface="+mn-ea"/>
+                <a:cs typeface="+mn-cs"/>
+              </a:rPr>
+              <a:t> шагов вперед с 95% доверительным интервалом.</a:t>
+            </a:r>
+          </a:p>
+          <a:p>
+            <a:r>
+              <a:rPr lang="ru-RU" sz="900" b="1" i="0" kern="1200" dirty="0">
+                <a:solidFill>
+                  <a:schemeClr val="tx1"/>
+                </a:solidFill>
+                <a:effectLst/>
+                <a:latin typeface="+mn-lt"/>
+                <a:ea typeface="+mn-ea"/>
+                <a:cs typeface="+mn-cs"/>
+              </a:rPr>
+              <a:t>Этапы конформного прогнозирования:</a:t>
+            </a:r>
+          </a:p>
+          <a:p>
+            <a:r>
+              <a:rPr lang="ru-RU" sz="900" b="1" i="0" kern="1200" dirty="0">
+                <a:solidFill>
+                  <a:schemeClr val="tx1"/>
+                </a:solidFill>
+                <a:effectLst/>
+                <a:latin typeface="+mn-lt"/>
+                <a:ea typeface="+mn-ea"/>
+                <a:cs typeface="+mn-cs"/>
+              </a:rPr>
+              <a:t>1. Разделение данных</a:t>
+            </a:r>
+          </a:p>
+          <a:p>
+            <a:r>
+              <a:rPr lang="ru-RU" sz="900" b="0" i="0" kern="1200" dirty="0">
+                <a:solidFill>
+                  <a:schemeClr val="tx1"/>
+                </a:solidFill>
+                <a:effectLst/>
+                <a:latin typeface="+mn-lt"/>
+                <a:ea typeface="+mn-ea"/>
+                <a:cs typeface="+mn-cs"/>
+              </a:rPr>
+              <a:t>Обучающая выборка : </a:t>
+            </a:r>
+            <a:r>
+              <a:rPr lang="ru-RU" sz="900" b="0" i="1" kern="1200" dirty="0">
+                <a:solidFill>
+                  <a:schemeClr val="tx1"/>
+                </a:solidFill>
+                <a:effectLst/>
+                <a:latin typeface="+mn-lt"/>
+                <a:ea typeface="+mn-ea"/>
+                <a:cs typeface="+mn-cs"/>
+              </a:rPr>
+              <a:t>y</a:t>
+            </a:r>
+            <a:r>
+              <a:rPr lang="ru-RU" sz="900" b="0" i="0" kern="1200" dirty="0">
+                <a:solidFill>
+                  <a:schemeClr val="tx1"/>
+                </a:solidFill>
+                <a:effectLst/>
+                <a:latin typeface="+mn-lt"/>
+                <a:ea typeface="+mn-ea"/>
+                <a:cs typeface="+mn-cs"/>
+              </a:rPr>
+              <a:t>1​,...,</a:t>
+            </a:r>
+            <a:r>
+              <a:rPr lang="ru-RU" sz="900" b="0" i="1" kern="1200" dirty="0" err="1">
+                <a:solidFill>
+                  <a:schemeClr val="tx1"/>
+                </a:solidFill>
+                <a:effectLst/>
+                <a:latin typeface="+mn-lt"/>
+                <a:ea typeface="+mn-ea"/>
+                <a:cs typeface="+mn-cs"/>
+              </a:rPr>
+              <a:t>yT</a:t>
+            </a:r>
+            <a:r>
+              <a:rPr lang="ru-RU" sz="900" b="0" i="0" kern="1200" dirty="0">
+                <a:solidFill>
+                  <a:schemeClr val="tx1"/>
+                </a:solidFill>
+                <a:effectLst/>
+                <a:latin typeface="+mn-lt"/>
+                <a:ea typeface="+mn-ea"/>
+                <a:cs typeface="+mn-cs"/>
+              </a:rPr>
+              <a:t>−</a:t>
+            </a:r>
+            <a:r>
+              <a:rPr lang="ru-RU" sz="900" b="0" i="1" kern="1200" dirty="0">
+                <a:solidFill>
+                  <a:schemeClr val="tx1"/>
+                </a:solidFill>
+                <a:effectLst/>
+                <a:latin typeface="+mn-lt"/>
+                <a:ea typeface="+mn-ea"/>
+                <a:cs typeface="+mn-cs"/>
+              </a:rPr>
+              <a:t>k</a:t>
+            </a:r>
+            <a:r>
+              <a:rPr lang="ru-RU" sz="900" b="0" i="0" kern="1200" dirty="0">
+                <a:solidFill>
+                  <a:schemeClr val="tx1"/>
+                </a:solidFill>
+                <a:effectLst/>
+                <a:latin typeface="+mn-lt"/>
+                <a:ea typeface="+mn-ea"/>
+                <a:cs typeface="+mn-cs"/>
+              </a:rPr>
+              <a:t>​</a:t>
+            </a:r>
+          </a:p>
+          <a:p>
+            <a:r>
+              <a:rPr lang="ru-RU" sz="900" b="0" i="0" kern="1200" dirty="0">
+                <a:solidFill>
+                  <a:schemeClr val="tx1"/>
+                </a:solidFill>
+                <a:effectLst/>
+                <a:latin typeface="+mn-lt"/>
+                <a:ea typeface="+mn-ea"/>
+                <a:cs typeface="+mn-cs"/>
+              </a:rPr>
+              <a:t>Калибровочная выборка : </a:t>
+            </a:r>
+            <a:r>
+              <a:rPr lang="ru-RU" sz="900" b="0" i="1" kern="1200" dirty="0">
+                <a:solidFill>
+                  <a:schemeClr val="tx1"/>
+                </a:solidFill>
+                <a:effectLst/>
+                <a:latin typeface="+mn-lt"/>
+                <a:ea typeface="+mn-ea"/>
+                <a:cs typeface="+mn-cs"/>
+              </a:rPr>
+              <a:t>yT</a:t>
+            </a:r>
+            <a:r>
+              <a:rPr lang="ru-RU" sz="900" b="0" i="0" kern="1200" dirty="0">
+                <a:solidFill>
+                  <a:schemeClr val="tx1"/>
+                </a:solidFill>
+                <a:effectLst/>
+                <a:latin typeface="+mn-lt"/>
+                <a:ea typeface="+mn-ea"/>
+                <a:cs typeface="+mn-cs"/>
+              </a:rPr>
+              <a:t>−</a:t>
+            </a:r>
+            <a:r>
+              <a:rPr lang="ru-RU" sz="900" b="0" i="1" kern="1200" dirty="0">
+                <a:solidFill>
+                  <a:schemeClr val="tx1"/>
+                </a:solidFill>
+                <a:effectLst/>
+                <a:latin typeface="+mn-lt"/>
+                <a:ea typeface="+mn-ea"/>
+                <a:cs typeface="+mn-cs"/>
+              </a:rPr>
+              <a:t>k</a:t>
+            </a:r>
+            <a:r>
+              <a:rPr lang="ru-RU" sz="900" b="0" i="0" kern="1200" dirty="0">
+                <a:solidFill>
+                  <a:schemeClr val="tx1"/>
+                </a:solidFill>
+                <a:effectLst/>
+                <a:latin typeface="+mn-lt"/>
+                <a:ea typeface="+mn-ea"/>
+                <a:cs typeface="+mn-cs"/>
+              </a:rPr>
+              <a:t>+1​,...,</a:t>
+            </a:r>
+            <a:r>
+              <a:rPr lang="ru-RU" sz="900" b="0" i="1" kern="1200" dirty="0" err="1">
+                <a:solidFill>
+                  <a:schemeClr val="tx1"/>
+                </a:solidFill>
+                <a:effectLst/>
+                <a:latin typeface="+mn-lt"/>
+                <a:ea typeface="+mn-ea"/>
+                <a:cs typeface="+mn-cs"/>
+              </a:rPr>
+              <a:t>yT</a:t>
+            </a:r>
+            <a:r>
+              <a:rPr lang="ru-RU" sz="900" b="0" i="0" kern="1200" dirty="0">
+                <a:solidFill>
+                  <a:schemeClr val="tx1"/>
+                </a:solidFill>
+                <a:effectLst/>
+                <a:latin typeface="+mn-lt"/>
+                <a:ea typeface="+mn-ea"/>
+                <a:cs typeface="+mn-cs"/>
+              </a:rPr>
+              <a:t>​</a:t>
+            </a:r>
+          </a:p>
+          <a:p>
+            <a:r>
+              <a:rPr lang="ru-RU" sz="900" b="1" i="0" kern="1200" dirty="0">
+                <a:solidFill>
+                  <a:schemeClr val="tx1"/>
+                </a:solidFill>
+                <a:effectLst/>
+                <a:latin typeface="+mn-lt"/>
+                <a:ea typeface="+mn-ea"/>
+                <a:cs typeface="+mn-cs"/>
+              </a:rPr>
+              <a:t>2. Обучение модели</a:t>
+            </a:r>
+          </a:p>
+          <a:p>
+            <a:r>
+              <a:rPr lang="ru-RU" sz="900" b="0" i="0" kern="1200" dirty="0">
+                <a:solidFill>
+                  <a:schemeClr val="tx1"/>
+                </a:solidFill>
+                <a:effectLst/>
+                <a:latin typeface="+mn-lt"/>
+                <a:ea typeface="+mn-ea"/>
+                <a:cs typeface="+mn-cs"/>
+              </a:rPr>
+              <a:t>Обучаем любую модель (например, </a:t>
+            </a:r>
+            <a:r>
+              <a:rPr lang="ru-RU" sz="900" b="0" i="0" kern="1200" dirty="0" err="1">
+                <a:solidFill>
+                  <a:schemeClr val="tx1"/>
+                </a:solidFill>
+                <a:effectLst/>
+                <a:latin typeface="+mn-lt"/>
+                <a:ea typeface="+mn-ea"/>
+                <a:cs typeface="+mn-cs"/>
+              </a:rPr>
+              <a:t>XGBoost</a:t>
+            </a:r>
+            <a:r>
+              <a:rPr lang="ru-RU" sz="900" b="0" i="0" kern="1200" dirty="0">
+                <a:solidFill>
+                  <a:schemeClr val="tx1"/>
+                </a:solidFill>
+                <a:effectLst/>
+                <a:latin typeface="+mn-lt"/>
+                <a:ea typeface="+mn-ea"/>
+                <a:cs typeface="+mn-cs"/>
+              </a:rPr>
+              <a:t>, </a:t>
+            </a:r>
+            <a:r>
+              <a:rPr lang="ru-RU" sz="900" b="0" i="0" kern="1200" dirty="0" err="1">
+                <a:solidFill>
+                  <a:schemeClr val="tx1"/>
+                </a:solidFill>
+                <a:effectLst/>
+                <a:latin typeface="+mn-lt"/>
+                <a:ea typeface="+mn-ea"/>
+                <a:cs typeface="+mn-cs"/>
+              </a:rPr>
+              <a:t>LightGBM</a:t>
+            </a:r>
+            <a:r>
+              <a:rPr lang="ru-RU" sz="900" b="0" i="0" kern="1200" dirty="0">
+                <a:solidFill>
+                  <a:schemeClr val="tx1"/>
+                </a:solidFill>
+                <a:effectLst/>
+                <a:latin typeface="+mn-lt"/>
+                <a:ea typeface="+mn-ea"/>
+                <a:cs typeface="+mn-cs"/>
+              </a:rPr>
+              <a:t>, ARIMA и др.) на обучающей выборке.</a:t>
+            </a:r>
+          </a:p>
+          <a:p>
+            <a:r>
+              <a:rPr lang="ru-RU" sz="900" b="1" i="0" kern="1200" dirty="0">
+                <a:solidFill>
+                  <a:schemeClr val="tx1"/>
+                </a:solidFill>
+                <a:effectLst/>
+                <a:latin typeface="+mn-lt"/>
+                <a:ea typeface="+mn-ea"/>
+                <a:cs typeface="+mn-cs"/>
+              </a:rPr>
+              <a:t>3. Вычисление </a:t>
+            </a:r>
+            <a:r>
+              <a:rPr lang="ru-RU" sz="900" b="1" i="0" kern="1200" dirty="0" err="1">
+                <a:solidFill>
+                  <a:schemeClr val="tx1"/>
+                </a:solidFill>
+                <a:effectLst/>
+                <a:latin typeface="+mn-lt"/>
+                <a:ea typeface="+mn-ea"/>
+                <a:cs typeface="+mn-cs"/>
+              </a:rPr>
+              <a:t>неконформности</a:t>
+            </a:r>
+            <a:endParaRPr lang="ru-RU" sz="900" b="1" i="0" kern="1200" dirty="0">
+              <a:solidFill>
+                <a:schemeClr val="tx1"/>
+              </a:solidFill>
+              <a:effectLst/>
+              <a:latin typeface="+mn-lt"/>
+              <a:ea typeface="+mn-ea"/>
+              <a:cs typeface="+mn-cs"/>
+            </a:endParaRPr>
+          </a:p>
+          <a:p>
+            <a:r>
+              <a:rPr lang="ru-RU" sz="900" b="0" i="0" kern="1200" dirty="0">
+                <a:solidFill>
+                  <a:schemeClr val="tx1"/>
+                </a:solidFill>
+                <a:effectLst/>
+                <a:latin typeface="+mn-lt"/>
+                <a:ea typeface="+mn-ea"/>
+                <a:cs typeface="+mn-cs"/>
+              </a:rPr>
+              <a:t>Для каждого элемента из калибровочной выборки вычисляем ошибку прогноза (например, абсолютную):</a:t>
+            </a:r>
+          </a:p>
+          <a:p>
+            <a:r>
+              <a:rPr lang="ru-RU" sz="900" b="0" i="0" kern="1200" dirty="0" err="1">
+                <a:solidFill>
+                  <a:schemeClr val="tx1"/>
+                </a:solidFill>
+                <a:effectLst/>
+                <a:latin typeface="+mn-lt"/>
+                <a:ea typeface="+mn-ea"/>
+                <a:cs typeface="+mn-cs"/>
+              </a:rPr>
+              <a:t>error</a:t>
+            </a:r>
+            <a:r>
+              <a:rPr lang="ru-RU" sz="900" b="0" i="1" kern="1200" dirty="0" err="1">
+                <a:solidFill>
+                  <a:schemeClr val="tx1"/>
+                </a:solidFill>
+                <a:effectLst/>
+                <a:latin typeface="+mn-lt"/>
+                <a:ea typeface="+mn-ea"/>
+                <a:cs typeface="+mn-cs"/>
+              </a:rPr>
+              <a:t>i</a:t>
+            </a:r>
+            <a:r>
+              <a:rPr lang="ru-RU" sz="900" b="0" i="0" kern="1200" dirty="0">
+                <a:solidFill>
+                  <a:schemeClr val="tx1"/>
+                </a:solidFill>
+                <a:effectLst/>
+                <a:latin typeface="+mn-lt"/>
+                <a:ea typeface="+mn-ea"/>
+                <a:cs typeface="+mn-cs"/>
+              </a:rPr>
+              <a:t>​=∣</a:t>
+            </a:r>
+            <a:r>
+              <a:rPr lang="ru-RU" sz="900" b="0" i="1" kern="1200" dirty="0" err="1">
+                <a:solidFill>
+                  <a:schemeClr val="tx1"/>
+                </a:solidFill>
+                <a:effectLst/>
+                <a:latin typeface="+mn-lt"/>
+                <a:ea typeface="+mn-ea"/>
+                <a:cs typeface="+mn-cs"/>
+              </a:rPr>
+              <a:t>yi</a:t>
+            </a:r>
+            <a:r>
+              <a:rPr lang="ru-RU" sz="900" b="0" i="0" kern="1200" dirty="0">
+                <a:solidFill>
+                  <a:schemeClr val="tx1"/>
+                </a:solidFill>
+                <a:effectLst/>
+                <a:latin typeface="+mn-lt"/>
+                <a:ea typeface="+mn-ea"/>
+                <a:cs typeface="+mn-cs"/>
+              </a:rPr>
+              <a:t>​−</a:t>
+            </a:r>
+            <a:r>
+              <a:rPr lang="ru-RU" sz="900" b="0" i="1" kern="1200" dirty="0">
+                <a:solidFill>
+                  <a:schemeClr val="tx1"/>
+                </a:solidFill>
+                <a:effectLst/>
+                <a:latin typeface="+mn-lt"/>
+                <a:ea typeface="+mn-ea"/>
+                <a:cs typeface="+mn-cs"/>
+              </a:rPr>
+              <a:t>y</a:t>
+            </a:r>
+            <a:r>
+              <a:rPr lang="ru-RU" sz="900" b="0" i="0" kern="1200" dirty="0">
+                <a:solidFill>
+                  <a:schemeClr val="tx1"/>
+                </a:solidFill>
+                <a:effectLst/>
+                <a:latin typeface="+mn-lt"/>
+                <a:ea typeface="+mn-ea"/>
+                <a:cs typeface="+mn-cs"/>
+              </a:rPr>
+              <a:t>^​</a:t>
+            </a:r>
+            <a:r>
+              <a:rPr lang="ru-RU" sz="900" b="0" i="1" kern="1200" dirty="0">
+                <a:solidFill>
+                  <a:schemeClr val="tx1"/>
+                </a:solidFill>
+                <a:effectLst/>
+                <a:latin typeface="+mn-lt"/>
+                <a:ea typeface="+mn-ea"/>
+                <a:cs typeface="+mn-cs"/>
+              </a:rPr>
+              <a:t>i</a:t>
+            </a:r>
+            <a:r>
+              <a:rPr lang="ru-RU" sz="900" b="0" i="0" kern="1200" dirty="0">
+                <a:solidFill>
+                  <a:schemeClr val="tx1"/>
+                </a:solidFill>
+                <a:effectLst/>
+                <a:latin typeface="+mn-lt"/>
+                <a:ea typeface="+mn-ea"/>
+                <a:cs typeface="+mn-cs"/>
+              </a:rPr>
+              <a:t>​∣</a:t>
+            </a:r>
+          </a:p>
+          <a:p>
+            <a:r>
+              <a:rPr lang="ru-RU" sz="900" b="0" i="0" kern="1200" dirty="0">
+                <a:solidFill>
+                  <a:schemeClr val="tx1"/>
+                </a:solidFill>
+                <a:effectLst/>
+                <a:latin typeface="+mn-lt"/>
+                <a:ea typeface="+mn-ea"/>
+                <a:cs typeface="+mn-cs"/>
+              </a:rPr>
+              <a:t>Это и есть </a:t>
+            </a:r>
+            <a:r>
+              <a:rPr lang="ru-RU" sz="900" b="0" i="0" kern="1200" dirty="0" err="1">
+                <a:solidFill>
+                  <a:schemeClr val="tx1"/>
+                </a:solidFill>
+                <a:effectLst/>
+                <a:latin typeface="+mn-lt"/>
+                <a:ea typeface="+mn-ea"/>
+                <a:cs typeface="+mn-cs"/>
+              </a:rPr>
+              <a:t>score</a:t>
+            </a:r>
+            <a:r>
+              <a:rPr lang="ru-RU" sz="900" b="0" i="0" kern="1200" dirty="0">
+                <a:solidFill>
+                  <a:schemeClr val="tx1"/>
+                </a:solidFill>
+                <a:effectLst/>
+                <a:latin typeface="+mn-lt"/>
+                <a:ea typeface="+mn-ea"/>
+                <a:cs typeface="+mn-cs"/>
+              </a:rPr>
+              <a:t> </a:t>
+            </a:r>
+            <a:r>
+              <a:rPr lang="ru-RU" sz="900" b="0" i="0" kern="1200" dirty="0" err="1">
+                <a:solidFill>
+                  <a:schemeClr val="tx1"/>
+                </a:solidFill>
+                <a:effectLst/>
+                <a:latin typeface="+mn-lt"/>
+                <a:ea typeface="+mn-ea"/>
+                <a:cs typeface="+mn-cs"/>
+              </a:rPr>
+              <a:t>неконформности</a:t>
+            </a:r>
+            <a:r>
+              <a:rPr lang="ru-RU" sz="900" b="0" i="0" kern="1200" dirty="0">
+                <a:solidFill>
+                  <a:schemeClr val="tx1"/>
+                </a:solidFill>
+                <a:effectLst/>
+                <a:latin typeface="+mn-lt"/>
+                <a:ea typeface="+mn-ea"/>
+                <a:cs typeface="+mn-cs"/>
+              </a:rPr>
+              <a:t> .</a:t>
+            </a:r>
+          </a:p>
+          <a:p>
+            <a:r>
+              <a:rPr lang="ru-RU" sz="900" b="1" i="0" kern="1200" dirty="0">
+                <a:solidFill>
+                  <a:schemeClr val="tx1"/>
+                </a:solidFill>
+                <a:effectLst/>
+                <a:latin typeface="+mn-lt"/>
+                <a:ea typeface="+mn-ea"/>
+                <a:cs typeface="+mn-cs"/>
+              </a:rPr>
+              <a:t>4. Нахождение квантили</a:t>
+            </a:r>
+          </a:p>
+          <a:p>
+            <a:r>
+              <a:rPr lang="ru-RU" sz="900" b="0" i="0" kern="1200" dirty="0">
+                <a:solidFill>
+                  <a:schemeClr val="tx1"/>
+                </a:solidFill>
+                <a:effectLst/>
+                <a:latin typeface="+mn-lt"/>
+                <a:ea typeface="+mn-ea"/>
+                <a:cs typeface="+mn-cs"/>
+              </a:rPr>
+              <a:t>Вычисляем </a:t>
+            </a:r>
+            <a:r>
+              <a:rPr lang="ru-RU" sz="900" b="0" i="1" kern="1200" dirty="0">
+                <a:solidFill>
+                  <a:schemeClr val="tx1"/>
+                </a:solidFill>
+                <a:effectLst/>
+                <a:latin typeface="+mn-lt"/>
+                <a:ea typeface="+mn-ea"/>
+                <a:cs typeface="+mn-cs"/>
+              </a:rPr>
+              <a:t>qα</a:t>
+            </a:r>
+            <a:r>
+              <a:rPr lang="ru-RU" sz="900" b="0" i="0" kern="1200" dirty="0">
+                <a:solidFill>
+                  <a:schemeClr val="tx1"/>
+                </a:solidFill>
+                <a:effectLst/>
+                <a:latin typeface="+mn-lt"/>
+                <a:ea typeface="+mn-ea"/>
+                <a:cs typeface="+mn-cs"/>
+              </a:rPr>
+              <a:t>​ — (1−</a:t>
+            </a:r>
+            <a:r>
+              <a:rPr lang="ru-RU" sz="900" b="0" i="1" kern="1200" dirty="0">
+                <a:solidFill>
+                  <a:schemeClr val="tx1"/>
+                </a:solidFill>
+                <a:effectLst/>
+                <a:latin typeface="+mn-lt"/>
+                <a:ea typeface="+mn-ea"/>
+                <a:cs typeface="+mn-cs"/>
+              </a:rPr>
+              <a:t>α</a:t>
+            </a:r>
+            <a:r>
+              <a:rPr lang="ru-RU" sz="900" b="0" i="0" kern="1200" dirty="0">
+                <a:solidFill>
+                  <a:schemeClr val="tx1"/>
+                </a:solidFill>
+                <a:effectLst/>
+                <a:latin typeface="+mn-lt"/>
+                <a:ea typeface="+mn-ea"/>
+                <a:cs typeface="+mn-cs"/>
+              </a:rPr>
+              <a:t>) -квантиль всех значений </a:t>
+            </a:r>
+            <a:r>
+              <a:rPr lang="ru-RU" sz="900" b="0" i="0" kern="1200" dirty="0" err="1">
+                <a:solidFill>
+                  <a:schemeClr val="tx1"/>
+                </a:solidFill>
+                <a:effectLst/>
+                <a:latin typeface="+mn-lt"/>
+                <a:ea typeface="+mn-ea"/>
+                <a:cs typeface="+mn-cs"/>
+              </a:rPr>
+              <a:t>error</a:t>
+            </a:r>
+            <a:r>
+              <a:rPr lang="ru-RU" sz="900" b="0" i="1" kern="1200" dirty="0" err="1">
+                <a:solidFill>
+                  <a:schemeClr val="tx1"/>
+                </a:solidFill>
+                <a:effectLst/>
+                <a:latin typeface="+mn-lt"/>
+                <a:ea typeface="+mn-ea"/>
+                <a:cs typeface="+mn-cs"/>
+              </a:rPr>
+              <a:t>i</a:t>
+            </a:r>
+            <a:r>
+              <a:rPr lang="ru-RU" sz="900" b="0" i="0" kern="1200" dirty="0">
+                <a:solidFill>
+                  <a:schemeClr val="tx1"/>
+                </a:solidFill>
+                <a:effectLst/>
+                <a:latin typeface="+mn-lt"/>
+                <a:ea typeface="+mn-ea"/>
+                <a:cs typeface="+mn-cs"/>
+              </a:rPr>
+              <a:t>​ , где </a:t>
+            </a:r>
+            <a:r>
+              <a:rPr lang="ru-RU" sz="900" b="0" i="1" kern="1200" dirty="0">
+                <a:solidFill>
+                  <a:schemeClr val="tx1"/>
+                </a:solidFill>
+                <a:effectLst/>
+                <a:latin typeface="+mn-lt"/>
+                <a:ea typeface="+mn-ea"/>
+                <a:cs typeface="+mn-cs"/>
+              </a:rPr>
+              <a:t>α</a:t>
+            </a:r>
+            <a:r>
+              <a:rPr lang="ru-RU" sz="900" b="0" i="0" kern="1200" dirty="0">
+                <a:solidFill>
+                  <a:schemeClr val="tx1"/>
+                </a:solidFill>
+                <a:effectLst/>
+                <a:latin typeface="+mn-lt"/>
+                <a:ea typeface="+mn-ea"/>
+                <a:cs typeface="+mn-cs"/>
+              </a:rPr>
+              <a:t> — уровень доверия.</a:t>
+            </a:r>
+          </a:p>
+          <a:p>
+            <a:r>
+              <a:rPr lang="ru-RU" sz="900" b="0" i="0" kern="1200" dirty="0">
+                <a:solidFill>
+                  <a:schemeClr val="tx1"/>
+                </a:solidFill>
+                <a:effectLst/>
+                <a:latin typeface="+mn-lt"/>
+                <a:ea typeface="+mn-ea"/>
+                <a:cs typeface="+mn-cs"/>
+              </a:rPr>
+              <a:t>Например:</a:t>
+            </a:r>
+          </a:p>
+          <a:p>
+            <a:endParaRPr lang="ru-RU" dirty="0"/>
+          </a:p>
+        </p:txBody>
+      </p:sp>
+      <p:sp>
+        <p:nvSpPr>
+          <p:cNvPr id="4" name="Номер слайда 3"/>
+          <p:cNvSpPr>
+            <a:spLocks noGrp="1"/>
+          </p:cNvSpPr>
+          <p:nvPr>
+            <p:ph type="sldNum" sz="quarter" idx="10"/>
+          </p:nvPr>
+        </p:nvSpPr>
+        <p:spPr/>
+        <p:txBody>
+          <a:bodyPr/>
+          <a:lstStyle/>
+          <a:p>
+            <a:fld id="{9DA1EE30-E435-D745-B23A-FF31C831763F}" type="slidenum">
+              <a:rPr lang="ru-RU" smtClean="0"/>
+              <a:t>15</a:t>
+            </a:fld>
+            <a:endParaRPr lang="ru-RU"/>
+          </a:p>
+        </p:txBody>
+      </p:sp>
+    </p:spTree>
+    <p:extLst>
+      <p:ext uri="{BB962C8B-B14F-4D97-AF65-F5344CB8AC3E}">
+        <p14:creationId xmlns:p14="http://schemas.microsoft.com/office/powerpoint/2010/main" val="1991101588"/>
+      </p:ext>
+    </p:extLst>
+  </p:cSld>
+  <p:clrMapOvr>
+    <a:masterClrMapping/>
+  </p:clrMapOvr>
+</p:notes>
+</file>
+
+<file path=ppt/notesSlides/notesSlide2.xml><?xml version="1.0" encoding="utf-8"?>
+<p:notes xmlns:a="http://schemas.openxmlformats.org/drawingml/2006/main" xmlns:r="http://schemas.openxmlformats.org/officeDocument/2006/relationships" xmlns:p="http://schemas.openxmlformats.org/presentationml/2006/main">
+  <p:cSld>
+    <p:spTree>
+      <p:nvGrpSpPr>
+        <p:cNvPr id="1" name=""/>
+        <p:cNvGrpSpPr/>
+        <p:nvPr/>
+      </p:nvGrpSpPr>
+      <p:grpSpPr>
+        <a:xfrm>
+          <a:off x="0" y="0"/>
+          <a:ext cx="0" cy="0"/>
+          <a:chOff x="0" y="0"/>
+          <a:chExt cx="0" cy="0"/>
+        </a:xfrm>
+      </p:grpSpPr>
+      <p:sp>
+        <p:nvSpPr>
+          <p:cNvPr id="2" name="Образ слайда 1"/>
+          <p:cNvSpPr>
+            <a:spLocks noGrp="1" noRot="1" noChangeAspect="1"/>
+          </p:cNvSpPr>
+          <p:nvPr>
+            <p:ph type="sldImg"/>
+          </p:nvPr>
+        </p:nvSpPr>
+        <p:spPr/>
+      </p:sp>
+      <p:sp>
+        <p:nvSpPr>
+          <p:cNvPr id="3" name="Заметки 2"/>
+          <p:cNvSpPr>
+            <a:spLocks noGrp="1"/>
+          </p:cNvSpPr>
+          <p:nvPr>
+            <p:ph type="body" idx="1"/>
+          </p:nvPr>
+        </p:nvSpPr>
+        <p:spPr/>
+        <p:txBody>
+          <a:bodyPr/>
+          <a:lstStyle/>
+          <a:p>
+            <a:r>
+              <a:rPr lang="ru-RU" sz="900" b="1" i="0" kern="1200" dirty="0">
+                <a:solidFill>
+                  <a:schemeClr val="tx1"/>
+                </a:solidFill>
+                <a:effectLst/>
+                <a:latin typeface="+mn-lt"/>
+                <a:ea typeface="+mn-ea"/>
+                <a:cs typeface="+mn-cs"/>
+              </a:rPr>
+              <a:t>🔍 Что такое </a:t>
+            </a:r>
+            <a:r>
+              <a:rPr lang="ru-RU" sz="900" b="1" i="0" kern="1200" dirty="0" err="1">
+                <a:solidFill>
+                  <a:schemeClr val="tx1"/>
+                </a:solidFill>
+                <a:effectLst/>
+                <a:latin typeface="+mn-lt"/>
+                <a:ea typeface="+mn-ea"/>
+                <a:cs typeface="+mn-cs"/>
+              </a:rPr>
+              <a:t>Conformal</a:t>
+            </a:r>
+            <a:r>
+              <a:rPr lang="ru-RU" sz="900" b="1" i="0" kern="1200" dirty="0">
+                <a:solidFill>
+                  <a:schemeClr val="tx1"/>
+                </a:solidFill>
+                <a:effectLst/>
+                <a:latin typeface="+mn-lt"/>
+                <a:ea typeface="+mn-ea"/>
+                <a:cs typeface="+mn-cs"/>
+              </a:rPr>
+              <a:t> </a:t>
+            </a:r>
+            <a:r>
+              <a:rPr lang="ru-RU" sz="900" b="1" i="0" kern="1200" dirty="0" err="1">
+                <a:solidFill>
+                  <a:schemeClr val="tx1"/>
+                </a:solidFill>
+                <a:effectLst/>
+                <a:latin typeface="+mn-lt"/>
+                <a:ea typeface="+mn-ea"/>
+                <a:cs typeface="+mn-cs"/>
+              </a:rPr>
+              <a:t>Prediction</a:t>
+            </a:r>
+            <a:r>
+              <a:rPr lang="ru-RU" sz="900" b="1" i="0" kern="1200" dirty="0">
+                <a:solidFill>
+                  <a:schemeClr val="tx1"/>
+                </a:solidFill>
+                <a:effectLst/>
+                <a:latin typeface="+mn-lt"/>
+                <a:ea typeface="+mn-ea"/>
+                <a:cs typeface="+mn-cs"/>
+              </a:rPr>
+              <a:t>?</a:t>
+            </a:r>
+          </a:p>
+          <a:p>
+            <a:r>
+              <a:rPr lang="ru-RU" sz="900" b="0" i="0" kern="1200" dirty="0" err="1">
+                <a:solidFill>
+                  <a:schemeClr val="tx1"/>
+                </a:solidFill>
+                <a:effectLst/>
+                <a:latin typeface="+mn-lt"/>
+                <a:ea typeface="+mn-ea"/>
+                <a:cs typeface="+mn-cs"/>
+              </a:rPr>
+              <a:t>Conformal</a:t>
+            </a:r>
+            <a:r>
+              <a:rPr lang="ru-RU" sz="900" b="0" i="0" kern="1200" dirty="0">
+                <a:solidFill>
+                  <a:schemeClr val="tx1"/>
+                </a:solidFill>
+                <a:effectLst/>
+                <a:latin typeface="+mn-lt"/>
+                <a:ea typeface="+mn-ea"/>
+                <a:cs typeface="+mn-cs"/>
+              </a:rPr>
+              <a:t> </a:t>
+            </a:r>
+            <a:r>
+              <a:rPr lang="ru-RU" sz="900" b="0" i="0" kern="1200" dirty="0" err="1">
+                <a:solidFill>
+                  <a:schemeClr val="tx1"/>
+                </a:solidFill>
+                <a:effectLst/>
+                <a:latin typeface="+mn-lt"/>
+                <a:ea typeface="+mn-ea"/>
+                <a:cs typeface="+mn-cs"/>
+              </a:rPr>
+              <a:t>Prediction</a:t>
+            </a:r>
+            <a:r>
+              <a:rPr lang="ru-RU" sz="900" b="0" i="0" kern="1200" dirty="0">
+                <a:solidFill>
+                  <a:schemeClr val="tx1"/>
+                </a:solidFill>
+                <a:effectLst/>
+                <a:latin typeface="+mn-lt"/>
+                <a:ea typeface="+mn-ea"/>
+                <a:cs typeface="+mn-cs"/>
+              </a:rPr>
+              <a:t> (Конформное прогнозирование) — это метод непараметрической оценки неопределенности , который позволяет строить калиброванные доверительные интервалы для прогнозов, полученных с помощью любой модели машинного обучения.</a:t>
+            </a:r>
+          </a:p>
+          <a:p>
+            <a:r>
+              <a:rPr lang="ru-RU" sz="900" b="0" i="0" kern="1200" dirty="0">
+                <a:solidFill>
+                  <a:schemeClr val="tx1"/>
+                </a:solidFill>
+                <a:effectLst/>
+                <a:latin typeface="+mn-lt"/>
+                <a:ea typeface="+mn-ea"/>
+                <a:cs typeface="+mn-cs"/>
+              </a:rPr>
+              <a:t>Особенность этого подхода в том, что он:</a:t>
+            </a:r>
+          </a:p>
+          <a:p>
+            <a:r>
+              <a:rPr lang="ru-RU" sz="900" b="0" i="0" kern="1200" dirty="0">
+                <a:solidFill>
+                  <a:schemeClr val="tx1"/>
+                </a:solidFill>
+                <a:effectLst/>
+                <a:latin typeface="+mn-lt"/>
+                <a:ea typeface="+mn-ea"/>
+                <a:cs typeface="+mn-cs"/>
+              </a:rPr>
+              <a:t>Не предполагает нормальности распределения ошибок .</a:t>
+            </a:r>
+          </a:p>
+          <a:p>
+            <a:r>
+              <a:rPr lang="ru-RU" sz="900" b="0" i="0" kern="1200" dirty="0">
+                <a:solidFill>
+                  <a:schemeClr val="tx1"/>
+                </a:solidFill>
+                <a:effectLst/>
+                <a:latin typeface="+mn-lt"/>
+                <a:ea typeface="+mn-ea"/>
+                <a:cs typeface="+mn-cs"/>
+              </a:rPr>
+              <a:t>Не требует повторного обучения модели .</a:t>
+            </a:r>
+          </a:p>
+          <a:p>
+            <a:r>
+              <a:rPr lang="ru-RU" sz="900" b="0" i="0" kern="1200" dirty="0">
+                <a:solidFill>
+                  <a:schemeClr val="tx1"/>
+                </a:solidFill>
+                <a:effectLst/>
+                <a:latin typeface="+mn-lt"/>
+                <a:ea typeface="+mn-ea"/>
+                <a:cs typeface="+mn-cs"/>
+              </a:rPr>
+              <a:t>Работает с любыми моделями (линейными, деревьями решений, </a:t>
+            </a:r>
+            <a:r>
+              <a:rPr lang="ru-RU" sz="900" b="0" i="0" kern="1200" dirty="0" err="1">
+                <a:solidFill>
+                  <a:schemeClr val="tx1"/>
+                </a:solidFill>
+                <a:effectLst/>
+                <a:latin typeface="+mn-lt"/>
+                <a:ea typeface="+mn-ea"/>
+                <a:cs typeface="+mn-cs"/>
+              </a:rPr>
+              <a:t>нейросетями</a:t>
+            </a:r>
+            <a:r>
+              <a:rPr lang="ru-RU" sz="900" b="0" i="0" kern="1200" dirty="0">
+                <a:solidFill>
+                  <a:schemeClr val="tx1"/>
+                </a:solidFill>
+                <a:effectLst/>
+                <a:latin typeface="+mn-lt"/>
+                <a:ea typeface="+mn-ea"/>
+                <a:cs typeface="+mn-cs"/>
+              </a:rPr>
+              <a:t> и т.д.).</a:t>
+            </a:r>
+          </a:p>
+          <a:p>
+            <a:r>
+              <a:rPr lang="ru-RU" sz="900" b="0" i="0" kern="1200" dirty="0">
+                <a:solidFill>
+                  <a:schemeClr val="tx1"/>
+                </a:solidFill>
+                <a:effectLst/>
+                <a:latin typeface="+mn-lt"/>
+                <a:ea typeface="+mn-ea"/>
+                <a:cs typeface="+mn-cs"/>
+              </a:rPr>
+              <a:t>Гарантирует калибровку : например, 95% интервал действительно покроет 95% реальных значений при условии, что данные независимы и одинаково распределены (</a:t>
+            </a:r>
+            <a:r>
+              <a:rPr lang="ru-RU" sz="900" b="0" i="0" kern="1200" dirty="0" err="1">
+                <a:solidFill>
+                  <a:schemeClr val="tx1"/>
+                </a:solidFill>
+                <a:effectLst/>
+                <a:latin typeface="+mn-lt"/>
+                <a:ea typeface="+mn-ea"/>
+                <a:cs typeface="+mn-cs"/>
+              </a:rPr>
+              <a:t>i.i.d</a:t>
+            </a:r>
+            <a:r>
+              <a:rPr lang="ru-RU" sz="900" b="0" i="0" kern="1200" dirty="0">
+                <a:solidFill>
+                  <a:schemeClr val="tx1"/>
+                </a:solidFill>
+                <a:effectLst/>
+                <a:latin typeface="+mn-lt"/>
+                <a:ea typeface="+mn-ea"/>
+                <a:cs typeface="+mn-cs"/>
+              </a:rPr>
+              <a:t>.).</a:t>
+            </a:r>
+          </a:p>
+          <a:p>
+            <a:r>
+              <a:rPr lang="ru-RU" sz="900" b="1" i="0" kern="1200" dirty="0">
+                <a:solidFill>
+                  <a:schemeClr val="tx1"/>
+                </a:solidFill>
+                <a:effectLst/>
+                <a:latin typeface="+mn-lt"/>
+                <a:ea typeface="+mn-ea"/>
+                <a:cs typeface="+mn-cs"/>
+              </a:rPr>
+              <a:t>💡 Основная идея</a:t>
+            </a:r>
+          </a:p>
+          <a:p>
+            <a:r>
+              <a:rPr lang="ru-RU" sz="900" b="0" i="0" kern="1200" dirty="0">
+                <a:solidFill>
+                  <a:schemeClr val="tx1"/>
+                </a:solidFill>
+                <a:effectLst/>
+                <a:latin typeface="+mn-lt"/>
+                <a:ea typeface="+mn-ea"/>
+                <a:cs typeface="+mn-cs"/>
+              </a:rPr>
+              <a:t>Конформное прогнозирование использует перекрестную проверку или разделение на обучающую и калибровочную выборки , чтобы определить, насколько "конформны" новые наблюдения по сравнению с уже известными.</a:t>
+            </a:r>
+          </a:p>
+          <a:p>
+            <a:r>
+              <a:rPr lang="ru-RU" sz="900" b="1" i="0" kern="1200" dirty="0">
+                <a:solidFill>
+                  <a:schemeClr val="tx1"/>
+                </a:solidFill>
+                <a:effectLst/>
+                <a:latin typeface="+mn-lt"/>
+                <a:ea typeface="+mn-ea"/>
+                <a:cs typeface="+mn-cs"/>
+              </a:rPr>
+              <a:t>Шаги работы:</a:t>
+            </a:r>
+          </a:p>
+          <a:p>
+            <a:r>
+              <a:rPr lang="ru-RU" sz="900" b="0" i="0" kern="1200" dirty="0">
+                <a:solidFill>
+                  <a:schemeClr val="tx1"/>
+                </a:solidFill>
+                <a:effectLst/>
+                <a:latin typeface="+mn-lt"/>
+                <a:ea typeface="+mn-ea"/>
+                <a:cs typeface="+mn-cs"/>
+              </a:rPr>
+              <a:t>Обучите модель на обучающей выборке.</a:t>
+            </a:r>
+          </a:p>
+          <a:p>
+            <a:r>
+              <a:rPr lang="ru-RU" sz="900" b="0" i="0" kern="1200" dirty="0">
+                <a:solidFill>
+                  <a:schemeClr val="tx1"/>
+                </a:solidFill>
+                <a:effectLst/>
+                <a:latin typeface="+mn-lt"/>
+                <a:ea typeface="+mn-ea"/>
+                <a:cs typeface="+mn-cs"/>
+              </a:rPr>
+              <a:t>Используйте отдельную часть данных (калибровочную) для вычисления </a:t>
+            </a:r>
+            <a:r>
+              <a:rPr lang="ru-RU" sz="900" b="0" i="0" kern="1200" dirty="0" err="1">
+                <a:solidFill>
+                  <a:schemeClr val="tx1"/>
+                </a:solidFill>
+                <a:effectLst/>
+                <a:latin typeface="+mn-lt"/>
+                <a:ea typeface="+mn-ea"/>
+                <a:cs typeface="+mn-cs"/>
+              </a:rPr>
+              <a:t>неконформности</a:t>
+            </a:r>
+            <a:r>
+              <a:rPr lang="ru-RU" sz="900" b="0" i="0" kern="1200" dirty="0">
+                <a:solidFill>
+                  <a:schemeClr val="tx1"/>
+                </a:solidFill>
+                <a:effectLst/>
+                <a:latin typeface="+mn-lt"/>
+                <a:ea typeface="+mn-ea"/>
+                <a:cs typeface="+mn-cs"/>
+              </a:rPr>
+              <a:t> (</a:t>
+            </a:r>
+            <a:r>
+              <a:rPr lang="ru-RU" sz="900" b="0" i="0" kern="1200" dirty="0" err="1">
+                <a:solidFill>
+                  <a:schemeClr val="tx1"/>
+                </a:solidFill>
+                <a:effectLst/>
+                <a:latin typeface="+mn-lt"/>
+                <a:ea typeface="+mn-ea"/>
+                <a:cs typeface="+mn-cs"/>
+              </a:rPr>
+              <a:t>nonconformity</a:t>
+            </a:r>
+            <a:r>
+              <a:rPr lang="ru-RU" sz="900" b="0" i="0" kern="1200" dirty="0">
+                <a:solidFill>
+                  <a:schemeClr val="tx1"/>
+                </a:solidFill>
+                <a:effectLst/>
+                <a:latin typeface="+mn-lt"/>
+                <a:ea typeface="+mn-ea"/>
+                <a:cs typeface="+mn-cs"/>
+              </a:rPr>
+              <a:t> </a:t>
+            </a:r>
+            <a:r>
+              <a:rPr lang="ru-RU" sz="900" b="0" i="0" kern="1200" dirty="0" err="1">
+                <a:solidFill>
+                  <a:schemeClr val="tx1"/>
+                </a:solidFill>
+                <a:effectLst/>
+                <a:latin typeface="+mn-lt"/>
+                <a:ea typeface="+mn-ea"/>
+                <a:cs typeface="+mn-cs"/>
+              </a:rPr>
+              <a:t>scores</a:t>
+            </a:r>
+            <a:r>
+              <a:rPr lang="ru-RU" sz="900" b="0" i="0" kern="1200" dirty="0">
+                <a:solidFill>
+                  <a:schemeClr val="tx1"/>
+                </a:solidFill>
+                <a:effectLst/>
+                <a:latin typeface="+mn-lt"/>
+                <a:ea typeface="+mn-ea"/>
+                <a:cs typeface="+mn-cs"/>
+              </a:rPr>
+              <a:t>) — меры того, насколько новое значение отличается от предсказанного.</a:t>
+            </a:r>
+          </a:p>
+          <a:p>
+            <a:r>
+              <a:rPr lang="ru-RU" sz="900" b="0" i="0" kern="1200" dirty="0">
+                <a:solidFill>
+                  <a:schemeClr val="tx1"/>
+                </a:solidFill>
+                <a:effectLst/>
+                <a:latin typeface="+mn-lt"/>
+                <a:ea typeface="+mn-ea"/>
+                <a:cs typeface="+mn-cs"/>
+              </a:rPr>
+              <a:t>На основе этих </a:t>
+            </a:r>
+            <a:r>
+              <a:rPr lang="ru-RU" sz="900" b="0" i="0" kern="1200" dirty="0" err="1">
+                <a:solidFill>
+                  <a:schemeClr val="tx1"/>
+                </a:solidFill>
+                <a:effectLst/>
+                <a:latin typeface="+mn-lt"/>
+                <a:ea typeface="+mn-ea"/>
+                <a:cs typeface="+mn-cs"/>
+              </a:rPr>
+              <a:t>неконформностей</a:t>
+            </a:r>
+            <a:r>
+              <a:rPr lang="ru-RU" sz="900" b="0" i="0" kern="1200" dirty="0">
+                <a:solidFill>
+                  <a:schemeClr val="tx1"/>
+                </a:solidFill>
+                <a:effectLst/>
+                <a:latin typeface="+mn-lt"/>
+                <a:ea typeface="+mn-ea"/>
+                <a:cs typeface="+mn-cs"/>
+              </a:rPr>
+              <a:t> постройте доверительный интервал , который будет содержать будущее значение с заданной вероятностью (например, 90%, 95%).</a:t>
+            </a:r>
+          </a:p>
+          <a:p>
+            <a:r>
+              <a:rPr lang="ru-RU" sz="900" b="1" i="0" kern="1200" dirty="0">
+                <a:solidFill>
+                  <a:schemeClr val="tx1"/>
+                </a:solidFill>
+                <a:effectLst/>
+                <a:latin typeface="+mn-lt"/>
+                <a:ea typeface="+mn-ea"/>
+                <a:cs typeface="+mn-cs"/>
+              </a:rPr>
+              <a:t>📊 Пример: регрессия</a:t>
+            </a:r>
+          </a:p>
+          <a:p>
+            <a:r>
+              <a:rPr lang="ru-RU" sz="900" b="0" i="0" kern="1200" dirty="0">
+                <a:solidFill>
+                  <a:schemeClr val="tx1"/>
+                </a:solidFill>
+                <a:effectLst/>
+                <a:latin typeface="+mn-lt"/>
+                <a:ea typeface="+mn-ea"/>
+                <a:cs typeface="+mn-cs"/>
+              </a:rPr>
+              <a:t>Предположим, у нас есть временной ряд </a:t>
+            </a:r>
+            <a:r>
+              <a:rPr lang="ru-RU" sz="900" b="0" i="1" kern="1200" dirty="0">
+                <a:solidFill>
+                  <a:schemeClr val="tx1"/>
+                </a:solidFill>
+                <a:effectLst/>
+                <a:latin typeface="+mn-lt"/>
+                <a:ea typeface="+mn-ea"/>
+                <a:cs typeface="+mn-cs"/>
+              </a:rPr>
+              <a:t>y</a:t>
+            </a:r>
+            <a:r>
+              <a:rPr lang="ru-RU" sz="900" b="0" i="0" kern="1200" dirty="0">
+                <a:solidFill>
+                  <a:schemeClr val="tx1"/>
+                </a:solidFill>
+                <a:effectLst/>
+                <a:latin typeface="+mn-lt"/>
+                <a:ea typeface="+mn-ea"/>
+                <a:cs typeface="+mn-cs"/>
+              </a:rPr>
+              <a:t>1​,</a:t>
+            </a:r>
+            <a:r>
+              <a:rPr lang="ru-RU" sz="900" b="0" i="1" kern="1200" dirty="0">
+                <a:solidFill>
+                  <a:schemeClr val="tx1"/>
+                </a:solidFill>
+                <a:effectLst/>
+                <a:latin typeface="+mn-lt"/>
+                <a:ea typeface="+mn-ea"/>
+                <a:cs typeface="+mn-cs"/>
+              </a:rPr>
+              <a:t>y</a:t>
+            </a:r>
+            <a:r>
+              <a:rPr lang="ru-RU" sz="900" b="0" i="0" kern="1200" dirty="0">
+                <a:solidFill>
+                  <a:schemeClr val="tx1"/>
+                </a:solidFill>
+                <a:effectLst/>
+                <a:latin typeface="+mn-lt"/>
+                <a:ea typeface="+mn-ea"/>
+                <a:cs typeface="+mn-cs"/>
+              </a:rPr>
+              <a:t>2​,...,</a:t>
+            </a:r>
+            <a:r>
+              <a:rPr lang="ru-RU" sz="900" b="0" i="1" kern="1200" dirty="0" err="1">
+                <a:solidFill>
+                  <a:schemeClr val="tx1"/>
+                </a:solidFill>
+                <a:effectLst/>
+                <a:latin typeface="+mn-lt"/>
+                <a:ea typeface="+mn-ea"/>
+                <a:cs typeface="+mn-cs"/>
+              </a:rPr>
+              <a:t>yT</a:t>
+            </a:r>
+            <a:r>
+              <a:rPr lang="ru-RU" sz="900" b="0" i="0" kern="1200" dirty="0">
+                <a:solidFill>
+                  <a:schemeClr val="tx1"/>
+                </a:solidFill>
+                <a:effectLst/>
+                <a:latin typeface="+mn-lt"/>
+                <a:ea typeface="+mn-ea"/>
+                <a:cs typeface="+mn-cs"/>
+              </a:rPr>
+              <a:t>​ . Мы хотим построить прогноз на </a:t>
+            </a:r>
+            <a:r>
+              <a:rPr lang="ru-RU" sz="900" b="0" i="1" kern="1200" dirty="0">
+                <a:solidFill>
+                  <a:schemeClr val="tx1"/>
+                </a:solidFill>
+                <a:effectLst/>
+                <a:latin typeface="+mn-lt"/>
+                <a:ea typeface="+mn-ea"/>
+                <a:cs typeface="+mn-cs"/>
+              </a:rPr>
+              <a:t>h</a:t>
+            </a:r>
+            <a:r>
+              <a:rPr lang="ru-RU" sz="900" b="0" i="0" kern="1200" dirty="0">
+                <a:solidFill>
+                  <a:schemeClr val="tx1"/>
+                </a:solidFill>
+                <a:effectLst/>
+                <a:latin typeface="+mn-lt"/>
+                <a:ea typeface="+mn-ea"/>
+                <a:cs typeface="+mn-cs"/>
+              </a:rPr>
+              <a:t> шагов вперед с 95% доверительным интервалом.</a:t>
+            </a:r>
+          </a:p>
+          <a:p>
+            <a:r>
+              <a:rPr lang="ru-RU" sz="900" b="1" i="0" kern="1200" dirty="0">
+                <a:solidFill>
+                  <a:schemeClr val="tx1"/>
+                </a:solidFill>
+                <a:effectLst/>
+                <a:latin typeface="+mn-lt"/>
+                <a:ea typeface="+mn-ea"/>
+                <a:cs typeface="+mn-cs"/>
+              </a:rPr>
+              <a:t>Этапы конформного прогнозирования:</a:t>
+            </a:r>
+          </a:p>
+          <a:p>
+            <a:r>
+              <a:rPr lang="ru-RU" sz="900" b="1" i="0" kern="1200" dirty="0">
+                <a:solidFill>
+                  <a:schemeClr val="tx1"/>
+                </a:solidFill>
+                <a:effectLst/>
+                <a:latin typeface="+mn-lt"/>
+                <a:ea typeface="+mn-ea"/>
+                <a:cs typeface="+mn-cs"/>
+              </a:rPr>
+              <a:t>1. Разделение данных</a:t>
+            </a:r>
+          </a:p>
+          <a:p>
+            <a:r>
+              <a:rPr lang="ru-RU" sz="900" b="0" i="0" kern="1200" dirty="0">
+                <a:solidFill>
+                  <a:schemeClr val="tx1"/>
+                </a:solidFill>
+                <a:effectLst/>
+                <a:latin typeface="+mn-lt"/>
+                <a:ea typeface="+mn-ea"/>
+                <a:cs typeface="+mn-cs"/>
+              </a:rPr>
+              <a:t>Обучающая выборка : </a:t>
+            </a:r>
+            <a:r>
+              <a:rPr lang="ru-RU" sz="900" b="0" i="1" kern="1200" dirty="0">
+                <a:solidFill>
+                  <a:schemeClr val="tx1"/>
+                </a:solidFill>
+                <a:effectLst/>
+                <a:latin typeface="+mn-lt"/>
+                <a:ea typeface="+mn-ea"/>
+                <a:cs typeface="+mn-cs"/>
+              </a:rPr>
+              <a:t>y</a:t>
+            </a:r>
+            <a:r>
+              <a:rPr lang="ru-RU" sz="900" b="0" i="0" kern="1200" dirty="0">
+                <a:solidFill>
+                  <a:schemeClr val="tx1"/>
+                </a:solidFill>
+                <a:effectLst/>
+                <a:latin typeface="+mn-lt"/>
+                <a:ea typeface="+mn-ea"/>
+                <a:cs typeface="+mn-cs"/>
+              </a:rPr>
+              <a:t>1​,...,</a:t>
+            </a:r>
+            <a:r>
+              <a:rPr lang="ru-RU" sz="900" b="0" i="1" kern="1200" dirty="0" err="1">
+                <a:solidFill>
+                  <a:schemeClr val="tx1"/>
+                </a:solidFill>
+                <a:effectLst/>
+                <a:latin typeface="+mn-lt"/>
+                <a:ea typeface="+mn-ea"/>
+                <a:cs typeface="+mn-cs"/>
+              </a:rPr>
+              <a:t>yT</a:t>
+            </a:r>
+            <a:r>
+              <a:rPr lang="ru-RU" sz="900" b="0" i="0" kern="1200" dirty="0">
+                <a:solidFill>
+                  <a:schemeClr val="tx1"/>
+                </a:solidFill>
+                <a:effectLst/>
+                <a:latin typeface="+mn-lt"/>
+                <a:ea typeface="+mn-ea"/>
+                <a:cs typeface="+mn-cs"/>
+              </a:rPr>
+              <a:t>−</a:t>
+            </a:r>
+            <a:r>
+              <a:rPr lang="ru-RU" sz="900" b="0" i="1" kern="1200" dirty="0">
+                <a:solidFill>
+                  <a:schemeClr val="tx1"/>
+                </a:solidFill>
+                <a:effectLst/>
+                <a:latin typeface="+mn-lt"/>
+                <a:ea typeface="+mn-ea"/>
+                <a:cs typeface="+mn-cs"/>
+              </a:rPr>
+              <a:t>k</a:t>
+            </a:r>
+            <a:r>
+              <a:rPr lang="ru-RU" sz="900" b="0" i="0" kern="1200" dirty="0">
+                <a:solidFill>
+                  <a:schemeClr val="tx1"/>
+                </a:solidFill>
+                <a:effectLst/>
+                <a:latin typeface="+mn-lt"/>
+                <a:ea typeface="+mn-ea"/>
+                <a:cs typeface="+mn-cs"/>
+              </a:rPr>
+              <a:t>​</a:t>
+            </a:r>
+          </a:p>
+          <a:p>
+            <a:r>
+              <a:rPr lang="ru-RU" sz="900" b="0" i="0" kern="1200" dirty="0">
+                <a:solidFill>
+                  <a:schemeClr val="tx1"/>
+                </a:solidFill>
+                <a:effectLst/>
+                <a:latin typeface="+mn-lt"/>
+                <a:ea typeface="+mn-ea"/>
+                <a:cs typeface="+mn-cs"/>
+              </a:rPr>
+              <a:t>Калибровочная выборка : </a:t>
+            </a:r>
+            <a:r>
+              <a:rPr lang="ru-RU" sz="900" b="0" i="1" kern="1200" dirty="0">
+                <a:solidFill>
+                  <a:schemeClr val="tx1"/>
+                </a:solidFill>
+                <a:effectLst/>
+                <a:latin typeface="+mn-lt"/>
+                <a:ea typeface="+mn-ea"/>
+                <a:cs typeface="+mn-cs"/>
+              </a:rPr>
+              <a:t>yT</a:t>
+            </a:r>
+            <a:r>
+              <a:rPr lang="ru-RU" sz="900" b="0" i="0" kern="1200" dirty="0">
+                <a:solidFill>
+                  <a:schemeClr val="tx1"/>
+                </a:solidFill>
+                <a:effectLst/>
+                <a:latin typeface="+mn-lt"/>
+                <a:ea typeface="+mn-ea"/>
+                <a:cs typeface="+mn-cs"/>
+              </a:rPr>
+              <a:t>−</a:t>
+            </a:r>
+            <a:r>
+              <a:rPr lang="ru-RU" sz="900" b="0" i="1" kern="1200" dirty="0">
+                <a:solidFill>
+                  <a:schemeClr val="tx1"/>
+                </a:solidFill>
+                <a:effectLst/>
+                <a:latin typeface="+mn-lt"/>
+                <a:ea typeface="+mn-ea"/>
+                <a:cs typeface="+mn-cs"/>
+              </a:rPr>
+              <a:t>k</a:t>
+            </a:r>
+            <a:r>
+              <a:rPr lang="ru-RU" sz="900" b="0" i="0" kern="1200" dirty="0">
+                <a:solidFill>
+                  <a:schemeClr val="tx1"/>
+                </a:solidFill>
+                <a:effectLst/>
+                <a:latin typeface="+mn-lt"/>
+                <a:ea typeface="+mn-ea"/>
+                <a:cs typeface="+mn-cs"/>
+              </a:rPr>
+              <a:t>+1​,...,</a:t>
+            </a:r>
+            <a:r>
+              <a:rPr lang="ru-RU" sz="900" b="0" i="1" kern="1200" dirty="0" err="1">
+                <a:solidFill>
+                  <a:schemeClr val="tx1"/>
+                </a:solidFill>
+                <a:effectLst/>
+                <a:latin typeface="+mn-lt"/>
+                <a:ea typeface="+mn-ea"/>
+                <a:cs typeface="+mn-cs"/>
+              </a:rPr>
+              <a:t>yT</a:t>
+            </a:r>
+            <a:r>
+              <a:rPr lang="ru-RU" sz="900" b="0" i="0" kern="1200" dirty="0">
+                <a:solidFill>
+                  <a:schemeClr val="tx1"/>
+                </a:solidFill>
+                <a:effectLst/>
+                <a:latin typeface="+mn-lt"/>
+                <a:ea typeface="+mn-ea"/>
+                <a:cs typeface="+mn-cs"/>
+              </a:rPr>
+              <a:t>​</a:t>
+            </a:r>
+          </a:p>
+          <a:p>
+            <a:r>
+              <a:rPr lang="ru-RU" sz="900" b="1" i="0" kern="1200" dirty="0">
+                <a:solidFill>
+                  <a:schemeClr val="tx1"/>
+                </a:solidFill>
+                <a:effectLst/>
+                <a:latin typeface="+mn-lt"/>
+                <a:ea typeface="+mn-ea"/>
+                <a:cs typeface="+mn-cs"/>
+              </a:rPr>
+              <a:t>2. Обучение модели</a:t>
+            </a:r>
+          </a:p>
+          <a:p>
+            <a:r>
+              <a:rPr lang="ru-RU" sz="900" b="0" i="0" kern="1200" dirty="0">
+                <a:solidFill>
+                  <a:schemeClr val="tx1"/>
+                </a:solidFill>
+                <a:effectLst/>
+                <a:latin typeface="+mn-lt"/>
+                <a:ea typeface="+mn-ea"/>
+                <a:cs typeface="+mn-cs"/>
+              </a:rPr>
+              <a:t>Обучаем любую модель (например, </a:t>
+            </a:r>
+            <a:r>
+              <a:rPr lang="ru-RU" sz="900" b="0" i="0" kern="1200" dirty="0" err="1">
+                <a:solidFill>
+                  <a:schemeClr val="tx1"/>
+                </a:solidFill>
+                <a:effectLst/>
+                <a:latin typeface="+mn-lt"/>
+                <a:ea typeface="+mn-ea"/>
+                <a:cs typeface="+mn-cs"/>
+              </a:rPr>
+              <a:t>XGBoost</a:t>
+            </a:r>
+            <a:r>
+              <a:rPr lang="ru-RU" sz="900" b="0" i="0" kern="1200" dirty="0">
+                <a:solidFill>
+                  <a:schemeClr val="tx1"/>
+                </a:solidFill>
+                <a:effectLst/>
+                <a:latin typeface="+mn-lt"/>
+                <a:ea typeface="+mn-ea"/>
+                <a:cs typeface="+mn-cs"/>
+              </a:rPr>
+              <a:t>, </a:t>
+            </a:r>
+            <a:r>
+              <a:rPr lang="ru-RU" sz="900" b="0" i="0" kern="1200" dirty="0" err="1">
+                <a:solidFill>
+                  <a:schemeClr val="tx1"/>
+                </a:solidFill>
+                <a:effectLst/>
+                <a:latin typeface="+mn-lt"/>
+                <a:ea typeface="+mn-ea"/>
+                <a:cs typeface="+mn-cs"/>
+              </a:rPr>
+              <a:t>LightGBM</a:t>
+            </a:r>
+            <a:r>
+              <a:rPr lang="ru-RU" sz="900" b="0" i="0" kern="1200" dirty="0">
+                <a:solidFill>
+                  <a:schemeClr val="tx1"/>
+                </a:solidFill>
+                <a:effectLst/>
+                <a:latin typeface="+mn-lt"/>
+                <a:ea typeface="+mn-ea"/>
+                <a:cs typeface="+mn-cs"/>
+              </a:rPr>
+              <a:t>, ARIMA и др.) на обучающей выборке.</a:t>
+            </a:r>
+          </a:p>
+          <a:p>
+            <a:r>
+              <a:rPr lang="ru-RU" sz="900" b="1" i="0" kern="1200" dirty="0">
+                <a:solidFill>
+                  <a:schemeClr val="tx1"/>
+                </a:solidFill>
+                <a:effectLst/>
+                <a:latin typeface="+mn-lt"/>
+                <a:ea typeface="+mn-ea"/>
+                <a:cs typeface="+mn-cs"/>
+              </a:rPr>
+              <a:t>3. Вычисление </a:t>
+            </a:r>
+            <a:r>
+              <a:rPr lang="ru-RU" sz="900" b="1" i="0" kern="1200" dirty="0" err="1">
+                <a:solidFill>
+                  <a:schemeClr val="tx1"/>
+                </a:solidFill>
+                <a:effectLst/>
+                <a:latin typeface="+mn-lt"/>
+                <a:ea typeface="+mn-ea"/>
+                <a:cs typeface="+mn-cs"/>
+              </a:rPr>
+              <a:t>неконформности</a:t>
+            </a:r>
+            <a:endParaRPr lang="ru-RU" sz="900" b="1" i="0" kern="1200" dirty="0">
+              <a:solidFill>
+                <a:schemeClr val="tx1"/>
+              </a:solidFill>
+              <a:effectLst/>
+              <a:latin typeface="+mn-lt"/>
+              <a:ea typeface="+mn-ea"/>
+              <a:cs typeface="+mn-cs"/>
+            </a:endParaRPr>
+          </a:p>
+          <a:p>
+            <a:r>
+              <a:rPr lang="ru-RU" sz="900" b="0" i="0" kern="1200" dirty="0">
+                <a:solidFill>
+                  <a:schemeClr val="tx1"/>
+                </a:solidFill>
+                <a:effectLst/>
+                <a:latin typeface="+mn-lt"/>
+                <a:ea typeface="+mn-ea"/>
+                <a:cs typeface="+mn-cs"/>
+              </a:rPr>
+              <a:t>Для каждого элемента из калибровочной выборки вычисляем ошибку прогноза (например, абсолютную):</a:t>
+            </a:r>
+          </a:p>
+          <a:p>
+            <a:r>
+              <a:rPr lang="ru-RU" sz="900" b="0" i="0" kern="1200" dirty="0" err="1">
+                <a:solidFill>
+                  <a:schemeClr val="tx1"/>
+                </a:solidFill>
+                <a:effectLst/>
+                <a:latin typeface="+mn-lt"/>
+                <a:ea typeface="+mn-ea"/>
+                <a:cs typeface="+mn-cs"/>
+              </a:rPr>
+              <a:t>error</a:t>
+            </a:r>
+            <a:r>
+              <a:rPr lang="ru-RU" sz="900" b="0" i="1" kern="1200" dirty="0" err="1">
+                <a:solidFill>
+                  <a:schemeClr val="tx1"/>
+                </a:solidFill>
+                <a:effectLst/>
+                <a:latin typeface="+mn-lt"/>
+                <a:ea typeface="+mn-ea"/>
+                <a:cs typeface="+mn-cs"/>
+              </a:rPr>
+              <a:t>i</a:t>
+            </a:r>
+            <a:r>
+              <a:rPr lang="ru-RU" sz="900" b="0" i="0" kern="1200" dirty="0">
+                <a:solidFill>
+                  <a:schemeClr val="tx1"/>
+                </a:solidFill>
+                <a:effectLst/>
+                <a:latin typeface="+mn-lt"/>
+                <a:ea typeface="+mn-ea"/>
+                <a:cs typeface="+mn-cs"/>
+              </a:rPr>
+              <a:t>​=∣</a:t>
+            </a:r>
+            <a:r>
+              <a:rPr lang="ru-RU" sz="900" b="0" i="1" kern="1200" dirty="0" err="1">
+                <a:solidFill>
+                  <a:schemeClr val="tx1"/>
+                </a:solidFill>
+                <a:effectLst/>
+                <a:latin typeface="+mn-lt"/>
+                <a:ea typeface="+mn-ea"/>
+                <a:cs typeface="+mn-cs"/>
+              </a:rPr>
+              <a:t>yi</a:t>
+            </a:r>
+            <a:r>
+              <a:rPr lang="ru-RU" sz="900" b="0" i="0" kern="1200" dirty="0">
+                <a:solidFill>
+                  <a:schemeClr val="tx1"/>
+                </a:solidFill>
+                <a:effectLst/>
+                <a:latin typeface="+mn-lt"/>
+                <a:ea typeface="+mn-ea"/>
+                <a:cs typeface="+mn-cs"/>
+              </a:rPr>
+              <a:t>​−</a:t>
+            </a:r>
+            <a:r>
+              <a:rPr lang="ru-RU" sz="900" b="0" i="1" kern="1200" dirty="0">
+                <a:solidFill>
+                  <a:schemeClr val="tx1"/>
+                </a:solidFill>
+                <a:effectLst/>
+                <a:latin typeface="+mn-lt"/>
+                <a:ea typeface="+mn-ea"/>
+                <a:cs typeface="+mn-cs"/>
+              </a:rPr>
+              <a:t>y</a:t>
+            </a:r>
+            <a:r>
+              <a:rPr lang="ru-RU" sz="900" b="0" i="0" kern="1200" dirty="0">
+                <a:solidFill>
+                  <a:schemeClr val="tx1"/>
+                </a:solidFill>
+                <a:effectLst/>
+                <a:latin typeface="+mn-lt"/>
+                <a:ea typeface="+mn-ea"/>
+                <a:cs typeface="+mn-cs"/>
+              </a:rPr>
+              <a:t>^​</a:t>
+            </a:r>
+            <a:r>
+              <a:rPr lang="ru-RU" sz="900" b="0" i="1" kern="1200" dirty="0">
+                <a:solidFill>
+                  <a:schemeClr val="tx1"/>
+                </a:solidFill>
+                <a:effectLst/>
+                <a:latin typeface="+mn-lt"/>
+                <a:ea typeface="+mn-ea"/>
+                <a:cs typeface="+mn-cs"/>
+              </a:rPr>
+              <a:t>i</a:t>
+            </a:r>
+            <a:r>
+              <a:rPr lang="ru-RU" sz="900" b="0" i="0" kern="1200" dirty="0">
+                <a:solidFill>
+                  <a:schemeClr val="tx1"/>
+                </a:solidFill>
+                <a:effectLst/>
+                <a:latin typeface="+mn-lt"/>
+                <a:ea typeface="+mn-ea"/>
+                <a:cs typeface="+mn-cs"/>
+              </a:rPr>
+              <a:t>​∣</a:t>
+            </a:r>
+          </a:p>
+          <a:p>
+            <a:r>
+              <a:rPr lang="ru-RU" sz="900" b="0" i="0" kern="1200" dirty="0">
+                <a:solidFill>
+                  <a:schemeClr val="tx1"/>
+                </a:solidFill>
+                <a:effectLst/>
+                <a:latin typeface="+mn-lt"/>
+                <a:ea typeface="+mn-ea"/>
+                <a:cs typeface="+mn-cs"/>
+              </a:rPr>
+              <a:t>Это и есть </a:t>
+            </a:r>
+            <a:r>
+              <a:rPr lang="ru-RU" sz="900" b="0" i="0" kern="1200" dirty="0" err="1">
+                <a:solidFill>
+                  <a:schemeClr val="tx1"/>
+                </a:solidFill>
+                <a:effectLst/>
+                <a:latin typeface="+mn-lt"/>
+                <a:ea typeface="+mn-ea"/>
+                <a:cs typeface="+mn-cs"/>
+              </a:rPr>
+              <a:t>score</a:t>
+            </a:r>
+            <a:r>
+              <a:rPr lang="ru-RU" sz="900" b="0" i="0" kern="1200" dirty="0">
+                <a:solidFill>
+                  <a:schemeClr val="tx1"/>
+                </a:solidFill>
+                <a:effectLst/>
+                <a:latin typeface="+mn-lt"/>
+                <a:ea typeface="+mn-ea"/>
+                <a:cs typeface="+mn-cs"/>
+              </a:rPr>
+              <a:t> </a:t>
+            </a:r>
+            <a:r>
+              <a:rPr lang="ru-RU" sz="900" b="0" i="0" kern="1200" dirty="0" err="1">
+                <a:solidFill>
+                  <a:schemeClr val="tx1"/>
+                </a:solidFill>
+                <a:effectLst/>
+                <a:latin typeface="+mn-lt"/>
+                <a:ea typeface="+mn-ea"/>
+                <a:cs typeface="+mn-cs"/>
+              </a:rPr>
+              <a:t>неконформности</a:t>
+            </a:r>
+            <a:r>
+              <a:rPr lang="ru-RU" sz="900" b="0" i="0" kern="1200" dirty="0">
+                <a:solidFill>
+                  <a:schemeClr val="tx1"/>
+                </a:solidFill>
+                <a:effectLst/>
+                <a:latin typeface="+mn-lt"/>
+                <a:ea typeface="+mn-ea"/>
+                <a:cs typeface="+mn-cs"/>
+              </a:rPr>
+              <a:t> .</a:t>
+            </a:r>
+          </a:p>
+          <a:p>
+            <a:r>
+              <a:rPr lang="ru-RU" sz="900" b="1" i="0" kern="1200" dirty="0">
+                <a:solidFill>
+                  <a:schemeClr val="tx1"/>
+                </a:solidFill>
+                <a:effectLst/>
+                <a:latin typeface="+mn-lt"/>
+                <a:ea typeface="+mn-ea"/>
+                <a:cs typeface="+mn-cs"/>
+              </a:rPr>
+              <a:t>4. Нахождение квантили</a:t>
+            </a:r>
+          </a:p>
+          <a:p>
+            <a:r>
+              <a:rPr lang="ru-RU" sz="900" b="0" i="0" kern="1200" dirty="0">
+                <a:solidFill>
+                  <a:schemeClr val="tx1"/>
+                </a:solidFill>
+                <a:effectLst/>
+                <a:latin typeface="+mn-lt"/>
+                <a:ea typeface="+mn-ea"/>
+                <a:cs typeface="+mn-cs"/>
+              </a:rPr>
+              <a:t>Вычисляем </a:t>
+            </a:r>
+            <a:r>
+              <a:rPr lang="ru-RU" sz="900" b="0" i="1" kern="1200" dirty="0">
+                <a:solidFill>
+                  <a:schemeClr val="tx1"/>
+                </a:solidFill>
+                <a:effectLst/>
+                <a:latin typeface="+mn-lt"/>
+                <a:ea typeface="+mn-ea"/>
+                <a:cs typeface="+mn-cs"/>
+              </a:rPr>
+              <a:t>qα</a:t>
+            </a:r>
+            <a:r>
+              <a:rPr lang="ru-RU" sz="900" b="0" i="0" kern="1200" dirty="0">
+                <a:solidFill>
+                  <a:schemeClr val="tx1"/>
+                </a:solidFill>
+                <a:effectLst/>
+                <a:latin typeface="+mn-lt"/>
+                <a:ea typeface="+mn-ea"/>
+                <a:cs typeface="+mn-cs"/>
+              </a:rPr>
+              <a:t>​ — (1−</a:t>
+            </a:r>
+            <a:r>
+              <a:rPr lang="ru-RU" sz="900" b="0" i="1" kern="1200" dirty="0">
+                <a:solidFill>
+                  <a:schemeClr val="tx1"/>
+                </a:solidFill>
+                <a:effectLst/>
+                <a:latin typeface="+mn-lt"/>
+                <a:ea typeface="+mn-ea"/>
+                <a:cs typeface="+mn-cs"/>
+              </a:rPr>
+              <a:t>α</a:t>
+            </a:r>
+            <a:r>
+              <a:rPr lang="ru-RU" sz="900" b="0" i="0" kern="1200" dirty="0">
+                <a:solidFill>
+                  <a:schemeClr val="tx1"/>
+                </a:solidFill>
+                <a:effectLst/>
+                <a:latin typeface="+mn-lt"/>
+                <a:ea typeface="+mn-ea"/>
+                <a:cs typeface="+mn-cs"/>
+              </a:rPr>
+              <a:t>) -квантиль всех значений </a:t>
+            </a:r>
+            <a:r>
+              <a:rPr lang="ru-RU" sz="900" b="0" i="0" kern="1200" dirty="0" err="1">
+                <a:solidFill>
+                  <a:schemeClr val="tx1"/>
+                </a:solidFill>
+                <a:effectLst/>
+                <a:latin typeface="+mn-lt"/>
+                <a:ea typeface="+mn-ea"/>
+                <a:cs typeface="+mn-cs"/>
+              </a:rPr>
+              <a:t>error</a:t>
+            </a:r>
+            <a:r>
+              <a:rPr lang="ru-RU" sz="900" b="0" i="1" kern="1200" dirty="0" err="1">
+                <a:solidFill>
+                  <a:schemeClr val="tx1"/>
+                </a:solidFill>
+                <a:effectLst/>
+                <a:latin typeface="+mn-lt"/>
+                <a:ea typeface="+mn-ea"/>
+                <a:cs typeface="+mn-cs"/>
+              </a:rPr>
+              <a:t>i</a:t>
+            </a:r>
+            <a:r>
+              <a:rPr lang="ru-RU" sz="900" b="0" i="0" kern="1200" dirty="0">
+                <a:solidFill>
+                  <a:schemeClr val="tx1"/>
+                </a:solidFill>
+                <a:effectLst/>
+                <a:latin typeface="+mn-lt"/>
+                <a:ea typeface="+mn-ea"/>
+                <a:cs typeface="+mn-cs"/>
+              </a:rPr>
+              <a:t>​ , где </a:t>
+            </a:r>
+            <a:r>
+              <a:rPr lang="ru-RU" sz="900" b="0" i="1" kern="1200" dirty="0">
+                <a:solidFill>
+                  <a:schemeClr val="tx1"/>
+                </a:solidFill>
+                <a:effectLst/>
+                <a:latin typeface="+mn-lt"/>
+                <a:ea typeface="+mn-ea"/>
+                <a:cs typeface="+mn-cs"/>
+              </a:rPr>
+              <a:t>α</a:t>
+            </a:r>
+            <a:r>
+              <a:rPr lang="ru-RU" sz="900" b="0" i="0" kern="1200" dirty="0">
+                <a:solidFill>
+                  <a:schemeClr val="tx1"/>
+                </a:solidFill>
+                <a:effectLst/>
+                <a:latin typeface="+mn-lt"/>
+                <a:ea typeface="+mn-ea"/>
+                <a:cs typeface="+mn-cs"/>
+              </a:rPr>
+              <a:t> — уровень доверия.</a:t>
+            </a:r>
+          </a:p>
+          <a:p>
+            <a:r>
+              <a:rPr lang="ru-RU" sz="900" b="0" i="0" kern="1200" dirty="0">
+                <a:solidFill>
+                  <a:schemeClr val="tx1"/>
+                </a:solidFill>
+                <a:effectLst/>
+                <a:latin typeface="+mn-lt"/>
+                <a:ea typeface="+mn-ea"/>
+                <a:cs typeface="+mn-cs"/>
+              </a:rPr>
+              <a:t>Например:</a:t>
+            </a:r>
+          </a:p>
+          <a:p>
+            <a:endParaRPr lang="ru-RU" dirty="0"/>
+          </a:p>
+        </p:txBody>
+      </p:sp>
+      <p:sp>
+        <p:nvSpPr>
+          <p:cNvPr id="4" name="Номер слайда 3"/>
+          <p:cNvSpPr>
+            <a:spLocks noGrp="1"/>
+          </p:cNvSpPr>
+          <p:nvPr>
+            <p:ph type="sldNum" sz="quarter" idx="10"/>
+          </p:nvPr>
+        </p:nvSpPr>
+        <p:spPr/>
+        <p:txBody>
+          <a:bodyPr/>
+          <a:lstStyle/>
+          <a:p>
+            <a:fld id="{9DA1EE30-E435-D745-B23A-FF31C831763F}" type="slidenum">
+              <a:rPr lang="ru-RU" smtClean="0"/>
+              <a:t>16</a:t>
+            </a:fld>
+            <a:endParaRPr lang="ru-RU"/>
+          </a:p>
+        </p:txBody>
+      </p:sp>
+    </p:spTree>
+    <p:extLst>
+      <p:ext uri="{BB962C8B-B14F-4D97-AF65-F5344CB8AC3E}">
+        <p14:creationId xmlns:p14="http://schemas.microsoft.com/office/powerpoint/2010/main" val="1039098964"/>
+      </p:ext>
+    </p:extLst>
+  </p:cSld>
+  <p:clrMapOvr>
+    <a:masterClrMapping/>
+  </p:clrMapOvr>
+</p:notes>
+</file>
+
 <file path=ppt/slideLayouts/slideLayout1.xml><?xml version="1.0" encoding="utf-8"?>
 <p:sldLayout xmlns:a="http://schemas.openxmlformats.org/drawingml/2006/main" xmlns:r="http://schemas.openxmlformats.org/officeDocument/2006/relationships" xmlns:p="http://schemas.openxmlformats.org/presentationml/2006/main" type="title" preserve="1">
   <p:cSld name="Титульный слайд">
@@ -639,7 +3170,7 @@
           <a:p>
             <a:fld id="{44343DC6-30E4-4569-999A-C703F926F2AF}" type="datetimeFigureOut">
               <a:rPr lang="en-US" smtClean="0"/>
-              <a:t>8/20/2025</a:t>
+              <a:t>4/9/2026</a:t>
             </a:fld>
             <a:endParaRPr lang="en-US"/>
           </a:p>
@@ -839,7 +3370,7 @@
           <a:p>
             <a:fld id="{44343DC6-30E4-4569-999A-C703F926F2AF}" type="datetimeFigureOut">
               <a:rPr lang="en-US" smtClean="0"/>
-              <a:t>8/20/2025</a:t>
+              <a:t>4/9/2026</a:t>
             </a:fld>
             <a:endParaRPr lang="en-US"/>
           </a:p>
@@ -1049,7 +3580,7 @@
           <a:p>
             <a:fld id="{44343DC6-30E4-4569-999A-C703F926F2AF}" type="datetimeFigureOut">
               <a:rPr lang="en-US" smtClean="0"/>
-              <a:t>8/20/2025</a:t>
+              <a:t>4/9/2026</a:t>
             </a:fld>
             <a:endParaRPr lang="en-US"/>
           </a:p>
@@ -1249,7 +3780,7 @@
           <a:p>
             <a:fld id="{44343DC6-30E4-4569-999A-C703F926F2AF}" type="datetimeFigureOut">
               <a:rPr lang="en-US" smtClean="0"/>
-              <a:t>8/20/2025</a:t>
+              <a:t>4/9/2026</a:t>
             </a:fld>
             <a:endParaRPr lang="en-US"/>
           </a:p>
@@ -1525,7 +4056,7 @@
           <a:p>
             <a:fld id="{44343DC6-30E4-4569-999A-C703F926F2AF}" type="datetimeFigureOut">
               <a:rPr lang="en-US" smtClean="0"/>
-              <a:t>8/20/2025</a:t>
+              <a:t>4/9/2026</a:t>
             </a:fld>
             <a:endParaRPr lang="en-US"/>
           </a:p>
@@ -1793,7 +4324,7 @@
           <a:p>
             <a:fld id="{44343DC6-30E4-4569-999A-C703F926F2AF}" type="datetimeFigureOut">
               <a:rPr lang="en-US" smtClean="0"/>
-              <a:t>8/20/2025</a:t>
+              <a:t>4/9/2026</a:t>
             </a:fld>
             <a:endParaRPr lang="en-US"/>
           </a:p>
@@ -2208,7 +4739,7 @@
           <a:p>
             <a:fld id="{44343DC6-30E4-4569-999A-C703F926F2AF}" type="datetimeFigureOut">
               <a:rPr lang="en-US" smtClean="0"/>
-              <a:t>8/20/2025</a:t>
+              <a:t>4/9/2026</a:t>
             </a:fld>
             <a:endParaRPr lang="en-US"/>
           </a:p>
@@ -2350,7 +4881,7 @@
           <a:p>
             <a:fld id="{44343DC6-30E4-4569-999A-C703F926F2AF}" type="datetimeFigureOut">
               <a:rPr lang="en-US" smtClean="0"/>
-              <a:t>8/20/2025</a:t>
+              <a:t>4/9/2026</a:t>
             </a:fld>
             <a:endParaRPr lang="en-US"/>
           </a:p>
@@ -2463,7 +4994,7 @@
           <a:p>
             <a:fld id="{44343DC6-30E4-4569-999A-C703F926F2AF}" type="datetimeFigureOut">
               <a:rPr lang="en-US" smtClean="0"/>
-              <a:t>8/20/2025</a:t>
+              <a:t>4/9/2026</a:t>
             </a:fld>
             <a:endParaRPr lang="en-US"/>
           </a:p>
@@ -2776,7 +5307,7 @@
           <a:p>
             <a:fld id="{44343DC6-30E4-4569-999A-C703F926F2AF}" type="datetimeFigureOut">
               <a:rPr lang="en-US" smtClean="0"/>
-              <a:t>8/20/2025</a:t>
+              <a:t>4/9/2026</a:t>
             </a:fld>
             <a:endParaRPr lang="en-US"/>
           </a:p>
@@ -3065,7 +5596,7 @@
           <a:p>
             <a:fld id="{44343DC6-30E4-4569-999A-C703F926F2AF}" type="datetimeFigureOut">
               <a:rPr lang="en-US" smtClean="0"/>
-              <a:t>8/20/2025</a:t>
+              <a:t>4/9/2026</a:t>
             </a:fld>
             <a:endParaRPr lang="en-US"/>
           </a:p>
@@ -3308,7 +5839,7 @@
           <a:p>
             <a:fld id="{44343DC6-30E4-4569-999A-C703F926F2AF}" type="datetimeFigureOut">
               <a:rPr lang="en-US" smtClean="0"/>
-              <a:t>8/20/2025</a:t>
+              <a:t>4/9/2026</a:t>
             </a:fld>
             <a:endParaRPr lang="en-US"/>
           </a:p>
@@ -3776,6 +6307,13 @@
   <p:clrMapOvr>
     <a:masterClrMapping/>
   </p:clrMapOvr>
+  <p:timing>
+    <p:tnLst>
+      <p:par>
+        <p:cTn id="1" dur="indefinite" restart="never" nodeType="tmRoot"/>
+      </p:par>
+    </p:tnLst>
+  </p:timing>
 </p:sld>
 </file>
 
@@ -4198,6 +6736,13 @@
   <p:clrMapOvr>
     <a:masterClrMapping/>
   </p:clrMapOvr>
+  <p:timing>
+    <p:tnLst>
+      <p:par>
+        <p:cTn id="1" dur="indefinite" restart="never" nodeType="tmRoot"/>
+      </p:par>
+    </p:tnLst>
+  </p:timing>
 </p:sld>
 </file>
 
@@ -4419,6 +6964,13 @@
   <p:clrMapOvr>
     <a:masterClrMapping/>
   </p:clrMapOvr>
+  <p:timing>
+    <p:tnLst>
+      <p:par>
+        <p:cTn id="1" dur="indefinite" restart="never" nodeType="tmRoot"/>
+      </p:par>
+    </p:tnLst>
+  </p:timing>
 </p:sld>
 </file>
 
@@ -4866,345 +7418,17 @@
   <p:clrMapOvr>
     <a:masterClrMapping/>
   </p:clrMapOvr>
+  <p:timing>
+    <p:tnLst>
+      <p:par>
+        <p:cTn id="1" dur="indefinite" restart="never" nodeType="tmRoot"/>
+      </p:par>
+    </p:tnLst>
+  </p:timing>
 </p:sld>
 </file>
 
 <file path=ppt/slides/slide13.xml><?xml version="1.0" encoding="utf-8"?>
-<p:sld xmlns:a="http://schemas.openxmlformats.org/drawingml/2006/main" xmlns:r="http://schemas.openxmlformats.org/officeDocument/2006/relationships" xmlns:p="http://schemas.openxmlformats.org/presentationml/2006/main">
-  <p:cSld>
-    <p:spTree>
-      <p:nvGrpSpPr>
-        <p:cNvPr id="1" name=""/>
-        <p:cNvGrpSpPr/>
-        <p:nvPr/>
-      </p:nvGrpSpPr>
-      <p:grpSpPr>
-        <a:xfrm>
-          <a:off x="0" y="0"/>
-          <a:ext cx="0" cy="0"/>
-          <a:chOff x="0" y="0"/>
-          <a:chExt cx="0" cy="0"/>
-        </a:xfrm>
-      </p:grpSpPr>
-      <p:sp>
-        <p:nvSpPr>
-          <p:cNvPr id="2" name="Заголовок 1"/>
-          <p:cNvSpPr>
-            <a:spLocks noGrp="1"/>
-          </p:cNvSpPr>
-          <p:nvPr>
-            <p:ph type="title"/>
-          </p:nvPr>
-        </p:nvSpPr>
-        <p:spPr>
-          <a:xfrm>
-            <a:off x="216152" y="120038"/>
-            <a:ext cx="10991850" cy="635000"/>
-          </a:xfrm>
-        </p:spPr>
-        <p:txBody>
-          <a:bodyPr>
-            <a:normAutofit fontScale="90000"/>
-          </a:bodyPr>
-          <a:lstStyle/>
-          <a:p>
-            <a:pPr algn="ctr"/>
-            <a:r>
-              <a:rPr lang="ru-RU" dirty="0"/>
-              <a:t>Многошаговые особенности оценки точности</a:t>
-            </a:r>
-          </a:p>
-        </p:txBody>
-      </p:sp>
-      <p:sp>
-        <p:nvSpPr>
-          <p:cNvPr id="3" name="Объект 2"/>
-          <p:cNvSpPr>
-            <a:spLocks noGrp="1"/>
-          </p:cNvSpPr>
-          <p:nvPr>
-            <p:ph idx="1"/>
-          </p:nvPr>
-        </p:nvSpPr>
-        <p:spPr>
-          <a:xfrm>
-            <a:off x="138193" y="662857"/>
-            <a:ext cx="11706225" cy="5176838"/>
-          </a:xfrm>
-        </p:spPr>
-        <p:txBody>
-          <a:bodyPr>
-            <a:normAutofit/>
-          </a:bodyPr>
-          <a:lstStyle/>
-          <a:p>
-            <a:r>
-              <a:rPr lang="ru-RU" sz="2400" dirty="0"/>
-              <a:t>Статические (оценка на следующем шаге опирается на истинные значения предыдущих шагов)</a:t>
-            </a:r>
-          </a:p>
-          <a:p>
-            <a:r>
-              <a:rPr lang="ru-RU" sz="2400" dirty="0"/>
-              <a:t>Динамическими (рекурсивным, оценка на следующем шаге опирается на оценки на предыдущих шагах ) </a:t>
-            </a:r>
-          </a:p>
-          <a:p>
-            <a:pPr lvl="1"/>
-            <a:r>
-              <a:rPr lang="ru-RU" sz="2000" dirty="0"/>
-              <a:t>Могут быть более сложные варианты, напр. оценка опирается  на моды распределений оценок на предыдущих шагах</a:t>
-            </a:r>
-          </a:p>
-        </p:txBody>
-      </p:sp>
-      <p:sp>
-        <p:nvSpPr>
-          <p:cNvPr id="4" name="AutoShape 2" descr="Demonstration of iterative, autoregressive forecasting | Download  Scientific Diagram"/>
-          <p:cNvSpPr>
-            <a:spLocks noChangeAspect="1" noChangeArrowheads="1"/>
-          </p:cNvSpPr>
-          <p:nvPr/>
-        </p:nvSpPr>
-        <p:spPr bwMode="auto">
-          <a:xfrm>
-            <a:off x="155575" y="-144463"/>
-            <a:ext cx="304800" cy="304801"/>
-          </a:xfrm>
-          <a:prstGeom prst="rect">
-            <a:avLst/>
-          </a:prstGeom>
-          <a:noFill/>
-          <a:extLst>
-            <a:ext uri="{909E8E84-426E-40DD-AFC4-6F175D3DCCD1}">
-              <a14:hiddenFill xmlns:a14="http://schemas.microsoft.com/office/drawing/2010/main">
-                <a:solidFill>
-                  <a:srgbClr val="FFFFFF"/>
-                </a:solidFill>
-              </a14:hiddenFill>
-            </a:ext>
-          </a:extLst>
-        </p:spPr>
-        <p:txBody>
-          <a:bodyPr vert="horz" wrap="square" lIns="91440" tIns="45720" rIns="91440" bIns="45720" numCol="1" anchor="t" anchorCtr="0" compatLnSpc="1">
-            <a:prstTxWarp prst="textNoShape">
-              <a:avLst/>
-            </a:prstTxWarp>
-          </a:bodyPr>
-          <a:lstStyle/>
-          <a:p>
-            <a:endParaRPr lang="ru-RU"/>
-          </a:p>
-        </p:txBody>
-      </p:sp>
-      <p:pic>
-        <p:nvPicPr>
-          <p:cNvPr id="5124" name="Picture 4" descr="https://www.researchgate.net/publication/381324371/figure/fig1/AS:11431281259462026@1720491044356/Demonstration-of-iterative-autoregressive-forecasting_W640.jpg"/>
-          <p:cNvPicPr>
-            <a:picLocks noChangeAspect="1" noChangeArrowheads="1"/>
-          </p:cNvPicPr>
-          <p:nvPr/>
-        </p:nvPicPr>
-        <p:blipFill>
-          <a:blip r:embed="rId2">
-            <a:extLst>
-              <a:ext uri="{28A0092B-C50C-407E-A947-70E740481C1C}">
-                <a14:useLocalDpi xmlns:a14="http://schemas.microsoft.com/office/drawing/2010/main" val="0"/>
-              </a:ext>
-            </a:extLst>
-          </a:blip>
-          <a:srcRect/>
-          <a:stretch>
-            <a:fillRect/>
-          </a:stretch>
-        </p:blipFill>
-        <p:spPr bwMode="auto">
-          <a:xfrm>
-            <a:off x="307975" y="3758271"/>
-            <a:ext cx="5644598" cy="2716464"/>
-          </a:xfrm>
-          <a:prstGeom prst="rect">
-            <a:avLst/>
-          </a:prstGeom>
-          <a:noFill/>
-          <a:extLst>
-            <a:ext uri="{909E8E84-426E-40DD-AFC4-6F175D3DCCD1}">
-              <a14:hiddenFill xmlns:a14="http://schemas.microsoft.com/office/drawing/2010/main">
-                <a:solidFill>
-                  <a:srgbClr val="FFFFFF"/>
-                </a:solidFill>
-              </a14:hiddenFill>
-            </a:ext>
-          </a:extLst>
-        </p:spPr>
-      </p:pic>
-      <p:sp>
-        <p:nvSpPr>
-          <p:cNvPr id="6" name="Прямоугольник 5"/>
-          <p:cNvSpPr/>
-          <p:nvPr/>
-        </p:nvSpPr>
-        <p:spPr>
-          <a:xfrm>
-            <a:off x="216152" y="2687617"/>
-            <a:ext cx="6194425" cy="923330"/>
-          </a:xfrm>
-          <a:prstGeom prst="rect">
-            <a:avLst/>
-          </a:prstGeom>
-        </p:spPr>
-        <p:txBody>
-          <a:bodyPr wrap="square">
-            <a:spAutoFit/>
-          </a:bodyPr>
-          <a:lstStyle/>
-          <a:p>
-            <a:r>
-              <a:rPr lang="ru-RU" dirty="0"/>
-              <a:t>Динамическая оценка  предполагает использование предсказанных данных вместо истинных в окне предсказания</a:t>
-            </a:r>
-          </a:p>
-        </p:txBody>
-      </p:sp>
-      <p:pic>
-        <p:nvPicPr>
-          <p:cNvPr id="5126" name="Picture 6" descr="https://skforecast.org/0.7.0/img/diagram-single-step-forecasting.png"/>
-          <p:cNvPicPr>
-            <a:picLocks noChangeAspect="1" noChangeArrowheads="1"/>
-          </p:cNvPicPr>
-          <p:nvPr/>
-        </p:nvPicPr>
-        <p:blipFill>
-          <a:blip r:embed="rId3">
-            <a:extLst>
-              <a:ext uri="{28A0092B-C50C-407E-A947-70E740481C1C}">
-                <a14:useLocalDpi xmlns:a14="http://schemas.microsoft.com/office/drawing/2010/main" val="0"/>
-              </a:ext>
-            </a:extLst>
-          </a:blip>
-          <a:srcRect/>
-          <a:stretch>
-            <a:fillRect/>
-          </a:stretch>
-        </p:blipFill>
-        <p:spPr bwMode="auto">
-          <a:xfrm>
-            <a:off x="6547605" y="3528275"/>
-            <a:ext cx="5374772" cy="2890633"/>
-          </a:xfrm>
-          <a:prstGeom prst="rect">
-            <a:avLst/>
-          </a:prstGeom>
-          <a:noFill/>
-          <a:extLst>
-            <a:ext uri="{909E8E84-426E-40DD-AFC4-6F175D3DCCD1}">
-              <a14:hiddenFill xmlns:a14="http://schemas.microsoft.com/office/drawing/2010/main">
-                <a:solidFill>
-                  <a:srgbClr val="FFFFFF"/>
-                </a:solidFill>
-              </a14:hiddenFill>
-            </a:ext>
-          </a:extLst>
-        </p:spPr>
-      </p:pic>
-      <p:sp>
-        <p:nvSpPr>
-          <p:cNvPr id="9" name="Прямоугольник 8"/>
-          <p:cNvSpPr/>
-          <p:nvPr/>
-        </p:nvSpPr>
-        <p:spPr>
-          <a:xfrm>
-            <a:off x="6364899" y="2826117"/>
-            <a:ext cx="5506601" cy="646331"/>
-          </a:xfrm>
-          <a:prstGeom prst="rect">
-            <a:avLst/>
-          </a:prstGeom>
-        </p:spPr>
-        <p:txBody>
-          <a:bodyPr wrap="square">
-            <a:spAutoFit/>
-          </a:bodyPr>
-          <a:lstStyle/>
-          <a:p>
-            <a:r>
-              <a:rPr lang="ru-RU" dirty="0"/>
-              <a:t>Статическая оценка предполагает использование известных данных в исторических данных </a:t>
-            </a:r>
-          </a:p>
-        </p:txBody>
-      </p:sp>
-      <p:sp>
-        <p:nvSpPr>
-          <p:cNvPr id="7" name="Прямоугольник 6"/>
-          <p:cNvSpPr/>
-          <p:nvPr/>
-        </p:nvSpPr>
-        <p:spPr>
-          <a:xfrm>
-            <a:off x="5991306" y="6474735"/>
-            <a:ext cx="6096000" cy="276999"/>
-          </a:xfrm>
-          <a:prstGeom prst="rect">
-            <a:avLst/>
-          </a:prstGeom>
-        </p:spPr>
-        <p:txBody>
-          <a:bodyPr>
-            <a:spAutoFit/>
-          </a:bodyPr>
-          <a:lstStyle/>
-          <a:p>
-            <a:r>
-              <a:rPr lang="ru-RU" sz="1200" dirty="0"/>
-              <a:t>https://skforecast.org/0.7.0/introduction-forecasting/introduction-forecasting</a:t>
-            </a:r>
-          </a:p>
-        </p:txBody>
-      </p:sp>
-      <p:sp>
-        <p:nvSpPr>
-          <p:cNvPr id="8" name="Прямоугольник 7"/>
-          <p:cNvSpPr/>
-          <p:nvPr/>
-        </p:nvSpPr>
-        <p:spPr>
-          <a:xfrm>
-            <a:off x="60433" y="6474735"/>
-            <a:ext cx="6561083" cy="276999"/>
-          </a:xfrm>
-          <a:prstGeom prst="rect">
-            <a:avLst/>
-          </a:prstGeom>
-        </p:spPr>
-        <p:txBody>
-          <a:bodyPr wrap="square">
-            <a:spAutoFit/>
-          </a:bodyPr>
-          <a:lstStyle/>
-          <a:p>
-            <a:r>
-              <a:rPr lang="ru-RU" sz="1200" dirty="0"/>
-              <a:t>https://timeweb.cloud/tutorials/python/prognozirovanie-vremennyh-ryadov-python-3</a:t>
-            </a:r>
-          </a:p>
-        </p:txBody>
-      </p:sp>
-    </p:spTree>
-    <p:extLst>
-      <p:ext uri="{BB962C8B-B14F-4D97-AF65-F5344CB8AC3E}">
-        <p14:creationId xmlns:p14="http://schemas.microsoft.com/office/powerpoint/2010/main" val="330774535"/>
-      </p:ext>
-    </p:extLst>
-  </p:cSld>
-  <p:clrMapOvr>
-    <a:masterClrMapping/>
-  </p:clrMapOvr>
-</p:sld>
-</file>
-
-<file path=ppt/slides/slide14.xml><?xml version="1.0" encoding="utf-8"?>
 <p:sld xmlns:a="http://schemas.openxmlformats.org/drawingml/2006/main" xmlns:r="http://schemas.openxmlformats.org/officeDocument/2006/relationships" xmlns:p="http://schemas.openxmlformats.org/presentationml/2006/main">
   <p:cSld>
     <p:spTree>
@@ -5277,8 +7501,39 @@
               <a:buNone/>
             </a:pPr>
             <a:r>
+              <a:rPr lang="ru-RU" sz="2100" b="1" dirty="0" smtClean="0"/>
+              <a:t>При кросс-</a:t>
+            </a:r>
+            <a:r>
+              <a:rPr lang="ru-RU" sz="2100" b="1" dirty="0" err="1" smtClean="0"/>
+              <a:t>валидации</a:t>
+            </a:r>
+            <a:r>
+              <a:rPr lang="ru-RU" sz="2100" b="1" dirty="0" smtClean="0"/>
+              <a:t> важно оценивать неопределенность предсказания!</a:t>
+            </a:r>
+          </a:p>
+          <a:p>
+            <a:pPr marL="0" indent="0">
+              <a:buNone/>
+            </a:pPr>
+            <a:r>
+              <a:rPr lang="ru-RU" sz="2100" b="1" dirty="0" smtClean="0"/>
+              <a:t>Это диагностика того как модель описывает ряд и какие ошибки есть во ВР</a:t>
+            </a:r>
+            <a:endParaRPr lang="ru-RU" sz="2100" b="1" dirty="0" smtClean="0"/>
+          </a:p>
+          <a:p>
+            <a:pPr marL="0" indent="0">
+              <a:buNone/>
+            </a:pPr>
+            <a:r>
+              <a:rPr lang="ru-RU" sz="2100" b="1" dirty="0" smtClean="0"/>
+              <a:t>Источники </a:t>
+            </a:r>
+            <a:r>
               <a:rPr lang="ru-RU" sz="2100" b="1" dirty="0"/>
-              <a:t>Источники ошибки предсказаний</a:t>
+              <a:t>ошибки предсказаний</a:t>
             </a:r>
           </a:p>
           <a:p>
@@ -5435,7 +7690,7 @@
         </p:blipFill>
         <p:spPr bwMode="auto">
           <a:xfrm>
-            <a:off x="6581305" y="3243100"/>
+            <a:off x="6581305" y="3260034"/>
             <a:ext cx="5454650" cy="3102332"/>
           </a:xfrm>
           <a:prstGeom prst="rect">
@@ -5637,10 +7892,17 @@
   <p:clrMapOvr>
     <a:masterClrMapping/>
   </p:clrMapOvr>
+  <p:timing>
+    <p:tnLst>
+      <p:par>
+        <p:cTn id="1" dur="indefinite" restart="never" nodeType="tmRoot"/>
+      </p:par>
+    </p:tnLst>
+  </p:timing>
 </p:sld>
 </file>
 
-<file path=ppt/slides/slide15.xml><?xml version="1.0" encoding="utf-8"?>
+<file path=ppt/slides/slide14.xml><?xml version="1.0" encoding="utf-8"?>
 <p:sld xmlns:a="http://schemas.openxmlformats.org/drawingml/2006/main" xmlns:r="http://schemas.openxmlformats.org/officeDocument/2006/relationships" xmlns:p="http://schemas.openxmlformats.org/presentationml/2006/main">
   <p:cSld>
     <p:spTree>
@@ -5687,8 +7949,8 @@
           </a:p>
         </p:txBody>
       </p:sp>
-      <mc:AlternateContent xmlns:mc="http://schemas.openxmlformats.org/markup-compatibility/2006" xmlns:a14="http://schemas.microsoft.com/office/drawing/2010/main">
-        <mc:Choice Requires="a14">
+      <mc:AlternateContent xmlns:mc="http://schemas.openxmlformats.org/markup-compatibility/2006">
+        <mc:Choice xmlns:a14="http://schemas.microsoft.com/office/drawing/2010/main" Requires="a14">
           <p:sp>
             <p:nvSpPr>
               <p:cNvPr id="3" name="Объект 2"/>
@@ -5707,7 +7969,7 @@
             </p:spPr>
             <p:txBody>
               <a:bodyPr>
-                <a:normAutofit/>
+                <a:normAutofit lnSpcReduction="10000"/>
               </a:bodyPr>
               <a:lstStyle/>
               <a:p>
@@ -5757,8 +8019,28 @@
                 </a:r>
                 <a:r>
                   <a:rPr lang="ru-RU" sz="1700" dirty="0"/>
-                  <a:t> – индикатор переобучения.</a:t>
+                  <a:t> – индикатор переобучения</a:t>
                 </a:r>
+                <a:r>
+                  <a:rPr lang="ru-RU" sz="1700" dirty="0" smtClean="0"/>
+                  <a:t>.</a:t>
+                </a:r>
+              </a:p>
+              <a:p>
+                <a:pPr lvl="1"/>
+                <a:r>
+                  <a:rPr lang="ru-RU" sz="1700" dirty="0" smtClean="0"/>
+                  <a:t>Но при условии корректного покрытия (т.е. модель, дающая 5% для </a:t>
+                </a:r>
+                <a:r>
+                  <a:rPr lang="ru-RU" sz="1700" dirty="0" err="1" smtClean="0"/>
+                  <a:t>сбытия</a:t>
+                </a:r>
+                <a:r>
+                  <a:rPr lang="ru-RU" sz="1700" dirty="0" smtClean="0"/>
+                  <a:t> с вер. 5%, лучше, чем модель, дающая для него 1 или 10%).</a:t>
+                </a:r>
+                <a:endParaRPr lang="ru-RU" sz="1700" dirty="0"/>
               </a:p>
               <a:p>
                 <a:r>
@@ -5858,7 +8140,7 @@
             </p:txBody>
           </p:sp>
         </mc:Choice>
-        <mc:Fallback xmlns="">
+        <mc:Fallback>
           <p:sp>
             <p:nvSpPr>
               <p:cNvPr id="3" name="Объект 2"/>
@@ -5877,7 +8159,7 @@
               <a:blipFill>
                 <a:blip r:embed="rId2"/>
                 <a:stretch>
-                  <a:fillRect l="-625" t="-1294"/>
+                  <a:fillRect l="-625" t="-1765"/>
                 </a:stretch>
               </a:blipFill>
             </p:spPr>
@@ -5987,8 +8269,8 @@
         </p:blipFill>
         <p:spPr bwMode="auto">
           <a:xfrm>
-            <a:off x="6965107" y="3523881"/>
-            <a:ext cx="5204482" cy="2960049"/>
+            <a:off x="7069667" y="3488638"/>
+            <a:ext cx="4946028" cy="2960049"/>
           </a:xfrm>
           <a:prstGeom prst="rect">
             <a:avLst/>
@@ -6188,10 +8470,3619 @@
   <p:clrMapOvr>
     <a:masterClrMapping/>
   </p:clrMapOvr>
+  <p:timing>
+    <p:tnLst>
+      <p:par>
+        <p:cTn id="1" dur="indefinite" restart="never" nodeType="tmRoot"/>
+      </p:par>
+    </p:tnLst>
+  </p:timing>
+</p:sld>
+</file>
+
+<file path=ppt/slides/slide15.xml><?xml version="1.0" encoding="utf-8"?>
+<p:sld xmlns:a="http://schemas.openxmlformats.org/drawingml/2006/main" xmlns:r="http://schemas.openxmlformats.org/officeDocument/2006/relationships" xmlns:p="http://schemas.openxmlformats.org/presentationml/2006/main">
+  <p:cSld>
+    <p:spTree>
+      <p:nvGrpSpPr>
+        <p:cNvPr id="1" name=""/>
+        <p:cNvGrpSpPr/>
+        <p:nvPr/>
+      </p:nvGrpSpPr>
+      <p:grpSpPr>
+        <a:xfrm>
+          <a:off x="0" y="0"/>
+          <a:ext cx="0" cy="0"/>
+          <a:chOff x="0" y="0"/>
+          <a:chExt cx="0" cy="0"/>
+        </a:xfrm>
+      </p:grpSpPr>
+      <p:sp>
+        <p:nvSpPr>
+          <p:cNvPr id="2" name="Заголовок 1"/>
+          <p:cNvSpPr>
+            <a:spLocks noGrp="1"/>
+          </p:cNvSpPr>
+          <p:nvPr>
+            <p:ph type="title"/>
+          </p:nvPr>
+        </p:nvSpPr>
+        <p:spPr>
+          <a:xfrm>
+            <a:off x="310896" y="365125"/>
+            <a:ext cx="11042904" cy="585851"/>
+          </a:xfrm>
+        </p:spPr>
+        <p:txBody>
+          <a:bodyPr>
+            <a:normAutofit fontScale="90000"/>
+          </a:bodyPr>
+          <a:lstStyle/>
+          <a:p>
+            <a:r>
+              <a:rPr lang="ru-RU" dirty="0"/>
+              <a:t>Необходимость вероятностных оценок</a:t>
+            </a:r>
+          </a:p>
+        </p:txBody>
+      </p:sp>
+      <p:sp>
+        <p:nvSpPr>
+          <p:cNvPr id="4" name="Номер слайда 3"/>
+          <p:cNvSpPr>
+            <a:spLocks noGrp="1"/>
+          </p:cNvSpPr>
+          <p:nvPr>
+            <p:ph type="sldNum" sz="quarter" idx="12"/>
+          </p:nvPr>
+        </p:nvSpPr>
+        <p:spPr/>
+        <p:txBody>
+          <a:bodyPr/>
+          <a:lstStyle/>
+          <a:p>
+            <a:fld id="{45C3B737-A709-4ABC-AFE0-A6B067850C48}" type="slidenum">
+              <a:rPr lang="en-US" smtClean="0"/>
+              <a:t>15</a:t>
+            </a:fld>
+            <a:endParaRPr lang="en-US"/>
+          </a:p>
+        </p:txBody>
+      </p:sp>
+      <p:sp>
+        <p:nvSpPr>
+          <p:cNvPr id="5" name="Объект 4"/>
+          <p:cNvSpPr>
+            <a:spLocks noGrp="1"/>
+          </p:cNvSpPr>
+          <p:nvPr>
+            <p:ph idx="1"/>
+          </p:nvPr>
+        </p:nvSpPr>
+        <p:spPr>
+          <a:xfrm>
+            <a:off x="192024" y="950976"/>
+            <a:ext cx="11814048" cy="397032"/>
+          </a:xfrm>
+          <a:prstGeom prst="rect">
+            <a:avLst/>
+          </a:prstGeom>
+        </p:spPr>
+        <p:txBody>
+          <a:bodyPr wrap="square">
+            <a:spAutoFit/>
+          </a:bodyPr>
+          <a:lstStyle/>
+          <a:p>
+            <a:pPr marL="0" indent="0">
+              <a:buNone/>
+            </a:pPr>
+            <a:r>
+              <a:rPr lang="en-US" sz="2200" b="1" dirty="0"/>
+              <a:t> </a:t>
+            </a:r>
+            <a:endParaRPr lang="ru-RU" sz="2200" b="0" i="0" dirty="0">
+              <a:effectLst/>
+            </a:endParaRPr>
+          </a:p>
+        </p:txBody>
+      </p:sp>
+      <p:sp>
+        <p:nvSpPr>
+          <p:cNvPr id="3" name="Прямоугольник 2"/>
+          <p:cNvSpPr/>
+          <p:nvPr/>
+        </p:nvSpPr>
+        <p:spPr>
+          <a:xfrm>
+            <a:off x="310896" y="1001038"/>
+            <a:ext cx="7354709" cy="5940088"/>
+          </a:xfrm>
+          <a:prstGeom prst="rect">
+            <a:avLst/>
+          </a:prstGeom>
+        </p:spPr>
+        <p:txBody>
+          <a:bodyPr wrap="square">
+            <a:spAutoFit/>
+          </a:bodyPr>
+          <a:lstStyle/>
+          <a:p>
+            <a:r>
+              <a:rPr lang="ru-RU" sz="2000" dirty="0">
+                <a:solidFill>
+                  <a:srgbClr val="2C2C36"/>
+                </a:solidFill>
+              </a:rPr>
+              <a:t>Иногда предположение о нормальности остатков неверно. В таких случаях можно использовать </a:t>
+            </a:r>
+            <a:r>
+              <a:rPr lang="ru-RU" sz="2000" dirty="0">
+                <a:solidFill>
+                  <a:srgbClr val="111827"/>
+                </a:solidFill>
+              </a:rPr>
+              <a:t>методы</a:t>
+            </a:r>
+          </a:p>
+          <a:p>
+            <a:r>
+              <a:rPr lang="ru-RU" sz="2000" dirty="0">
+                <a:solidFill>
+                  <a:srgbClr val="111827"/>
+                </a:solidFill>
+              </a:rPr>
+              <a:t> </a:t>
+            </a:r>
+            <a:r>
+              <a:rPr lang="ru-RU" sz="2000" dirty="0" err="1">
+                <a:solidFill>
+                  <a:srgbClr val="111827"/>
+                </a:solidFill>
+              </a:rPr>
+              <a:t>бутстрепа</a:t>
+            </a:r>
+            <a:r>
+              <a:rPr lang="ru-RU" sz="2000" dirty="0">
+                <a:solidFill>
+                  <a:srgbClr val="111827"/>
+                </a:solidFill>
+              </a:rPr>
+              <a:t> </a:t>
+            </a:r>
+            <a:r>
+              <a:rPr lang="ru-RU" sz="2000" dirty="0">
+                <a:solidFill>
+                  <a:srgbClr val="2C2C36"/>
+                </a:solidFill>
+              </a:rPr>
+              <a:t>— имитационный метод, основанный на повторной выборке из исторических остатков</a:t>
+            </a:r>
+          </a:p>
+          <a:p>
+            <a:r>
+              <a:rPr lang="ru-RU" sz="2000" dirty="0" err="1">
+                <a:solidFill>
+                  <a:srgbClr val="2C2C36"/>
+                </a:solidFill>
+              </a:rPr>
+              <a:t>Комфорное</a:t>
+            </a:r>
+            <a:r>
+              <a:rPr lang="ru-RU" sz="2000" dirty="0">
+                <a:solidFill>
+                  <a:srgbClr val="2C2C36"/>
+                </a:solidFill>
+              </a:rPr>
+              <a:t> </a:t>
+            </a:r>
+            <a:r>
+              <a:rPr lang="ru-RU" sz="2000" dirty="0" err="1">
+                <a:solidFill>
+                  <a:srgbClr val="2C2C36"/>
+                </a:solidFill>
+              </a:rPr>
+              <a:t>преорбазование</a:t>
+            </a:r>
+            <a:r>
+              <a:rPr lang="ru-RU" sz="2000" dirty="0">
+                <a:solidFill>
+                  <a:srgbClr val="2C2C36"/>
+                </a:solidFill>
+              </a:rPr>
+              <a:t> – калибровка доверительных интервалов на отдельных от тренировочной </a:t>
+            </a:r>
+            <a:r>
+              <a:rPr lang="ru-RU" sz="2000" dirty="0" err="1">
+                <a:solidFill>
+                  <a:srgbClr val="2C2C36"/>
+                </a:solidFill>
+              </a:rPr>
+              <a:t>подвыборках</a:t>
+            </a:r>
+            <a:r>
+              <a:rPr lang="ru-RU" sz="2000" dirty="0">
+                <a:solidFill>
+                  <a:srgbClr val="2C2C36"/>
+                </a:solidFill>
+              </a:rPr>
+              <a:t>.</a:t>
+            </a:r>
+          </a:p>
+          <a:p>
+            <a:r>
+              <a:rPr lang="ru-RU" sz="2000" b="1" dirty="0">
+                <a:solidFill>
+                  <a:srgbClr val="2C2C36"/>
+                </a:solidFill>
+              </a:rPr>
+              <a:t>Основные идеи</a:t>
+            </a:r>
+          </a:p>
+          <a:p>
+            <a:pPr>
+              <a:buFont typeface="+mj-lt"/>
+              <a:buAutoNum type="arabicPeriod"/>
+            </a:pPr>
+            <a:r>
+              <a:rPr lang="ru-RU" sz="2000" dirty="0">
+                <a:solidFill>
+                  <a:srgbClr val="2C2C36"/>
+                </a:solidFill>
+              </a:rPr>
+              <a:t>Используем модель, чтобы получить остатки </a:t>
+            </a:r>
+            <a:r>
+              <a:rPr lang="ru-RU" sz="2000" i="1" dirty="0" err="1">
+                <a:solidFill>
+                  <a:srgbClr val="2C2C36"/>
+                </a:solidFill>
+              </a:rPr>
+              <a:t>et</a:t>
+            </a:r>
+            <a:r>
+              <a:rPr lang="ru-RU" sz="2000" dirty="0">
+                <a:solidFill>
+                  <a:srgbClr val="2C2C36"/>
+                </a:solidFill>
+              </a:rPr>
+              <a:t>​=</a:t>
+            </a:r>
+            <a:r>
+              <a:rPr lang="ru-RU" sz="2000" i="1" dirty="0" err="1">
+                <a:solidFill>
+                  <a:srgbClr val="2C2C36"/>
+                </a:solidFill>
+              </a:rPr>
+              <a:t>yt</a:t>
+            </a:r>
+            <a:r>
+              <a:rPr lang="ru-RU" sz="2000" dirty="0">
+                <a:solidFill>
+                  <a:srgbClr val="2C2C36"/>
+                </a:solidFill>
+              </a:rPr>
+              <a:t>​−</a:t>
+            </a:r>
+            <a:r>
+              <a:rPr lang="ru-RU" sz="2000" i="1" dirty="0">
+                <a:solidFill>
+                  <a:srgbClr val="2C2C36"/>
+                </a:solidFill>
+              </a:rPr>
+              <a:t>y</a:t>
+            </a:r>
+            <a:r>
+              <a:rPr lang="ru-RU" sz="2000" dirty="0">
+                <a:solidFill>
+                  <a:srgbClr val="2C2C36"/>
+                </a:solidFill>
+              </a:rPr>
+              <a:t>^​</a:t>
+            </a:r>
+            <a:r>
+              <a:rPr lang="ru-RU" sz="2000" i="1" dirty="0">
+                <a:solidFill>
+                  <a:srgbClr val="2C2C36"/>
+                </a:solidFill>
+              </a:rPr>
+              <a:t>t</a:t>
+            </a:r>
+            <a:r>
+              <a:rPr lang="ru-RU" sz="2000" dirty="0">
+                <a:solidFill>
+                  <a:srgbClr val="2C2C36"/>
+                </a:solidFill>
+              </a:rPr>
+              <a:t>​ .</a:t>
+            </a:r>
+          </a:p>
+          <a:p>
+            <a:pPr>
+              <a:buFont typeface="+mj-lt"/>
+              <a:buAutoNum type="arabicPeriod"/>
+            </a:pPr>
+            <a:r>
+              <a:rPr lang="ru-RU" sz="2000" dirty="0">
+                <a:solidFill>
+                  <a:srgbClr val="2C2C36"/>
+                </a:solidFill>
+              </a:rPr>
+              <a:t>Затем случайным образом выбираем эти остатки и добавляем их к прогнозам, чтобы смоделировать возможные будущие значения.</a:t>
+            </a:r>
+          </a:p>
+          <a:p>
+            <a:pPr>
+              <a:buFont typeface="+mj-lt"/>
+              <a:buAutoNum type="arabicPeriod"/>
+            </a:pPr>
+            <a:r>
+              <a:rPr lang="ru-RU" sz="2000" dirty="0">
+                <a:solidFill>
+                  <a:srgbClr val="2C2C36"/>
+                </a:solidFill>
+              </a:rPr>
+              <a:t>Повторяем этот процесс множество раз, чтобы получить распределение возможных будущих значений.</a:t>
+            </a:r>
+          </a:p>
+          <a:p>
+            <a:pPr>
+              <a:buFont typeface="+mj-lt"/>
+              <a:buAutoNum type="arabicPeriod"/>
+            </a:pPr>
+            <a:r>
+              <a:rPr lang="ru-RU" sz="2000" dirty="0">
+                <a:solidFill>
+                  <a:srgbClr val="2C2C36"/>
+                </a:solidFill>
+              </a:rPr>
+              <a:t>На основе этого распределения строим доверительные интервалы (например, 80%, 95%).</a:t>
+            </a:r>
+          </a:p>
+          <a:p>
+            <a:r>
+              <a:rPr lang="ru-RU" sz="2000" b="1" dirty="0">
+                <a:solidFill>
+                  <a:srgbClr val="2C2C36"/>
+                </a:solidFill>
+              </a:rPr>
+              <a:t>Преимущества методов</a:t>
+            </a:r>
+          </a:p>
+          <a:p>
+            <a:pPr>
+              <a:buFont typeface="Arial" panose="020B0604020202020204" pitchFamily="34" charset="0"/>
+              <a:buChar char="•"/>
+            </a:pPr>
+            <a:r>
+              <a:rPr lang="ru-RU" sz="2000" dirty="0">
+                <a:solidFill>
+                  <a:srgbClr val="2C2C36"/>
+                </a:solidFill>
+              </a:rPr>
+              <a:t>Не требует предположений о нормальности остатков.</a:t>
+            </a:r>
+          </a:p>
+          <a:p>
+            <a:pPr>
+              <a:buFont typeface="Arial" panose="020B0604020202020204" pitchFamily="34" charset="0"/>
+              <a:buChar char="•"/>
+            </a:pPr>
+            <a:r>
+              <a:rPr lang="ru-RU" sz="2000" dirty="0">
+                <a:solidFill>
+                  <a:srgbClr val="2C2C36"/>
+                </a:solidFill>
+              </a:rPr>
+              <a:t>Работает даже при сложных структурах данных.</a:t>
+            </a:r>
+          </a:p>
+          <a:p>
+            <a:pPr>
+              <a:buFont typeface="Arial" panose="020B0604020202020204" pitchFamily="34" charset="0"/>
+              <a:buChar char="•"/>
+            </a:pPr>
+            <a:r>
+              <a:rPr lang="ru-RU" sz="2000" dirty="0">
+                <a:solidFill>
+                  <a:srgbClr val="2C2C36"/>
+                </a:solidFill>
+              </a:rPr>
+              <a:t>Может учитывать несимметричность распределения.</a:t>
+            </a:r>
+            <a:endParaRPr lang="ru-RU" sz="2000" b="0" i="0" dirty="0">
+              <a:solidFill>
+                <a:srgbClr val="2C2C36"/>
+              </a:solidFill>
+              <a:effectLst/>
+            </a:endParaRPr>
+          </a:p>
+        </p:txBody>
+      </p:sp>
+      <p:pic>
+        <p:nvPicPr>
+          <p:cNvPr id="9" name="Picture 2" descr="Five simulated future sample paths of the Google closing stock price based on a naïve method with bootstrapped residuals."/>
+          <p:cNvPicPr>
+            <a:picLocks noChangeAspect="1" noChangeArrowheads="1"/>
+          </p:cNvPicPr>
+          <p:nvPr/>
+        </p:nvPicPr>
+        <p:blipFill>
+          <a:blip r:embed="rId3">
+            <a:extLst>
+              <a:ext uri="{28A0092B-C50C-407E-A947-70E740481C1C}">
+                <a14:useLocalDpi xmlns:a14="http://schemas.microsoft.com/office/drawing/2010/main" val="0"/>
+              </a:ext>
+            </a:extLst>
+          </a:blip>
+          <a:srcRect/>
+          <a:stretch>
+            <a:fillRect/>
+          </a:stretch>
+        </p:blipFill>
+        <p:spPr bwMode="auto">
+          <a:xfrm>
+            <a:off x="7902334" y="850393"/>
+            <a:ext cx="3867009" cy="2388108"/>
+          </a:xfrm>
+          <a:prstGeom prst="rect">
+            <a:avLst/>
+          </a:prstGeom>
+          <a:noFill/>
+          <a:extLst>
+            <a:ext uri="{909E8E84-426E-40DD-AFC4-6F175D3DCCD1}">
+              <a14:hiddenFill xmlns:a14="http://schemas.microsoft.com/office/drawing/2010/main">
+                <a:solidFill>
+                  <a:srgbClr val="FFFFFF"/>
+                </a:solidFill>
+              </a14:hiddenFill>
+            </a:ext>
+          </a:extLst>
+        </p:spPr>
+      </p:pic>
+      <p:pic>
+        <p:nvPicPr>
+          <p:cNvPr id="10" name="Picture 4" descr="Forecasts of the Google closing stock price based on a naïve method with bootstrapped residuals."/>
+          <p:cNvPicPr>
+            <a:picLocks noChangeAspect="1" noChangeArrowheads="1"/>
+          </p:cNvPicPr>
+          <p:nvPr/>
+        </p:nvPicPr>
+        <p:blipFill>
+          <a:blip r:embed="rId4">
+            <a:extLst>
+              <a:ext uri="{28A0092B-C50C-407E-A947-70E740481C1C}">
+                <a14:useLocalDpi xmlns:a14="http://schemas.microsoft.com/office/drawing/2010/main" val="0"/>
+              </a:ext>
+            </a:extLst>
+          </a:blip>
+          <a:srcRect/>
+          <a:stretch>
+            <a:fillRect/>
+          </a:stretch>
+        </p:blipFill>
+        <p:spPr bwMode="auto">
+          <a:xfrm>
+            <a:off x="7482434" y="3753865"/>
+            <a:ext cx="4642510" cy="2867026"/>
+          </a:xfrm>
+          <a:prstGeom prst="rect">
+            <a:avLst/>
+          </a:prstGeom>
+          <a:noFill/>
+          <a:extLst>
+            <a:ext uri="{909E8E84-426E-40DD-AFC4-6F175D3DCCD1}">
+              <a14:hiddenFill xmlns:a14="http://schemas.microsoft.com/office/drawing/2010/main">
+                <a:solidFill>
+                  <a:srgbClr val="FFFFFF"/>
+                </a:solidFill>
+              </a14:hiddenFill>
+            </a:ext>
+          </a:extLst>
+        </p:spPr>
+      </p:pic>
+    </p:spTree>
+    <p:extLst>
+      <p:ext uri="{BB962C8B-B14F-4D97-AF65-F5344CB8AC3E}">
+        <p14:creationId xmlns:p14="http://schemas.microsoft.com/office/powerpoint/2010/main" val="542919987"/>
+      </p:ext>
+    </p:extLst>
+  </p:cSld>
+  <p:clrMapOvr>
+    <a:masterClrMapping/>
+  </p:clrMapOvr>
+  <p:timing>
+    <p:tnLst>
+      <p:par>
+        <p:cTn id="1" dur="indefinite" restart="never" nodeType="tmRoot"/>
+      </p:par>
+    </p:tnLst>
+  </p:timing>
 </p:sld>
 </file>
 
 <file path=ppt/slides/slide16.xml><?xml version="1.0" encoding="utf-8"?>
+<p:sld xmlns:a="http://schemas.openxmlformats.org/drawingml/2006/main" xmlns:r="http://schemas.openxmlformats.org/officeDocument/2006/relationships" xmlns:p="http://schemas.openxmlformats.org/presentationml/2006/main">
+  <p:cSld>
+    <p:spTree>
+      <p:nvGrpSpPr>
+        <p:cNvPr id="1" name=""/>
+        <p:cNvGrpSpPr/>
+        <p:nvPr/>
+      </p:nvGrpSpPr>
+      <p:grpSpPr>
+        <a:xfrm>
+          <a:off x="0" y="0"/>
+          <a:ext cx="0" cy="0"/>
+          <a:chOff x="0" y="0"/>
+          <a:chExt cx="0" cy="0"/>
+        </a:xfrm>
+      </p:grpSpPr>
+      <p:sp>
+        <p:nvSpPr>
+          <p:cNvPr id="2" name="Заголовок 1"/>
+          <p:cNvSpPr>
+            <a:spLocks noGrp="1"/>
+          </p:cNvSpPr>
+          <p:nvPr>
+            <p:ph type="title"/>
+          </p:nvPr>
+        </p:nvSpPr>
+        <p:spPr>
+          <a:xfrm>
+            <a:off x="310896" y="365125"/>
+            <a:ext cx="11042904" cy="585851"/>
+          </a:xfrm>
+        </p:spPr>
+        <p:txBody>
+          <a:bodyPr>
+            <a:normAutofit fontScale="90000"/>
+          </a:bodyPr>
+          <a:lstStyle/>
+          <a:p>
+            <a:r>
+              <a:rPr lang="ru-RU" dirty="0"/>
+              <a:t>Необходимость вероятностных оценок</a:t>
+            </a:r>
+          </a:p>
+        </p:txBody>
+      </p:sp>
+      <p:sp>
+        <p:nvSpPr>
+          <p:cNvPr id="4" name="Номер слайда 3"/>
+          <p:cNvSpPr>
+            <a:spLocks noGrp="1"/>
+          </p:cNvSpPr>
+          <p:nvPr>
+            <p:ph type="sldNum" sz="quarter" idx="12"/>
+          </p:nvPr>
+        </p:nvSpPr>
+        <p:spPr/>
+        <p:txBody>
+          <a:bodyPr/>
+          <a:lstStyle/>
+          <a:p>
+            <a:fld id="{45C3B737-A709-4ABC-AFE0-A6B067850C48}" type="slidenum">
+              <a:rPr lang="en-US" smtClean="0"/>
+              <a:t>16</a:t>
+            </a:fld>
+            <a:endParaRPr lang="en-US"/>
+          </a:p>
+        </p:txBody>
+      </p:sp>
+      <p:sp>
+        <p:nvSpPr>
+          <p:cNvPr id="5" name="Объект 4"/>
+          <p:cNvSpPr>
+            <a:spLocks noGrp="1"/>
+          </p:cNvSpPr>
+          <p:nvPr>
+            <p:ph idx="1"/>
+          </p:nvPr>
+        </p:nvSpPr>
+        <p:spPr>
+          <a:xfrm>
+            <a:off x="192024" y="950976"/>
+            <a:ext cx="11814048" cy="701731"/>
+          </a:xfrm>
+          <a:prstGeom prst="rect">
+            <a:avLst/>
+          </a:prstGeom>
+        </p:spPr>
+        <p:txBody>
+          <a:bodyPr wrap="square">
+            <a:spAutoFit/>
+          </a:bodyPr>
+          <a:lstStyle/>
+          <a:p>
+            <a:pPr marL="0" indent="0">
+              <a:buNone/>
+            </a:pPr>
+            <a:r>
+              <a:rPr lang="ru-RU" sz="2200" dirty="0"/>
+              <a:t>После того как мы построили прогнозные интервалы или получили прогнозное распределение, важно количественно оценить их качество</a:t>
+            </a:r>
+          </a:p>
+        </p:txBody>
+      </p:sp>
+      <mc:AlternateContent xmlns:mc="http://schemas.openxmlformats.org/markup-compatibility/2006" xmlns:a14="http://schemas.microsoft.com/office/drawing/2010/main">
+        <mc:Choice Requires="a14">
+          <p:graphicFrame>
+            <p:nvGraphicFramePr>
+              <p:cNvPr id="6" name="Таблица 5"/>
+              <p:cNvGraphicFramePr>
+                <a:graphicFrameLocks noGrp="1"/>
+              </p:cNvGraphicFramePr>
+              <p:nvPr>
+                <p:extLst/>
+              </p:nvPr>
+            </p:nvGraphicFramePr>
+            <p:xfrm>
+              <a:off x="310896" y="1652705"/>
+              <a:ext cx="11422095" cy="3166944"/>
+            </p:xfrm>
+            <a:graphic>
+              <a:graphicData uri="http://schemas.openxmlformats.org/drawingml/2006/table">
+                <a:tbl>
+                  <a:tblPr/>
+                  <a:tblGrid>
+                    <a:gridCol w="1543541">
+                      <a:extLst>
+                        <a:ext uri="{9D8B030D-6E8A-4147-A177-3AD203B41FA5}">
+                          <a16:colId xmlns:a16="http://schemas.microsoft.com/office/drawing/2014/main" val="1648134774"/>
+                        </a:ext>
+                      </a:extLst>
+                    </a:gridCol>
+                    <a:gridCol w="2450863">
+                      <a:extLst>
+                        <a:ext uri="{9D8B030D-6E8A-4147-A177-3AD203B41FA5}">
+                          <a16:colId xmlns:a16="http://schemas.microsoft.com/office/drawing/2014/main" val="1803540345"/>
+                        </a:ext>
+                      </a:extLst>
+                    </a:gridCol>
+                    <a:gridCol w="2790825">
+                      <a:extLst>
+                        <a:ext uri="{9D8B030D-6E8A-4147-A177-3AD203B41FA5}">
+                          <a16:colId xmlns:a16="http://schemas.microsoft.com/office/drawing/2014/main" val="2317459356"/>
+                        </a:ext>
+                      </a:extLst>
+                    </a:gridCol>
+                    <a:gridCol w="1842776">
+                      <a:extLst>
+                        <a:ext uri="{9D8B030D-6E8A-4147-A177-3AD203B41FA5}">
+                          <a16:colId xmlns:a16="http://schemas.microsoft.com/office/drawing/2014/main" val="3472257170"/>
+                        </a:ext>
+                      </a:extLst>
+                    </a:gridCol>
+                    <a:gridCol w="2794090">
+                      <a:extLst>
+                        <a:ext uri="{9D8B030D-6E8A-4147-A177-3AD203B41FA5}">
+                          <a16:colId xmlns:a16="http://schemas.microsoft.com/office/drawing/2014/main" val="50803802"/>
+                        </a:ext>
+                      </a:extLst>
+                    </a:gridCol>
+                  </a:tblGrid>
+                  <a:tr h="363586">
+                    <a:tc>
+                      <a:txBody>
+                        <a:bodyPr/>
+                        <a:lstStyle/>
+                        <a:p>
+                          <a:pPr algn="ctr" fontAlgn="b"/>
+                          <a:r>
+                            <a:rPr lang="ru-RU" sz="1800" b="0" i="0" u="none" strike="noStrike" dirty="0">
+                              <a:solidFill>
+                                <a:srgbClr val="000000"/>
+                              </a:solidFill>
+                              <a:effectLst/>
+                              <a:latin typeface="Calibri" panose="020F0502020204030204" pitchFamily="34" charset="0"/>
+                            </a:rPr>
+                            <a:t>Тип прогноза</a:t>
+                          </a:r>
+                        </a:p>
+                      </a:txBody>
+                      <a:tcPr marL="9525" marR="9525" marT="9525" marB="0" anchor="ctr">
+                        <a:lnL w="12700" cap="flat" cmpd="sng" algn="ctr">
+                          <a:solidFill>
+                            <a:schemeClr val="tx1"/>
+                          </a:solidFill>
+                          <a:prstDash val="solid"/>
+                          <a:round/>
+                          <a:headEnd type="none" w="med" len="med"/>
+                          <a:tailEnd type="none" w="med" len="med"/>
+                        </a:lnL>
+                        <a:lnR w="12700" cap="flat" cmpd="sng" algn="ctr">
+                          <a:solidFill>
+                            <a:schemeClr val="tx1"/>
+                          </a:solidFill>
+                          <a:prstDash val="solid"/>
+                          <a:round/>
+                          <a:headEnd type="none" w="med" len="med"/>
+                          <a:tailEnd type="none" w="med" len="med"/>
+                        </a:lnR>
+                        <a:lnT w="12700" cap="flat" cmpd="sng" algn="ctr">
+                          <a:solidFill>
+                            <a:schemeClr val="tx1"/>
+                          </a:solidFill>
+                          <a:prstDash val="solid"/>
+                          <a:round/>
+                          <a:headEnd type="none" w="med" len="med"/>
+                          <a:tailEnd type="none" w="med" len="med"/>
+                        </a:lnT>
+                        <a:lnB w="12700" cap="flat" cmpd="sng" algn="ctr">
+                          <a:solidFill>
+                            <a:schemeClr val="tx1"/>
+                          </a:solidFill>
+                          <a:prstDash val="solid"/>
+                          <a:round/>
+                          <a:headEnd type="none" w="med" len="med"/>
+                          <a:tailEnd type="none" w="med" len="med"/>
+                        </a:lnB>
+                      </a:tcPr>
+                    </a:tc>
+                    <a:tc>
+                      <a:txBody>
+                        <a:bodyPr/>
+                        <a:lstStyle/>
+                        <a:p>
+                          <a:pPr algn="ctr" fontAlgn="b"/>
+                          <a:r>
+                            <a:rPr lang="ru-RU" sz="1800" b="0" i="0" u="none" strike="noStrike" dirty="0">
+                              <a:solidFill>
+                                <a:srgbClr val="000000"/>
+                              </a:solidFill>
+                              <a:effectLst/>
+                              <a:latin typeface="Calibri" panose="020F0502020204030204" pitchFamily="34" charset="0"/>
+                            </a:rPr>
+                            <a:t>Оценка</a:t>
+                          </a:r>
+                        </a:p>
+                      </a:txBody>
+                      <a:tcPr marL="9525" marR="9525" marT="9525" marB="0" anchor="ctr">
+                        <a:lnL w="12700" cap="flat" cmpd="sng" algn="ctr">
+                          <a:solidFill>
+                            <a:schemeClr val="tx1"/>
+                          </a:solidFill>
+                          <a:prstDash val="solid"/>
+                          <a:round/>
+                          <a:headEnd type="none" w="med" len="med"/>
+                          <a:tailEnd type="none" w="med" len="med"/>
+                        </a:lnL>
+                        <a:lnR w="12700" cap="flat" cmpd="sng" algn="ctr">
+                          <a:solidFill>
+                            <a:schemeClr val="tx1"/>
+                          </a:solidFill>
+                          <a:prstDash val="solid"/>
+                          <a:round/>
+                          <a:headEnd type="none" w="med" len="med"/>
+                          <a:tailEnd type="none" w="med" len="med"/>
+                        </a:lnR>
+                        <a:lnT w="12700" cap="flat" cmpd="sng" algn="ctr">
+                          <a:solidFill>
+                            <a:schemeClr val="tx1"/>
+                          </a:solidFill>
+                          <a:prstDash val="solid"/>
+                          <a:round/>
+                          <a:headEnd type="none" w="med" len="med"/>
+                          <a:tailEnd type="none" w="med" len="med"/>
+                        </a:lnT>
+                        <a:lnB w="12700" cap="flat" cmpd="sng" algn="ctr">
+                          <a:solidFill>
+                            <a:schemeClr val="tx1"/>
+                          </a:solidFill>
+                          <a:prstDash val="solid"/>
+                          <a:round/>
+                          <a:headEnd type="none" w="med" len="med"/>
+                          <a:tailEnd type="none" w="med" len="med"/>
+                        </a:lnB>
+                      </a:tcPr>
+                    </a:tc>
+                    <a:tc>
+                      <a:txBody>
+                        <a:bodyPr/>
+                        <a:lstStyle/>
+                        <a:p>
+                          <a:pPr algn="ctr" fontAlgn="b"/>
+                          <a:r>
+                            <a:rPr lang="ru-RU" sz="1800" b="0" i="0" u="none" strike="noStrike" dirty="0">
+                              <a:solidFill>
+                                <a:srgbClr val="000000"/>
+                              </a:solidFill>
+                              <a:effectLst/>
+                              <a:latin typeface="Calibri" panose="020F0502020204030204" pitchFamily="34" charset="0"/>
+                            </a:rPr>
+                            <a:t>Цель</a:t>
+                          </a:r>
+                        </a:p>
+                      </a:txBody>
+                      <a:tcPr marL="9525" marR="9525" marT="9525" marB="0" anchor="ctr">
+                        <a:lnL w="12700" cap="flat" cmpd="sng" algn="ctr">
+                          <a:solidFill>
+                            <a:schemeClr val="tx1"/>
+                          </a:solidFill>
+                          <a:prstDash val="solid"/>
+                          <a:round/>
+                          <a:headEnd type="none" w="med" len="med"/>
+                          <a:tailEnd type="none" w="med" len="med"/>
+                        </a:lnL>
+                        <a:lnR w="12700" cap="flat" cmpd="sng" algn="ctr">
+                          <a:solidFill>
+                            <a:schemeClr val="tx1"/>
+                          </a:solidFill>
+                          <a:prstDash val="solid"/>
+                          <a:round/>
+                          <a:headEnd type="none" w="med" len="med"/>
+                          <a:tailEnd type="none" w="med" len="med"/>
+                        </a:lnR>
+                        <a:lnT w="12700" cap="flat" cmpd="sng" algn="ctr">
+                          <a:solidFill>
+                            <a:schemeClr val="tx1"/>
+                          </a:solidFill>
+                          <a:prstDash val="solid"/>
+                          <a:round/>
+                          <a:headEnd type="none" w="med" len="med"/>
+                          <a:tailEnd type="none" w="med" len="med"/>
+                        </a:lnT>
+                        <a:lnB w="12700" cap="flat" cmpd="sng" algn="ctr">
+                          <a:solidFill>
+                            <a:schemeClr val="tx1"/>
+                          </a:solidFill>
+                          <a:prstDash val="solid"/>
+                          <a:round/>
+                          <a:headEnd type="none" w="med" len="med"/>
+                          <a:tailEnd type="none" w="med" len="med"/>
+                        </a:lnB>
+                      </a:tcPr>
+                    </a:tc>
+                    <a:tc>
+                      <a:txBody>
+                        <a:bodyPr/>
+                        <a:lstStyle/>
+                        <a:p>
+                          <a:pPr algn="ctr" fontAlgn="b"/>
+                          <a:r>
+                            <a:rPr lang="ru-RU" sz="1800" b="0" i="0" u="none" strike="noStrike" dirty="0">
+                              <a:solidFill>
+                                <a:srgbClr val="000000"/>
+                              </a:solidFill>
+                              <a:effectLst/>
+                              <a:latin typeface="Calibri" panose="020F0502020204030204" pitchFamily="34" charset="0"/>
+                            </a:rPr>
+                            <a:t>Метрики оценки</a:t>
+                          </a:r>
+                        </a:p>
+                      </a:txBody>
+                      <a:tcPr marL="9525" marR="9525" marT="9525" marB="0" anchor="ctr">
+                        <a:lnL w="12700" cap="flat" cmpd="sng" algn="ctr">
+                          <a:solidFill>
+                            <a:schemeClr val="tx1"/>
+                          </a:solidFill>
+                          <a:prstDash val="solid"/>
+                          <a:round/>
+                          <a:headEnd type="none" w="med" len="med"/>
+                          <a:tailEnd type="none" w="med" len="med"/>
+                        </a:lnL>
+                        <a:lnR w="12700" cap="flat" cmpd="sng" algn="ctr">
+                          <a:solidFill>
+                            <a:schemeClr val="tx1"/>
+                          </a:solidFill>
+                          <a:prstDash val="solid"/>
+                          <a:round/>
+                          <a:headEnd type="none" w="med" len="med"/>
+                          <a:tailEnd type="none" w="med" len="med"/>
+                        </a:lnR>
+                        <a:lnT w="12700" cap="flat" cmpd="sng" algn="ctr">
+                          <a:solidFill>
+                            <a:schemeClr val="tx1"/>
+                          </a:solidFill>
+                          <a:prstDash val="solid"/>
+                          <a:round/>
+                          <a:headEnd type="none" w="med" len="med"/>
+                          <a:tailEnd type="none" w="med" len="med"/>
+                        </a:lnT>
+                        <a:lnB w="12700" cap="flat" cmpd="sng" algn="ctr">
+                          <a:solidFill>
+                            <a:schemeClr val="tx1"/>
+                          </a:solidFill>
+                          <a:prstDash val="solid"/>
+                          <a:round/>
+                          <a:headEnd type="none" w="med" len="med"/>
+                          <a:tailEnd type="none" w="med" len="med"/>
+                        </a:lnB>
+                      </a:tcPr>
+                    </a:tc>
+                    <a:tc>
+                      <a:txBody>
+                        <a:bodyPr/>
+                        <a:lstStyle/>
+                        <a:p>
+                          <a:pPr algn="ctr" fontAlgn="b"/>
+                          <a:r>
+                            <a:rPr lang="ru-RU" sz="1800" b="0" i="0" u="none" strike="noStrike" dirty="0">
+                              <a:solidFill>
+                                <a:srgbClr val="000000"/>
+                              </a:solidFill>
+                              <a:effectLst/>
+                              <a:latin typeface="Calibri" panose="020F0502020204030204" pitchFamily="34" charset="0"/>
+                            </a:rPr>
+                            <a:t>Особенности</a:t>
+                          </a:r>
+                        </a:p>
+                      </a:txBody>
+                      <a:tcPr marL="9525" marR="9525" marT="9525" marB="0" anchor="ctr">
+                        <a:lnL w="12700" cap="flat" cmpd="sng" algn="ctr">
+                          <a:solidFill>
+                            <a:schemeClr val="tx1"/>
+                          </a:solidFill>
+                          <a:prstDash val="solid"/>
+                          <a:round/>
+                          <a:headEnd type="none" w="med" len="med"/>
+                          <a:tailEnd type="none" w="med" len="med"/>
+                        </a:lnL>
+                        <a:lnR w="12700" cap="flat" cmpd="sng" algn="ctr">
+                          <a:solidFill>
+                            <a:schemeClr val="tx1"/>
+                          </a:solidFill>
+                          <a:prstDash val="solid"/>
+                          <a:round/>
+                          <a:headEnd type="none" w="med" len="med"/>
+                          <a:tailEnd type="none" w="med" len="med"/>
+                        </a:lnR>
+                        <a:lnT w="12700" cap="flat" cmpd="sng" algn="ctr">
+                          <a:solidFill>
+                            <a:schemeClr val="tx1"/>
+                          </a:solidFill>
+                          <a:prstDash val="solid"/>
+                          <a:round/>
+                          <a:headEnd type="none" w="med" len="med"/>
+                          <a:tailEnd type="none" w="med" len="med"/>
+                        </a:lnT>
+                        <a:lnB w="12700" cap="flat" cmpd="sng" algn="ctr">
+                          <a:solidFill>
+                            <a:schemeClr val="tx1"/>
+                          </a:solidFill>
+                          <a:prstDash val="solid"/>
+                          <a:round/>
+                          <a:headEnd type="none" w="med" len="med"/>
+                          <a:tailEnd type="none" w="med" len="med"/>
+                        </a:lnB>
+                      </a:tcPr>
+                    </a:tc>
+                    <a:extLst>
+                      <a:ext uri="{0D108BD9-81ED-4DB2-BD59-A6C34878D82A}">
+                        <a16:rowId xmlns:a16="http://schemas.microsoft.com/office/drawing/2014/main" val="848971985"/>
+                      </a:ext>
+                    </a:extLst>
+                  </a:tr>
+                  <a:tr h="1242373">
+                    <a:tc>
+                      <a:txBody>
+                        <a:bodyPr/>
+                        <a:lstStyle/>
+                        <a:p>
+                          <a:pPr algn="ctr" fontAlgn="b"/>
+                          <a:r>
+                            <a:rPr lang="ru-RU" sz="1800" b="0" i="0" u="none" strike="noStrike" dirty="0">
+                              <a:solidFill>
+                                <a:srgbClr val="000000"/>
+                              </a:solidFill>
+                              <a:effectLst/>
+                              <a:latin typeface="Calibri" panose="020F0502020204030204" pitchFamily="34" charset="0"/>
+                            </a:rPr>
+                            <a:t>Интервальный</a:t>
+                          </a:r>
+                        </a:p>
+                      </a:txBody>
+                      <a:tcPr marL="9525" marR="9525" marT="9525" marB="0" anchor="ctr">
+                        <a:lnL w="12700" cap="flat" cmpd="sng" algn="ctr">
+                          <a:solidFill>
+                            <a:schemeClr val="tx1"/>
+                          </a:solidFill>
+                          <a:prstDash val="solid"/>
+                          <a:round/>
+                          <a:headEnd type="none" w="med" len="med"/>
+                          <a:tailEnd type="none" w="med" len="med"/>
+                        </a:lnL>
+                        <a:lnR w="12700" cap="flat" cmpd="sng" algn="ctr">
+                          <a:solidFill>
+                            <a:schemeClr val="tx1"/>
+                          </a:solidFill>
+                          <a:prstDash val="solid"/>
+                          <a:round/>
+                          <a:headEnd type="none" w="med" len="med"/>
+                          <a:tailEnd type="none" w="med" len="med"/>
+                        </a:lnR>
+                        <a:lnT w="12700" cap="flat" cmpd="sng" algn="ctr">
+                          <a:solidFill>
+                            <a:schemeClr val="tx1"/>
+                          </a:solidFill>
+                          <a:prstDash val="solid"/>
+                          <a:round/>
+                          <a:headEnd type="none" w="med" len="med"/>
+                          <a:tailEnd type="none" w="med" len="med"/>
+                        </a:lnT>
+                        <a:lnB w="12700" cap="flat" cmpd="sng" algn="ctr">
+                          <a:solidFill>
+                            <a:schemeClr val="tx1"/>
+                          </a:solidFill>
+                          <a:prstDash val="solid"/>
+                          <a:round/>
+                          <a:headEnd type="none" w="med" len="med"/>
+                          <a:tailEnd type="none" w="med" len="med"/>
+                        </a:lnB>
+                      </a:tcPr>
+                    </a:tc>
+                    <a:tc>
+                      <a:txBody>
+                        <a:bodyPr/>
+                        <a:lstStyle/>
+                        <a:p>
+                          <a:pPr algn="ctr" fontAlgn="b"/>
+                          <a:r>
+                            <a:rPr lang="ru-RU" sz="1800" b="0" i="0" u="none" strike="noStrike" dirty="0">
+                              <a:solidFill>
+                                <a:srgbClr val="000000"/>
+                              </a:solidFill>
+                              <a:effectLst/>
+                              <a:latin typeface="Calibri" panose="020F0502020204030204" pitchFamily="34" charset="0"/>
+                            </a:rPr>
+                            <a:t> диапазон с заданным покрытием </a:t>
+                          </a:r>
+                          <a14:m>
+                            <m:oMath xmlns:m="http://schemas.openxmlformats.org/officeDocument/2006/math">
+                              <m:r>
+                                <a:rPr lang="en-US" sz="1800" b="0" i="0" u="none" strike="noStrike" dirty="0" smtClean="0">
+                                  <a:solidFill>
+                                    <a:srgbClr val="000000"/>
+                                  </a:solidFill>
+                                  <a:effectLst/>
+                                  <a:latin typeface="Cambria Math" panose="02040503050406030204" pitchFamily="18" charset="0"/>
+                                </a:rPr>
+                                <m:t>[</m:t>
+                              </m:r>
+                              <m:sSub>
+                                <m:sSubPr>
+                                  <m:ctrlPr>
+                                    <a:rPr lang="ru-RU" sz="1800" b="0" i="1" u="none" strike="noStrike" dirty="0" smtClean="0">
+                                      <a:solidFill>
+                                        <a:srgbClr val="000000"/>
+                                      </a:solidFill>
+                                      <a:effectLst/>
+                                      <a:latin typeface="Cambria Math" panose="02040503050406030204" pitchFamily="18" charset="0"/>
+                                    </a:rPr>
+                                  </m:ctrlPr>
+                                </m:sSubPr>
+                                <m:e>
+                                  <m:r>
+                                    <a:rPr lang="ru-RU" sz="1800" b="0" i="1" u="none" strike="noStrike" dirty="0" smtClean="0">
+                                      <a:solidFill>
+                                        <a:srgbClr val="000000"/>
+                                      </a:solidFill>
+                                      <a:effectLst/>
+                                      <a:latin typeface="Cambria Math" panose="02040503050406030204" pitchFamily="18" charset="0"/>
+                                    </a:rPr>
+                                    <m:t>𝑦</m:t>
+                                  </m:r>
+                                </m:e>
+                                <m:sub>
+                                  <m:r>
+                                    <a:rPr lang="ru-RU" sz="1800" b="0" i="1" u="none" strike="noStrike" dirty="0" smtClean="0">
+                                      <a:solidFill>
+                                        <a:srgbClr val="000000"/>
+                                      </a:solidFill>
+                                      <a:effectLst/>
+                                      <a:latin typeface="Cambria Math" panose="02040503050406030204" pitchFamily="18" charset="0"/>
+                                    </a:rPr>
+                                    <m:t>𝑙𝑜𝑤</m:t>
+                                  </m:r>
+                                </m:sub>
+                              </m:sSub>
+                              <m:r>
+                                <a:rPr lang="ru-RU" sz="1800" b="0" i="1" u="none" strike="noStrike" dirty="0">
+                                  <a:solidFill>
+                                    <a:srgbClr val="000000"/>
+                                  </a:solidFill>
+                                  <a:effectLst/>
+                                  <a:latin typeface="Cambria Math" panose="02040503050406030204" pitchFamily="18" charset="0"/>
+                                </a:rPr>
+                                <m:t>, </m:t>
+                              </m:r>
+                              <m:sSub>
+                                <m:sSubPr>
+                                  <m:ctrlPr>
+                                    <a:rPr lang="ru-RU" sz="1800" b="0" i="1" u="none" strike="noStrike" dirty="0" err="1">
+                                      <a:solidFill>
+                                        <a:srgbClr val="000000"/>
+                                      </a:solidFill>
+                                      <a:effectLst/>
+                                      <a:latin typeface="Cambria Math" panose="02040503050406030204" pitchFamily="18" charset="0"/>
+                                    </a:rPr>
+                                  </m:ctrlPr>
+                                </m:sSubPr>
+                                <m:e>
+                                  <m:r>
+                                    <a:rPr lang="ru-RU" sz="1800" b="0" i="1" u="none" strike="noStrike" dirty="0" err="1">
+                                      <a:solidFill>
+                                        <a:srgbClr val="000000"/>
+                                      </a:solidFill>
+                                      <a:effectLst/>
+                                      <a:latin typeface="Cambria Math" panose="02040503050406030204" pitchFamily="18" charset="0"/>
+                                    </a:rPr>
+                                    <m:t>𝑦</m:t>
+                                  </m:r>
+                                </m:e>
+                                <m:sub>
+                                  <m:r>
+                                    <a:rPr lang="ru-RU" sz="1800" b="0" i="1" u="none" strike="noStrike" dirty="0" err="1">
+                                      <a:solidFill>
+                                        <a:srgbClr val="000000"/>
+                                      </a:solidFill>
+                                      <a:effectLst/>
+                                      <a:latin typeface="Cambria Math" panose="02040503050406030204" pitchFamily="18" charset="0"/>
+                                    </a:rPr>
+                                    <m:t>h𝑖𝑔h</m:t>
+                                  </m:r>
+                                </m:sub>
+                              </m:sSub>
+                              <m:r>
+                                <a:rPr lang="en-US" sz="1800" b="0" i="1" u="none" strike="noStrike" dirty="0" smtClean="0">
+                                  <a:solidFill>
+                                    <a:srgbClr val="000000"/>
+                                  </a:solidFill>
+                                  <a:effectLst/>
+                                  <a:latin typeface="Cambria Math" panose="02040503050406030204" pitchFamily="18" charset="0"/>
+                                </a:rPr>
+                                <m:t>]</m:t>
+                              </m:r>
+                            </m:oMath>
+                          </a14:m>
+                          <a:endParaRPr lang="ru-RU" sz="1800" b="0" i="0" u="none" strike="noStrike" dirty="0">
+                            <a:solidFill>
+                              <a:srgbClr val="000000"/>
+                            </a:solidFill>
+                            <a:effectLst/>
+                            <a:latin typeface="Calibri" panose="020F0502020204030204" pitchFamily="34" charset="0"/>
+                          </a:endParaRPr>
+                        </a:p>
+                      </a:txBody>
+                      <a:tcPr marL="9525" marR="9525" marT="9525" marB="0" anchor="ctr">
+                        <a:lnL w="12700" cap="flat" cmpd="sng" algn="ctr">
+                          <a:solidFill>
+                            <a:schemeClr val="tx1"/>
+                          </a:solidFill>
+                          <a:prstDash val="solid"/>
+                          <a:round/>
+                          <a:headEnd type="none" w="med" len="med"/>
+                          <a:tailEnd type="none" w="med" len="med"/>
+                        </a:lnL>
+                        <a:lnR w="12700" cap="flat" cmpd="sng" algn="ctr">
+                          <a:solidFill>
+                            <a:schemeClr val="tx1"/>
+                          </a:solidFill>
+                          <a:prstDash val="solid"/>
+                          <a:round/>
+                          <a:headEnd type="none" w="med" len="med"/>
+                          <a:tailEnd type="none" w="med" len="med"/>
+                        </a:lnR>
+                        <a:lnT w="12700" cap="flat" cmpd="sng" algn="ctr">
+                          <a:solidFill>
+                            <a:schemeClr val="tx1"/>
+                          </a:solidFill>
+                          <a:prstDash val="solid"/>
+                          <a:round/>
+                          <a:headEnd type="none" w="med" len="med"/>
+                          <a:tailEnd type="none" w="med" len="med"/>
+                        </a:lnT>
+                        <a:lnB w="12700" cap="flat" cmpd="sng" algn="ctr">
+                          <a:solidFill>
+                            <a:schemeClr val="tx1"/>
+                          </a:solidFill>
+                          <a:prstDash val="solid"/>
+                          <a:round/>
+                          <a:headEnd type="none" w="med" len="med"/>
+                          <a:tailEnd type="none" w="med" len="med"/>
+                        </a:lnB>
+                      </a:tcPr>
+                    </a:tc>
+                    <a:tc>
+                      <a:txBody>
+                        <a:bodyPr/>
+                        <a:lstStyle/>
+                        <a:p>
+                          <a:pPr algn="ctr" fontAlgn="b"/>
+                          <a:r>
+                            <a:rPr lang="ru-RU" sz="1800" b="0" i="0" u="none" strike="noStrike" dirty="0">
+                              <a:solidFill>
+                                <a:srgbClr val="000000"/>
+                              </a:solidFill>
+                              <a:effectLst/>
+                              <a:latin typeface="Calibri" panose="020F0502020204030204" pitchFamily="34" charset="0"/>
+                            </a:rPr>
+                            <a:t>Определить</a:t>
+                          </a:r>
+                          <a:r>
+                            <a:rPr lang="ru-RU" sz="1800" b="0" i="0" u="none" strike="noStrike" baseline="0" dirty="0">
+                              <a:solidFill>
+                                <a:srgbClr val="000000"/>
+                              </a:solidFill>
+                              <a:effectLst/>
+                              <a:latin typeface="Calibri" panose="020F0502020204030204" pitchFamily="34" charset="0"/>
+                            </a:rPr>
+                            <a:t> ш</a:t>
+                          </a:r>
+                          <a:r>
+                            <a:rPr lang="ru-RU" sz="1800" b="0" i="0" u="none" strike="noStrike" dirty="0">
+                              <a:solidFill>
+                                <a:srgbClr val="000000"/>
+                              </a:solidFill>
+                              <a:effectLst/>
+                              <a:latin typeface="Calibri" panose="020F0502020204030204" pitchFamily="34" charset="0"/>
+                            </a:rPr>
+                            <a:t>ирину и покрытие интервалов </a:t>
+                          </a:r>
+                        </a:p>
+                      </a:txBody>
+                      <a:tcPr marL="9525" marR="9525" marT="9525" marB="0" anchor="ctr">
+                        <a:lnL w="12700" cap="flat" cmpd="sng" algn="ctr">
+                          <a:solidFill>
+                            <a:schemeClr val="tx1"/>
+                          </a:solidFill>
+                          <a:prstDash val="solid"/>
+                          <a:round/>
+                          <a:headEnd type="none" w="med" len="med"/>
+                          <a:tailEnd type="none" w="med" len="med"/>
+                        </a:lnL>
+                        <a:lnR w="12700" cap="flat" cmpd="sng" algn="ctr">
+                          <a:solidFill>
+                            <a:schemeClr val="tx1"/>
+                          </a:solidFill>
+                          <a:prstDash val="solid"/>
+                          <a:round/>
+                          <a:headEnd type="none" w="med" len="med"/>
+                          <a:tailEnd type="none" w="med" len="med"/>
+                        </a:lnR>
+                        <a:lnT w="12700" cap="flat" cmpd="sng" algn="ctr">
+                          <a:solidFill>
+                            <a:schemeClr val="tx1"/>
+                          </a:solidFill>
+                          <a:prstDash val="solid"/>
+                          <a:round/>
+                          <a:headEnd type="none" w="med" len="med"/>
+                          <a:tailEnd type="none" w="med" len="med"/>
+                        </a:lnT>
+                        <a:lnB w="12700" cap="flat" cmpd="sng" algn="ctr">
+                          <a:solidFill>
+                            <a:schemeClr val="tx1"/>
+                          </a:solidFill>
+                          <a:prstDash val="solid"/>
+                          <a:round/>
+                          <a:headEnd type="none" w="med" len="med"/>
+                          <a:tailEnd type="none" w="med" len="med"/>
+                        </a:lnB>
+                      </a:tcPr>
+                    </a:tc>
+                    <a:tc>
+                      <a:txBody>
+                        <a:bodyPr/>
+                        <a:lstStyle/>
+                        <a:p>
+                          <a:pPr algn="ctr" fontAlgn="b"/>
+                          <a:r>
+                            <a:rPr lang="en-US" sz="1800" b="0" i="0" u="none" strike="noStrike" dirty="0">
+                              <a:solidFill>
+                                <a:srgbClr val="000000"/>
+                              </a:solidFill>
+                              <a:effectLst/>
+                              <a:latin typeface="Calibri" panose="020F0502020204030204" pitchFamily="34" charset="0"/>
+                            </a:rPr>
+                            <a:t>Coverage, Mean Width</a:t>
+                          </a:r>
+                        </a:p>
+                      </a:txBody>
+                      <a:tcPr marL="9525" marR="9525" marT="9525" marB="0" anchor="ctr">
+                        <a:lnL w="12700" cap="flat" cmpd="sng" algn="ctr">
+                          <a:solidFill>
+                            <a:schemeClr val="tx1"/>
+                          </a:solidFill>
+                          <a:prstDash val="solid"/>
+                          <a:round/>
+                          <a:headEnd type="none" w="med" len="med"/>
+                          <a:tailEnd type="none" w="med" len="med"/>
+                        </a:lnL>
+                        <a:lnR w="12700" cap="flat" cmpd="sng" algn="ctr">
+                          <a:solidFill>
+                            <a:schemeClr val="tx1"/>
+                          </a:solidFill>
+                          <a:prstDash val="solid"/>
+                          <a:round/>
+                          <a:headEnd type="none" w="med" len="med"/>
+                          <a:tailEnd type="none" w="med" len="med"/>
+                        </a:lnR>
+                        <a:lnT w="12700" cap="flat" cmpd="sng" algn="ctr">
+                          <a:solidFill>
+                            <a:schemeClr val="tx1"/>
+                          </a:solidFill>
+                          <a:prstDash val="solid"/>
+                          <a:round/>
+                          <a:headEnd type="none" w="med" len="med"/>
+                          <a:tailEnd type="none" w="med" len="med"/>
+                        </a:lnT>
+                        <a:lnB w="12700" cap="flat" cmpd="sng" algn="ctr">
+                          <a:solidFill>
+                            <a:schemeClr val="tx1"/>
+                          </a:solidFill>
+                          <a:prstDash val="solid"/>
+                          <a:round/>
+                          <a:headEnd type="none" w="med" len="med"/>
+                          <a:tailEnd type="none" w="med" len="med"/>
+                        </a:lnB>
+                      </a:tcPr>
+                    </a:tc>
+                    <a:tc>
+                      <a:txBody>
+                        <a:bodyPr/>
+                        <a:lstStyle/>
+                        <a:p>
+                          <a:pPr algn="ctr" fontAlgn="b"/>
+                          <a:r>
+                            <a:rPr lang="ru-RU" sz="1800" b="0" i="0" u="none" strike="noStrike" dirty="0">
+                              <a:solidFill>
+                                <a:srgbClr val="000000"/>
+                              </a:solidFill>
+                              <a:effectLst/>
+                              <a:latin typeface="Calibri" panose="020F0502020204030204" pitchFamily="34" charset="0"/>
+                            </a:rPr>
+                            <a:t>Легко интерпретировать, но не покрывает выбросы</a:t>
+                          </a:r>
+                          <a:endParaRPr lang="en-US" sz="1800" b="0" i="0" u="none" strike="noStrike" dirty="0">
+                            <a:solidFill>
+                              <a:srgbClr val="000000"/>
+                            </a:solidFill>
+                            <a:effectLst/>
+                            <a:latin typeface="Calibri" panose="020F0502020204030204" pitchFamily="34" charset="0"/>
+                          </a:endParaRPr>
+                        </a:p>
+                      </a:txBody>
+                      <a:tcPr marL="9525" marR="9525" marT="9525" marB="0" anchor="ctr">
+                        <a:lnL w="12700" cap="flat" cmpd="sng" algn="ctr">
+                          <a:solidFill>
+                            <a:schemeClr val="tx1"/>
+                          </a:solidFill>
+                          <a:prstDash val="solid"/>
+                          <a:round/>
+                          <a:headEnd type="none" w="med" len="med"/>
+                          <a:tailEnd type="none" w="med" len="med"/>
+                        </a:lnL>
+                        <a:lnR w="12700" cap="flat" cmpd="sng" algn="ctr">
+                          <a:solidFill>
+                            <a:schemeClr val="tx1"/>
+                          </a:solidFill>
+                          <a:prstDash val="solid"/>
+                          <a:round/>
+                          <a:headEnd type="none" w="med" len="med"/>
+                          <a:tailEnd type="none" w="med" len="med"/>
+                        </a:lnR>
+                        <a:lnT w="12700" cap="flat" cmpd="sng" algn="ctr">
+                          <a:solidFill>
+                            <a:schemeClr val="tx1"/>
+                          </a:solidFill>
+                          <a:prstDash val="solid"/>
+                          <a:round/>
+                          <a:headEnd type="none" w="med" len="med"/>
+                          <a:tailEnd type="none" w="med" len="med"/>
+                        </a:lnT>
+                        <a:lnB w="12700" cap="flat" cmpd="sng" algn="ctr">
+                          <a:solidFill>
+                            <a:schemeClr val="tx1"/>
+                          </a:solidFill>
+                          <a:prstDash val="solid"/>
+                          <a:round/>
+                          <a:headEnd type="none" w="med" len="med"/>
+                          <a:tailEnd type="none" w="med" len="med"/>
+                        </a:lnB>
+                      </a:tcPr>
+                    </a:tc>
+                    <a:extLst>
+                      <a:ext uri="{0D108BD9-81ED-4DB2-BD59-A6C34878D82A}">
+                        <a16:rowId xmlns:a16="http://schemas.microsoft.com/office/drawing/2014/main" val="3874609934"/>
+                      </a:ext>
+                    </a:extLst>
+                  </a:tr>
+                  <a:tr h="934452">
+                    <a:tc>
+                      <a:txBody>
+                        <a:bodyPr/>
+                        <a:lstStyle/>
+                        <a:p>
+                          <a:pPr algn="ctr" fontAlgn="b"/>
+                          <a:r>
+                            <a:rPr lang="ru-RU" sz="1800" b="0" i="0" u="none" strike="noStrike">
+                              <a:solidFill>
+                                <a:srgbClr val="000000"/>
+                              </a:solidFill>
+                              <a:effectLst/>
+                              <a:latin typeface="Calibri" panose="020F0502020204030204" pitchFamily="34" charset="0"/>
+                            </a:rPr>
+                            <a:t>Квантильный</a:t>
+                          </a:r>
+                        </a:p>
+                      </a:txBody>
+                      <a:tcPr marL="9525" marR="9525" marT="9525" marB="0" anchor="ctr">
+                        <a:lnL w="12700" cap="flat" cmpd="sng" algn="ctr">
+                          <a:solidFill>
+                            <a:schemeClr val="tx1"/>
+                          </a:solidFill>
+                          <a:prstDash val="solid"/>
+                          <a:round/>
+                          <a:headEnd type="none" w="med" len="med"/>
+                          <a:tailEnd type="none" w="med" len="med"/>
+                        </a:lnL>
+                        <a:lnR w="12700" cap="flat" cmpd="sng" algn="ctr">
+                          <a:solidFill>
+                            <a:schemeClr val="tx1"/>
+                          </a:solidFill>
+                          <a:prstDash val="solid"/>
+                          <a:round/>
+                          <a:headEnd type="none" w="med" len="med"/>
+                          <a:tailEnd type="none" w="med" len="med"/>
+                        </a:lnR>
+                        <a:lnT w="12700" cap="flat" cmpd="sng" algn="ctr">
+                          <a:solidFill>
+                            <a:schemeClr val="tx1"/>
+                          </a:solidFill>
+                          <a:prstDash val="solid"/>
+                          <a:round/>
+                          <a:headEnd type="none" w="med" len="med"/>
+                          <a:tailEnd type="none" w="med" len="med"/>
+                        </a:lnT>
+                        <a:lnB w="12700" cap="flat" cmpd="sng" algn="ctr">
+                          <a:solidFill>
+                            <a:schemeClr val="tx1"/>
+                          </a:solidFill>
+                          <a:prstDash val="solid"/>
+                          <a:round/>
+                          <a:headEnd type="none" w="med" len="med"/>
+                          <a:tailEnd type="none" w="med" len="med"/>
+                        </a:lnB>
+                      </a:tcPr>
+                    </a:tc>
+                    <a:tc>
+                      <a:txBody>
+                        <a:bodyPr/>
+                        <a:lstStyle/>
+                        <a:p>
+                          <a:pPr algn="ctr" fontAlgn="b"/>
+                          <a:r>
+                            <a:rPr lang="ru-RU" sz="1800" b="0" i="0" u="none" strike="noStrike" dirty="0">
+                              <a:solidFill>
+                                <a:srgbClr val="000000"/>
+                              </a:solidFill>
+                              <a:effectLst/>
+                              <a:latin typeface="Calibri" panose="020F0502020204030204" pitchFamily="34" charset="0"/>
+                            </a:rPr>
+                            <a:t>Предсказать конкретный квантиль </a:t>
+                          </a:r>
+                          <a14:m>
+                            <m:oMath xmlns:m="http://schemas.openxmlformats.org/officeDocument/2006/math">
+                              <m:sSub>
+                                <m:sSubPr>
+                                  <m:ctrlPr>
+                                    <a:rPr lang="ru-RU" sz="1800" b="0" i="1" u="none" strike="noStrike" dirty="0" smtClean="0">
+                                      <a:solidFill>
+                                        <a:srgbClr val="000000"/>
+                                      </a:solidFill>
+                                      <a:effectLst/>
+                                      <a:latin typeface="Cambria Math" panose="02040503050406030204" pitchFamily="18" charset="0"/>
+                                    </a:rPr>
+                                  </m:ctrlPr>
+                                </m:sSubPr>
+                                <m:e>
+                                  <m:r>
+                                    <a:rPr lang="ru-RU" sz="1800" b="0" i="1" u="none" strike="noStrike" dirty="0" smtClean="0">
+                                      <a:solidFill>
+                                        <a:srgbClr val="000000"/>
+                                      </a:solidFill>
+                                      <a:effectLst/>
+                                      <a:latin typeface="Cambria Math" panose="02040503050406030204" pitchFamily="18" charset="0"/>
+                                    </a:rPr>
+                                    <m:t>𝑦</m:t>
+                                  </m:r>
+                                </m:e>
+                                <m:sub>
+                                  <m:r>
+                                    <a:rPr lang="ru-RU" sz="1800" b="0" i="1" u="none" strike="noStrike" dirty="0" smtClean="0">
+                                      <a:solidFill>
+                                        <a:srgbClr val="000000"/>
+                                      </a:solidFill>
+                                      <a:effectLst/>
+                                      <a:latin typeface="Cambria Math" panose="02040503050406030204" pitchFamily="18" charset="0"/>
+                                    </a:rPr>
+                                    <m:t>𝜏</m:t>
+                                  </m:r>
+                                </m:sub>
+                              </m:sSub>
+                            </m:oMath>
+                          </a14:m>
+                          <a:endParaRPr lang="ru-RU" sz="1800" b="0" i="0" u="none" strike="noStrike" dirty="0">
+                            <a:solidFill>
+                              <a:srgbClr val="000000"/>
+                            </a:solidFill>
+                            <a:effectLst/>
+                            <a:latin typeface="Calibri" panose="020F0502020204030204" pitchFamily="34" charset="0"/>
+                          </a:endParaRPr>
+                        </a:p>
+                      </a:txBody>
+                      <a:tcPr marL="9525" marR="9525" marT="9525" marB="0" anchor="ctr">
+                        <a:lnL w="12700" cap="flat" cmpd="sng" algn="ctr">
+                          <a:solidFill>
+                            <a:schemeClr val="tx1"/>
+                          </a:solidFill>
+                          <a:prstDash val="solid"/>
+                          <a:round/>
+                          <a:headEnd type="none" w="med" len="med"/>
+                          <a:tailEnd type="none" w="med" len="med"/>
+                        </a:lnL>
+                        <a:lnR w="12700" cap="flat" cmpd="sng" algn="ctr">
+                          <a:solidFill>
+                            <a:schemeClr val="tx1"/>
+                          </a:solidFill>
+                          <a:prstDash val="solid"/>
+                          <a:round/>
+                          <a:headEnd type="none" w="med" len="med"/>
+                          <a:tailEnd type="none" w="med" len="med"/>
+                        </a:lnR>
+                        <a:lnT w="12700" cap="flat" cmpd="sng" algn="ctr">
+                          <a:solidFill>
+                            <a:schemeClr val="tx1"/>
+                          </a:solidFill>
+                          <a:prstDash val="solid"/>
+                          <a:round/>
+                          <a:headEnd type="none" w="med" len="med"/>
+                          <a:tailEnd type="none" w="med" len="med"/>
+                        </a:lnT>
+                        <a:lnB w="12700" cap="flat" cmpd="sng" algn="ctr">
+                          <a:solidFill>
+                            <a:schemeClr val="tx1"/>
+                          </a:solidFill>
+                          <a:prstDash val="solid"/>
+                          <a:round/>
+                          <a:headEnd type="none" w="med" len="med"/>
+                          <a:tailEnd type="none" w="med" len="med"/>
+                        </a:lnB>
+                      </a:tcPr>
+                    </a:tc>
+                    <a:tc>
+                      <a:txBody>
+                        <a:bodyPr/>
+                        <a:lstStyle/>
+                        <a:p>
+                          <a:pPr algn="ctr" fontAlgn="b"/>
+                          <a:r>
+                            <a:rPr lang="ru-RU" sz="1800" b="0" i="0" u="none" strike="noStrike" dirty="0">
+                              <a:solidFill>
+                                <a:srgbClr val="000000"/>
+                              </a:solidFill>
+                              <a:effectLst/>
+                              <a:latin typeface="Calibri" panose="020F0502020204030204" pitchFamily="34" charset="0"/>
+                            </a:rPr>
+                            <a:t>точность определения квантилей </a:t>
+                          </a:r>
+                        </a:p>
+                      </a:txBody>
+                      <a:tcPr marL="9525" marR="9525" marT="9525" marB="0" anchor="ctr">
+                        <a:lnL w="12700" cap="flat" cmpd="sng" algn="ctr">
+                          <a:solidFill>
+                            <a:schemeClr val="tx1"/>
+                          </a:solidFill>
+                          <a:prstDash val="solid"/>
+                          <a:round/>
+                          <a:headEnd type="none" w="med" len="med"/>
+                          <a:tailEnd type="none" w="med" len="med"/>
+                        </a:lnL>
+                        <a:lnR w="12700" cap="flat" cmpd="sng" algn="ctr">
+                          <a:solidFill>
+                            <a:schemeClr val="tx1"/>
+                          </a:solidFill>
+                          <a:prstDash val="solid"/>
+                          <a:round/>
+                          <a:headEnd type="none" w="med" len="med"/>
+                          <a:tailEnd type="none" w="med" len="med"/>
+                        </a:lnR>
+                        <a:lnT w="12700" cap="flat" cmpd="sng" algn="ctr">
+                          <a:solidFill>
+                            <a:schemeClr val="tx1"/>
+                          </a:solidFill>
+                          <a:prstDash val="solid"/>
+                          <a:round/>
+                          <a:headEnd type="none" w="med" len="med"/>
+                          <a:tailEnd type="none" w="med" len="med"/>
+                        </a:lnT>
+                        <a:lnB w="12700" cap="flat" cmpd="sng" algn="ctr">
+                          <a:solidFill>
+                            <a:schemeClr val="tx1"/>
+                          </a:solidFill>
+                          <a:prstDash val="solid"/>
+                          <a:round/>
+                          <a:headEnd type="none" w="med" len="med"/>
+                          <a:tailEnd type="none" w="med" len="med"/>
+                        </a:lnB>
+                      </a:tcPr>
+                    </a:tc>
+                    <a:tc>
+                      <a:txBody>
+                        <a:bodyPr/>
+                        <a:lstStyle/>
+                        <a:p>
+                          <a:pPr algn="ctr" fontAlgn="b"/>
+                          <a:r>
+                            <a:rPr lang="en-US" sz="1800" b="0" i="0" u="none" strike="noStrike" dirty="0">
+                              <a:solidFill>
+                                <a:srgbClr val="000000"/>
+                              </a:solidFill>
+                              <a:effectLst/>
+                              <a:latin typeface="Calibri" panose="020F0502020204030204" pitchFamily="34" charset="0"/>
+                            </a:rPr>
+                            <a:t>Pinball Loss</a:t>
+                          </a:r>
+                        </a:p>
+                      </a:txBody>
+                      <a:tcPr marL="9525" marR="9525" marT="9525" marB="0" anchor="ctr">
+                        <a:lnL w="12700" cap="flat" cmpd="sng" algn="ctr">
+                          <a:solidFill>
+                            <a:schemeClr val="tx1"/>
+                          </a:solidFill>
+                          <a:prstDash val="solid"/>
+                          <a:round/>
+                          <a:headEnd type="none" w="med" len="med"/>
+                          <a:tailEnd type="none" w="med" len="med"/>
+                        </a:lnL>
+                        <a:lnR w="12700" cap="flat" cmpd="sng" algn="ctr">
+                          <a:solidFill>
+                            <a:schemeClr val="tx1"/>
+                          </a:solidFill>
+                          <a:prstDash val="solid"/>
+                          <a:round/>
+                          <a:headEnd type="none" w="med" len="med"/>
+                          <a:tailEnd type="none" w="med" len="med"/>
+                        </a:lnR>
+                        <a:lnT w="12700" cap="flat" cmpd="sng" algn="ctr">
+                          <a:solidFill>
+                            <a:schemeClr val="tx1"/>
+                          </a:solidFill>
+                          <a:prstDash val="solid"/>
+                          <a:round/>
+                          <a:headEnd type="none" w="med" len="med"/>
+                          <a:tailEnd type="none" w="med" len="med"/>
+                        </a:lnT>
+                        <a:lnB w="12700" cap="flat" cmpd="sng" algn="ctr">
+                          <a:solidFill>
+                            <a:schemeClr val="tx1"/>
+                          </a:solidFill>
+                          <a:prstDash val="solid"/>
+                          <a:round/>
+                          <a:headEnd type="none" w="med" len="med"/>
+                          <a:tailEnd type="none" w="med" len="med"/>
+                        </a:lnB>
+                      </a:tcPr>
+                    </a:tc>
+                    <a:tc>
+                      <a:txBody>
+                        <a:bodyPr/>
+                        <a:lstStyle/>
+                        <a:p>
+                          <a:pPr algn="ctr" fontAlgn="b"/>
+                          <a:r>
+                            <a:rPr lang="ru-RU" sz="1800" b="0" i="0" u="none" strike="noStrike" dirty="0">
+                              <a:solidFill>
+                                <a:srgbClr val="000000"/>
+                              </a:solidFill>
+                              <a:effectLst/>
+                              <a:latin typeface="Calibri" panose="020F0502020204030204" pitchFamily="34" charset="0"/>
+                            </a:rPr>
+                            <a:t>Анализ</a:t>
+                          </a:r>
+                          <a:r>
+                            <a:rPr lang="ru-RU" sz="1800" b="0" i="0" u="none" strike="noStrike" baseline="0" dirty="0">
+                              <a:solidFill>
+                                <a:srgbClr val="000000"/>
+                              </a:solidFill>
+                              <a:effectLst/>
+                              <a:latin typeface="Calibri" panose="020F0502020204030204" pitchFamily="34" charset="0"/>
+                            </a:rPr>
+                            <a:t> хвостов, не покрывает интервалы</a:t>
+                          </a:r>
+                          <a:endParaRPr lang="en-US" sz="1800" b="0" i="0" u="none" strike="noStrike" dirty="0">
+                            <a:solidFill>
+                              <a:srgbClr val="000000"/>
+                            </a:solidFill>
+                            <a:effectLst/>
+                            <a:latin typeface="Calibri" panose="020F0502020204030204" pitchFamily="34" charset="0"/>
+                          </a:endParaRPr>
+                        </a:p>
+                      </a:txBody>
+                      <a:tcPr marL="9525" marR="9525" marT="9525" marB="0" anchor="ctr">
+                        <a:lnL w="12700" cap="flat" cmpd="sng" algn="ctr">
+                          <a:solidFill>
+                            <a:schemeClr val="tx1"/>
+                          </a:solidFill>
+                          <a:prstDash val="solid"/>
+                          <a:round/>
+                          <a:headEnd type="none" w="med" len="med"/>
+                          <a:tailEnd type="none" w="med" len="med"/>
+                        </a:lnL>
+                        <a:lnR w="12700" cap="flat" cmpd="sng" algn="ctr">
+                          <a:solidFill>
+                            <a:schemeClr val="tx1"/>
+                          </a:solidFill>
+                          <a:prstDash val="solid"/>
+                          <a:round/>
+                          <a:headEnd type="none" w="med" len="med"/>
+                          <a:tailEnd type="none" w="med" len="med"/>
+                        </a:lnR>
+                        <a:lnT w="12700" cap="flat" cmpd="sng" algn="ctr">
+                          <a:solidFill>
+                            <a:schemeClr val="tx1"/>
+                          </a:solidFill>
+                          <a:prstDash val="solid"/>
+                          <a:round/>
+                          <a:headEnd type="none" w="med" len="med"/>
+                          <a:tailEnd type="none" w="med" len="med"/>
+                        </a:lnT>
+                        <a:lnB w="12700" cap="flat" cmpd="sng" algn="ctr">
+                          <a:solidFill>
+                            <a:schemeClr val="tx1"/>
+                          </a:solidFill>
+                          <a:prstDash val="solid"/>
+                          <a:round/>
+                          <a:headEnd type="none" w="med" len="med"/>
+                          <a:tailEnd type="none" w="med" len="med"/>
+                        </a:lnB>
+                      </a:tcPr>
+                    </a:tc>
+                    <a:extLst>
+                      <a:ext uri="{0D108BD9-81ED-4DB2-BD59-A6C34878D82A}">
+                        <a16:rowId xmlns:a16="http://schemas.microsoft.com/office/drawing/2014/main" val="971865774"/>
+                      </a:ext>
+                    </a:extLst>
+                  </a:tr>
+                  <a:tr h="626533">
+                    <a:tc>
+                      <a:txBody>
+                        <a:bodyPr/>
+                        <a:lstStyle/>
+                        <a:p>
+                          <a:pPr algn="ctr" fontAlgn="b"/>
+                          <a:r>
+                            <a:rPr lang="ru-RU" sz="1800" b="0" i="0" u="none" strike="noStrike">
+                              <a:solidFill>
+                                <a:srgbClr val="000000"/>
+                              </a:solidFill>
+                              <a:effectLst/>
+                              <a:latin typeface="Calibri" panose="020F0502020204030204" pitchFamily="34" charset="0"/>
+                            </a:rPr>
+                            <a:t>Вероятностный</a:t>
+                          </a:r>
+                        </a:p>
+                      </a:txBody>
+                      <a:tcPr marL="9525" marR="9525" marT="9525" marB="0" anchor="ctr">
+                        <a:lnL w="12700" cap="flat" cmpd="sng" algn="ctr">
+                          <a:solidFill>
+                            <a:schemeClr val="tx1"/>
+                          </a:solidFill>
+                          <a:prstDash val="solid"/>
+                          <a:round/>
+                          <a:headEnd type="none" w="med" len="med"/>
+                          <a:tailEnd type="none" w="med" len="med"/>
+                        </a:lnL>
+                        <a:lnR w="12700" cap="flat" cmpd="sng" algn="ctr">
+                          <a:solidFill>
+                            <a:schemeClr val="tx1"/>
+                          </a:solidFill>
+                          <a:prstDash val="solid"/>
+                          <a:round/>
+                          <a:headEnd type="none" w="med" len="med"/>
+                          <a:tailEnd type="none" w="med" len="med"/>
+                        </a:lnR>
+                        <a:lnT w="12700" cap="flat" cmpd="sng" algn="ctr">
+                          <a:solidFill>
+                            <a:schemeClr val="tx1"/>
+                          </a:solidFill>
+                          <a:prstDash val="solid"/>
+                          <a:round/>
+                          <a:headEnd type="none" w="med" len="med"/>
+                          <a:tailEnd type="none" w="med" len="med"/>
+                        </a:lnT>
+                        <a:lnB w="12700" cap="flat" cmpd="sng" algn="ctr">
+                          <a:solidFill>
+                            <a:schemeClr val="tx1"/>
+                          </a:solidFill>
+                          <a:prstDash val="solid"/>
+                          <a:round/>
+                          <a:headEnd type="none" w="med" len="med"/>
+                          <a:tailEnd type="none" w="med" len="med"/>
+                        </a:lnB>
+                      </a:tcPr>
+                    </a:tc>
+                    <a:tc>
+                      <a:txBody>
+                        <a:bodyPr/>
+                        <a:lstStyle/>
+                        <a:p>
+                          <a:pPr algn="ctr" fontAlgn="b"/>
+                          <a:r>
+                            <a:rPr lang="ru-RU" sz="1800" b="0" i="0" u="none" strike="noStrike" dirty="0">
+                              <a:solidFill>
+                                <a:srgbClr val="000000"/>
+                              </a:solidFill>
+                              <a:effectLst/>
+                              <a:latin typeface="Calibri" panose="020F0502020204030204" pitchFamily="34" charset="0"/>
+                            </a:rPr>
+                            <a:t>полное распределение </a:t>
+                          </a:r>
+                          <a14:m>
+                            <m:oMath xmlns:m="http://schemas.openxmlformats.org/officeDocument/2006/math">
+                              <m:sSup>
+                                <m:sSupPr>
+                                  <m:ctrlPr>
+                                    <a:rPr lang="ru-RU" sz="1800" b="0" i="1" u="none" strike="noStrike" dirty="0" smtClean="0">
+                                      <a:solidFill>
+                                        <a:srgbClr val="000000"/>
+                                      </a:solidFill>
+                                      <a:effectLst/>
+                                      <a:latin typeface="Cambria Math" panose="02040503050406030204" pitchFamily="18" charset="0"/>
+                                    </a:rPr>
+                                  </m:ctrlPr>
+                                </m:sSupPr>
+                                <m:e>
+                                  <m:r>
+                                    <a:rPr lang="ru-RU" sz="1800" b="0" i="1" u="none" strike="noStrike" dirty="0" smtClean="0">
+                                      <a:solidFill>
+                                        <a:srgbClr val="000000"/>
+                                      </a:solidFill>
+                                      <a:effectLst/>
+                                      <a:latin typeface="Cambria Math" panose="02040503050406030204" pitchFamily="18" charset="0"/>
+                                    </a:rPr>
+                                    <m:t>𝐹</m:t>
+                                  </m:r>
+                                </m:e>
+                                <m:sup>
+                                  <m:r>
+                                    <a:rPr lang="ru-RU" sz="1800" b="0" i="1" u="none" strike="noStrike" dirty="0" smtClean="0">
+                                      <a:solidFill>
+                                        <a:srgbClr val="000000"/>
+                                      </a:solidFill>
+                                      <a:effectLst/>
+                                      <a:latin typeface="Cambria Math" panose="02040503050406030204" pitchFamily="18" charset="0"/>
+                                    </a:rPr>
+                                    <m:t>−1</m:t>
+                                  </m:r>
+                                </m:sup>
+                              </m:sSup>
+                              <m:r>
+                                <a:rPr lang="ru-RU" sz="1800" b="0" i="1" u="none" strike="noStrike" dirty="0" smtClean="0">
+                                  <a:solidFill>
+                                    <a:srgbClr val="000000"/>
+                                  </a:solidFill>
+                                  <a:effectLst/>
+                                  <a:latin typeface="Cambria Math" panose="02040503050406030204" pitchFamily="18" charset="0"/>
+                                </a:rPr>
+                                <m:t>(</m:t>
+                              </m:r>
+                              <m:r>
+                                <a:rPr lang="ru-RU" sz="1800" b="0" i="1" u="none" strike="noStrike" dirty="0" smtClean="0">
+                                  <a:solidFill>
+                                    <a:srgbClr val="000000"/>
+                                  </a:solidFill>
+                                  <a:effectLst/>
+                                  <a:latin typeface="Cambria Math" panose="02040503050406030204" pitchFamily="18" charset="0"/>
+                                </a:rPr>
+                                <m:t>𝑦</m:t>
+                              </m:r>
+                              <m:r>
+                                <a:rPr lang="ru-RU" sz="1800" b="0" i="1" u="none" strike="noStrike" dirty="0" smtClean="0">
+                                  <a:solidFill>
+                                    <a:srgbClr val="000000"/>
+                                  </a:solidFill>
+                                  <a:effectLst/>
+                                  <a:latin typeface="Cambria Math" panose="02040503050406030204" pitchFamily="18" charset="0"/>
+                                </a:rPr>
+                                <m:t>)</m:t>
+                              </m:r>
+                            </m:oMath>
+                          </a14:m>
+                          <a:endParaRPr lang="ru-RU" sz="1800" b="0" i="0" u="none" strike="noStrike" dirty="0">
+                            <a:solidFill>
+                              <a:srgbClr val="000000"/>
+                            </a:solidFill>
+                            <a:effectLst/>
+                            <a:latin typeface="Calibri" panose="020F0502020204030204" pitchFamily="34" charset="0"/>
+                          </a:endParaRPr>
+                        </a:p>
+                      </a:txBody>
+                      <a:tcPr marL="9525" marR="9525" marT="9525" marB="0" anchor="ctr">
+                        <a:lnL w="12700" cap="flat" cmpd="sng" algn="ctr">
+                          <a:solidFill>
+                            <a:schemeClr val="tx1"/>
+                          </a:solidFill>
+                          <a:prstDash val="solid"/>
+                          <a:round/>
+                          <a:headEnd type="none" w="med" len="med"/>
+                          <a:tailEnd type="none" w="med" len="med"/>
+                        </a:lnL>
+                        <a:lnR w="12700" cap="flat" cmpd="sng" algn="ctr">
+                          <a:solidFill>
+                            <a:schemeClr val="tx1"/>
+                          </a:solidFill>
+                          <a:prstDash val="solid"/>
+                          <a:round/>
+                          <a:headEnd type="none" w="med" len="med"/>
+                          <a:tailEnd type="none" w="med" len="med"/>
+                        </a:lnR>
+                        <a:lnT w="12700" cap="flat" cmpd="sng" algn="ctr">
+                          <a:solidFill>
+                            <a:schemeClr val="tx1"/>
+                          </a:solidFill>
+                          <a:prstDash val="solid"/>
+                          <a:round/>
+                          <a:headEnd type="none" w="med" len="med"/>
+                          <a:tailEnd type="none" w="med" len="med"/>
+                        </a:lnT>
+                        <a:lnB w="12700" cap="flat" cmpd="sng" algn="ctr">
+                          <a:solidFill>
+                            <a:schemeClr val="tx1"/>
+                          </a:solidFill>
+                          <a:prstDash val="solid"/>
+                          <a:round/>
+                          <a:headEnd type="none" w="med" len="med"/>
+                          <a:tailEnd type="none" w="med" len="med"/>
+                        </a:lnB>
+                      </a:tcPr>
+                    </a:tc>
+                    <a:tc>
+                      <a:txBody>
+                        <a:bodyPr/>
+                        <a:lstStyle/>
+                        <a:p>
+                          <a:pPr algn="ctr" fontAlgn="b"/>
+                          <a:r>
+                            <a:rPr lang="ru-RU" sz="1800" b="0" i="0" u="none" strike="noStrike">
+                              <a:solidFill>
+                                <a:srgbClr val="000000"/>
+                              </a:solidFill>
+                              <a:effectLst/>
+                              <a:latin typeface="Calibri" panose="020F0502020204030204" pitchFamily="34" charset="0"/>
+                            </a:rPr>
+                            <a:t>качество всего прогнозного распределения </a:t>
+                          </a:r>
+                        </a:p>
+                      </a:txBody>
+                      <a:tcPr marL="9525" marR="9525" marT="9525" marB="0" anchor="ctr">
+                        <a:lnL w="12700" cap="flat" cmpd="sng" algn="ctr">
+                          <a:solidFill>
+                            <a:schemeClr val="tx1"/>
+                          </a:solidFill>
+                          <a:prstDash val="solid"/>
+                          <a:round/>
+                          <a:headEnd type="none" w="med" len="med"/>
+                          <a:tailEnd type="none" w="med" len="med"/>
+                        </a:lnL>
+                        <a:lnR w="12700" cap="flat" cmpd="sng" algn="ctr">
+                          <a:solidFill>
+                            <a:schemeClr val="tx1"/>
+                          </a:solidFill>
+                          <a:prstDash val="solid"/>
+                          <a:round/>
+                          <a:headEnd type="none" w="med" len="med"/>
+                          <a:tailEnd type="none" w="med" len="med"/>
+                        </a:lnR>
+                        <a:lnT w="12700" cap="flat" cmpd="sng" algn="ctr">
+                          <a:solidFill>
+                            <a:schemeClr val="tx1"/>
+                          </a:solidFill>
+                          <a:prstDash val="solid"/>
+                          <a:round/>
+                          <a:headEnd type="none" w="med" len="med"/>
+                          <a:tailEnd type="none" w="med" len="med"/>
+                        </a:lnT>
+                        <a:lnB w="12700" cap="flat" cmpd="sng" algn="ctr">
+                          <a:solidFill>
+                            <a:schemeClr val="tx1"/>
+                          </a:solidFill>
+                          <a:prstDash val="solid"/>
+                          <a:round/>
+                          <a:headEnd type="none" w="med" len="med"/>
+                          <a:tailEnd type="none" w="med" len="med"/>
+                        </a:lnB>
+                      </a:tcPr>
+                    </a:tc>
+                    <a:tc>
+                      <a:txBody>
+                        <a:bodyPr/>
+                        <a:lstStyle/>
+                        <a:p>
+                          <a:pPr algn="ctr" fontAlgn="b"/>
+                          <a:r>
+                            <a:rPr lang="en-US" sz="1800" b="0" i="0" u="none" strike="noStrike" dirty="0">
+                              <a:solidFill>
+                                <a:srgbClr val="000000"/>
+                              </a:solidFill>
+                              <a:effectLst/>
+                              <a:latin typeface="Calibri" panose="020F0502020204030204" pitchFamily="34" charset="0"/>
+                            </a:rPr>
+                            <a:t>Log Score, CRPS</a:t>
+                          </a:r>
+                        </a:p>
+                      </a:txBody>
+                      <a:tcPr marL="9525" marR="9525" marT="9525" marB="0" anchor="ctr">
+                        <a:lnL w="12700" cap="flat" cmpd="sng" algn="ctr">
+                          <a:solidFill>
+                            <a:schemeClr val="tx1"/>
+                          </a:solidFill>
+                          <a:prstDash val="solid"/>
+                          <a:round/>
+                          <a:headEnd type="none" w="med" len="med"/>
+                          <a:tailEnd type="none" w="med" len="med"/>
+                        </a:lnL>
+                        <a:lnR w="12700" cap="flat" cmpd="sng" algn="ctr">
+                          <a:solidFill>
+                            <a:schemeClr val="tx1"/>
+                          </a:solidFill>
+                          <a:prstDash val="solid"/>
+                          <a:round/>
+                          <a:headEnd type="none" w="med" len="med"/>
+                          <a:tailEnd type="none" w="med" len="med"/>
+                        </a:lnR>
+                        <a:lnT w="12700" cap="flat" cmpd="sng" algn="ctr">
+                          <a:solidFill>
+                            <a:schemeClr val="tx1"/>
+                          </a:solidFill>
+                          <a:prstDash val="solid"/>
+                          <a:round/>
+                          <a:headEnd type="none" w="med" len="med"/>
+                          <a:tailEnd type="none" w="med" len="med"/>
+                        </a:lnT>
+                        <a:lnB w="12700" cap="flat" cmpd="sng" algn="ctr">
+                          <a:solidFill>
+                            <a:schemeClr val="tx1"/>
+                          </a:solidFill>
+                          <a:prstDash val="solid"/>
+                          <a:round/>
+                          <a:headEnd type="none" w="med" len="med"/>
+                          <a:tailEnd type="none" w="med" len="med"/>
+                        </a:lnB>
+                      </a:tcPr>
+                    </a:tc>
+                    <a:tc>
+                      <a:txBody>
+                        <a:bodyPr/>
+                        <a:lstStyle/>
+                        <a:p>
+                          <a:pPr algn="ctr" fontAlgn="b"/>
+                          <a:r>
+                            <a:rPr lang="ru-RU" sz="1800" b="0" i="0" u="none" strike="noStrike" dirty="0">
+                              <a:solidFill>
+                                <a:srgbClr val="000000"/>
+                              </a:solidFill>
+                              <a:effectLst/>
+                              <a:latin typeface="Calibri" panose="020F0502020204030204" pitchFamily="34" charset="0"/>
+                            </a:rPr>
+                            <a:t>Сложная</a:t>
+                          </a:r>
+                          <a:r>
+                            <a:rPr lang="ru-RU" sz="1800" b="0" i="0" u="none" strike="noStrike" baseline="0" dirty="0">
+                              <a:solidFill>
+                                <a:srgbClr val="000000"/>
+                              </a:solidFill>
+                              <a:effectLst/>
+                              <a:latin typeface="Calibri" panose="020F0502020204030204" pitchFamily="34" charset="0"/>
+                            </a:rPr>
+                            <a:t> реализация</a:t>
+                          </a:r>
+                          <a:endParaRPr lang="en-US" sz="1800" b="0" i="0" u="none" strike="noStrike" dirty="0">
+                            <a:solidFill>
+                              <a:srgbClr val="000000"/>
+                            </a:solidFill>
+                            <a:effectLst/>
+                            <a:latin typeface="Calibri" panose="020F0502020204030204" pitchFamily="34" charset="0"/>
+                          </a:endParaRPr>
+                        </a:p>
+                      </a:txBody>
+                      <a:tcPr marL="9525" marR="9525" marT="9525" marB="0" anchor="ctr">
+                        <a:lnL w="12700" cap="flat" cmpd="sng" algn="ctr">
+                          <a:solidFill>
+                            <a:schemeClr val="tx1"/>
+                          </a:solidFill>
+                          <a:prstDash val="solid"/>
+                          <a:round/>
+                          <a:headEnd type="none" w="med" len="med"/>
+                          <a:tailEnd type="none" w="med" len="med"/>
+                        </a:lnL>
+                        <a:lnR w="12700" cap="flat" cmpd="sng" algn="ctr">
+                          <a:solidFill>
+                            <a:schemeClr val="tx1"/>
+                          </a:solidFill>
+                          <a:prstDash val="solid"/>
+                          <a:round/>
+                          <a:headEnd type="none" w="med" len="med"/>
+                          <a:tailEnd type="none" w="med" len="med"/>
+                        </a:lnR>
+                        <a:lnT w="12700" cap="flat" cmpd="sng" algn="ctr">
+                          <a:solidFill>
+                            <a:schemeClr val="tx1"/>
+                          </a:solidFill>
+                          <a:prstDash val="solid"/>
+                          <a:round/>
+                          <a:headEnd type="none" w="med" len="med"/>
+                          <a:tailEnd type="none" w="med" len="med"/>
+                        </a:lnT>
+                        <a:lnB w="12700" cap="flat" cmpd="sng" algn="ctr">
+                          <a:solidFill>
+                            <a:schemeClr val="tx1"/>
+                          </a:solidFill>
+                          <a:prstDash val="solid"/>
+                          <a:round/>
+                          <a:headEnd type="none" w="med" len="med"/>
+                          <a:tailEnd type="none" w="med" len="med"/>
+                        </a:lnB>
+                      </a:tcPr>
+                    </a:tc>
+                    <a:extLst>
+                      <a:ext uri="{0D108BD9-81ED-4DB2-BD59-A6C34878D82A}">
+                        <a16:rowId xmlns:a16="http://schemas.microsoft.com/office/drawing/2014/main" val="1617014016"/>
+                      </a:ext>
+                    </a:extLst>
+                  </a:tr>
+                </a:tbl>
+              </a:graphicData>
+            </a:graphic>
+          </p:graphicFrame>
+        </mc:Choice>
+        <mc:Fallback xmlns="">
+          <p:graphicFrame>
+            <p:nvGraphicFramePr>
+              <p:cNvPr id="6" name="Таблица 5"/>
+              <p:cNvGraphicFramePr>
+                <a:graphicFrameLocks noGrp="1"/>
+              </p:cNvGraphicFramePr>
+              <p:nvPr>
+                <p:extLst>
+                  <p:ext uri="{D42A27DB-BD31-4B8C-83A1-F6EECF244321}">
+                    <p14:modId xmlns:p14="http://schemas.microsoft.com/office/powerpoint/2010/main" val="426219649"/>
+                  </p:ext>
+                </p:extLst>
+              </p:nvPr>
+            </p:nvGraphicFramePr>
+            <p:xfrm>
+              <a:off x="310896" y="1652705"/>
+              <a:ext cx="11422095" cy="3166944"/>
+            </p:xfrm>
+            <a:graphic>
+              <a:graphicData uri="http://schemas.openxmlformats.org/drawingml/2006/table">
+                <a:tbl>
+                  <a:tblPr/>
+                  <a:tblGrid>
+                    <a:gridCol w="1543541">
+                      <a:extLst>
+                        <a:ext uri="{9D8B030D-6E8A-4147-A177-3AD203B41FA5}">
+                          <a16:colId xmlns:a16="http://schemas.microsoft.com/office/drawing/2014/main" val="1648134774"/>
+                        </a:ext>
+                      </a:extLst>
+                    </a:gridCol>
+                    <a:gridCol w="2450863">
+                      <a:extLst>
+                        <a:ext uri="{9D8B030D-6E8A-4147-A177-3AD203B41FA5}">
+                          <a16:colId xmlns:a16="http://schemas.microsoft.com/office/drawing/2014/main" val="1803540345"/>
+                        </a:ext>
+                      </a:extLst>
+                    </a:gridCol>
+                    <a:gridCol w="2790825">
+                      <a:extLst>
+                        <a:ext uri="{9D8B030D-6E8A-4147-A177-3AD203B41FA5}">
+                          <a16:colId xmlns:a16="http://schemas.microsoft.com/office/drawing/2014/main" val="2317459356"/>
+                        </a:ext>
+                      </a:extLst>
+                    </a:gridCol>
+                    <a:gridCol w="1842776">
+                      <a:extLst>
+                        <a:ext uri="{9D8B030D-6E8A-4147-A177-3AD203B41FA5}">
+                          <a16:colId xmlns:a16="http://schemas.microsoft.com/office/drawing/2014/main" val="3472257170"/>
+                        </a:ext>
+                      </a:extLst>
+                    </a:gridCol>
+                    <a:gridCol w="2794090">
+                      <a:extLst>
+                        <a:ext uri="{9D8B030D-6E8A-4147-A177-3AD203B41FA5}">
+                          <a16:colId xmlns:a16="http://schemas.microsoft.com/office/drawing/2014/main" val="50803802"/>
+                        </a:ext>
+                      </a:extLst>
+                    </a:gridCol>
+                  </a:tblGrid>
+                  <a:tr h="363586">
+                    <a:tc>
+                      <a:txBody>
+                        <a:bodyPr/>
+                        <a:lstStyle/>
+                        <a:p>
+                          <a:pPr algn="ctr" fontAlgn="b"/>
+                          <a:r>
+                            <a:rPr lang="ru-RU" sz="1800" b="0" i="0" u="none" strike="noStrike" dirty="0">
+                              <a:solidFill>
+                                <a:srgbClr val="000000"/>
+                              </a:solidFill>
+                              <a:effectLst/>
+                              <a:latin typeface="Calibri" panose="020F0502020204030204" pitchFamily="34" charset="0"/>
+                            </a:rPr>
+                            <a:t>Тип прогноза</a:t>
+                          </a:r>
+                        </a:p>
+                      </a:txBody>
+                      <a:tcPr marL="9525" marR="9525" marT="9525" marB="0" anchor="ctr">
+                        <a:lnL w="12700" cap="flat" cmpd="sng" algn="ctr">
+                          <a:solidFill>
+                            <a:schemeClr val="tx1"/>
+                          </a:solidFill>
+                          <a:prstDash val="solid"/>
+                          <a:round/>
+                          <a:headEnd type="none" w="med" len="med"/>
+                          <a:tailEnd type="none" w="med" len="med"/>
+                        </a:lnL>
+                        <a:lnR w="12700" cap="flat" cmpd="sng" algn="ctr">
+                          <a:solidFill>
+                            <a:schemeClr val="tx1"/>
+                          </a:solidFill>
+                          <a:prstDash val="solid"/>
+                          <a:round/>
+                          <a:headEnd type="none" w="med" len="med"/>
+                          <a:tailEnd type="none" w="med" len="med"/>
+                        </a:lnR>
+                        <a:lnT w="12700" cap="flat" cmpd="sng" algn="ctr">
+                          <a:solidFill>
+                            <a:schemeClr val="tx1"/>
+                          </a:solidFill>
+                          <a:prstDash val="solid"/>
+                          <a:round/>
+                          <a:headEnd type="none" w="med" len="med"/>
+                          <a:tailEnd type="none" w="med" len="med"/>
+                        </a:lnT>
+                        <a:lnB w="12700" cap="flat" cmpd="sng" algn="ctr">
+                          <a:solidFill>
+                            <a:schemeClr val="tx1"/>
+                          </a:solidFill>
+                          <a:prstDash val="solid"/>
+                          <a:round/>
+                          <a:headEnd type="none" w="med" len="med"/>
+                          <a:tailEnd type="none" w="med" len="med"/>
+                        </a:lnB>
+                      </a:tcPr>
+                    </a:tc>
+                    <a:tc>
+                      <a:txBody>
+                        <a:bodyPr/>
+                        <a:lstStyle/>
+                        <a:p>
+                          <a:pPr algn="ctr" fontAlgn="b"/>
+                          <a:r>
+                            <a:rPr lang="ru-RU" sz="1800" b="0" i="0" u="none" strike="noStrike" dirty="0">
+                              <a:solidFill>
+                                <a:srgbClr val="000000"/>
+                              </a:solidFill>
+                              <a:effectLst/>
+                              <a:latin typeface="Calibri" panose="020F0502020204030204" pitchFamily="34" charset="0"/>
+                            </a:rPr>
+                            <a:t>Оценка</a:t>
+                          </a:r>
+                        </a:p>
+                      </a:txBody>
+                      <a:tcPr marL="9525" marR="9525" marT="9525" marB="0" anchor="ctr">
+                        <a:lnL w="12700" cap="flat" cmpd="sng" algn="ctr">
+                          <a:solidFill>
+                            <a:schemeClr val="tx1"/>
+                          </a:solidFill>
+                          <a:prstDash val="solid"/>
+                          <a:round/>
+                          <a:headEnd type="none" w="med" len="med"/>
+                          <a:tailEnd type="none" w="med" len="med"/>
+                        </a:lnL>
+                        <a:lnR w="12700" cap="flat" cmpd="sng" algn="ctr">
+                          <a:solidFill>
+                            <a:schemeClr val="tx1"/>
+                          </a:solidFill>
+                          <a:prstDash val="solid"/>
+                          <a:round/>
+                          <a:headEnd type="none" w="med" len="med"/>
+                          <a:tailEnd type="none" w="med" len="med"/>
+                        </a:lnR>
+                        <a:lnT w="12700" cap="flat" cmpd="sng" algn="ctr">
+                          <a:solidFill>
+                            <a:schemeClr val="tx1"/>
+                          </a:solidFill>
+                          <a:prstDash val="solid"/>
+                          <a:round/>
+                          <a:headEnd type="none" w="med" len="med"/>
+                          <a:tailEnd type="none" w="med" len="med"/>
+                        </a:lnT>
+                        <a:lnB w="12700" cap="flat" cmpd="sng" algn="ctr">
+                          <a:solidFill>
+                            <a:schemeClr val="tx1"/>
+                          </a:solidFill>
+                          <a:prstDash val="solid"/>
+                          <a:round/>
+                          <a:headEnd type="none" w="med" len="med"/>
+                          <a:tailEnd type="none" w="med" len="med"/>
+                        </a:lnB>
+                      </a:tcPr>
+                    </a:tc>
+                    <a:tc>
+                      <a:txBody>
+                        <a:bodyPr/>
+                        <a:lstStyle/>
+                        <a:p>
+                          <a:pPr algn="ctr" fontAlgn="b"/>
+                          <a:r>
+                            <a:rPr lang="ru-RU" sz="1800" b="0" i="0" u="none" strike="noStrike" dirty="0">
+                              <a:solidFill>
+                                <a:srgbClr val="000000"/>
+                              </a:solidFill>
+                              <a:effectLst/>
+                              <a:latin typeface="Calibri" panose="020F0502020204030204" pitchFamily="34" charset="0"/>
+                            </a:rPr>
+                            <a:t>Цель</a:t>
+                          </a:r>
+                        </a:p>
+                      </a:txBody>
+                      <a:tcPr marL="9525" marR="9525" marT="9525" marB="0" anchor="ctr">
+                        <a:lnL w="12700" cap="flat" cmpd="sng" algn="ctr">
+                          <a:solidFill>
+                            <a:schemeClr val="tx1"/>
+                          </a:solidFill>
+                          <a:prstDash val="solid"/>
+                          <a:round/>
+                          <a:headEnd type="none" w="med" len="med"/>
+                          <a:tailEnd type="none" w="med" len="med"/>
+                        </a:lnL>
+                        <a:lnR w="12700" cap="flat" cmpd="sng" algn="ctr">
+                          <a:solidFill>
+                            <a:schemeClr val="tx1"/>
+                          </a:solidFill>
+                          <a:prstDash val="solid"/>
+                          <a:round/>
+                          <a:headEnd type="none" w="med" len="med"/>
+                          <a:tailEnd type="none" w="med" len="med"/>
+                        </a:lnR>
+                        <a:lnT w="12700" cap="flat" cmpd="sng" algn="ctr">
+                          <a:solidFill>
+                            <a:schemeClr val="tx1"/>
+                          </a:solidFill>
+                          <a:prstDash val="solid"/>
+                          <a:round/>
+                          <a:headEnd type="none" w="med" len="med"/>
+                          <a:tailEnd type="none" w="med" len="med"/>
+                        </a:lnT>
+                        <a:lnB w="12700" cap="flat" cmpd="sng" algn="ctr">
+                          <a:solidFill>
+                            <a:schemeClr val="tx1"/>
+                          </a:solidFill>
+                          <a:prstDash val="solid"/>
+                          <a:round/>
+                          <a:headEnd type="none" w="med" len="med"/>
+                          <a:tailEnd type="none" w="med" len="med"/>
+                        </a:lnB>
+                      </a:tcPr>
+                    </a:tc>
+                    <a:tc>
+                      <a:txBody>
+                        <a:bodyPr/>
+                        <a:lstStyle/>
+                        <a:p>
+                          <a:pPr algn="ctr" fontAlgn="b"/>
+                          <a:r>
+                            <a:rPr lang="ru-RU" sz="1800" b="0" i="0" u="none" strike="noStrike" dirty="0">
+                              <a:solidFill>
+                                <a:srgbClr val="000000"/>
+                              </a:solidFill>
+                              <a:effectLst/>
+                              <a:latin typeface="Calibri" panose="020F0502020204030204" pitchFamily="34" charset="0"/>
+                            </a:rPr>
+                            <a:t>Метрики оценки</a:t>
+                          </a:r>
+                        </a:p>
+                      </a:txBody>
+                      <a:tcPr marL="9525" marR="9525" marT="9525" marB="0" anchor="ctr">
+                        <a:lnL w="12700" cap="flat" cmpd="sng" algn="ctr">
+                          <a:solidFill>
+                            <a:schemeClr val="tx1"/>
+                          </a:solidFill>
+                          <a:prstDash val="solid"/>
+                          <a:round/>
+                          <a:headEnd type="none" w="med" len="med"/>
+                          <a:tailEnd type="none" w="med" len="med"/>
+                        </a:lnL>
+                        <a:lnR w="12700" cap="flat" cmpd="sng" algn="ctr">
+                          <a:solidFill>
+                            <a:schemeClr val="tx1"/>
+                          </a:solidFill>
+                          <a:prstDash val="solid"/>
+                          <a:round/>
+                          <a:headEnd type="none" w="med" len="med"/>
+                          <a:tailEnd type="none" w="med" len="med"/>
+                        </a:lnR>
+                        <a:lnT w="12700" cap="flat" cmpd="sng" algn="ctr">
+                          <a:solidFill>
+                            <a:schemeClr val="tx1"/>
+                          </a:solidFill>
+                          <a:prstDash val="solid"/>
+                          <a:round/>
+                          <a:headEnd type="none" w="med" len="med"/>
+                          <a:tailEnd type="none" w="med" len="med"/>
+                        </a:lnT>
+                        <a:lnB w="12700" cap="flat" cmpd="sng" algn="ctr">
+                          <a:solidFill>
+                            <a:schemeClr val="tx1"/>
+                          </a:solidFill>
+                          <a:prstDash val="solid"/>
+                          <a:round/>
+                          <a:headEnd type="none" w="med" len="med"/>
+                          <a:tailEnd type="none" w="med" len="med"/>
+                        </a:lnB>
+                      </a:tcPr>
+                    </a:tc>
+                    <a:tc>
+                      <a:txBody>
+                        <a:bodyPr/>
+                        <a:lstStyle/>
+                        <a:p>
+                          <a:pPr algn="ctr" fontAlgn="b"/>
+                          <a:r>
+                            <a:rPr lang="ru-RU" sz="1800" b="0" i="0" u="none" strike="noStrike" dirty="0">
+                              <a:solidFill>
+                                <a:srgbClr val="000000"/>
+                              </a:solidFill>
+                              <a:effectLst/>
+                              <a:latin typeface="Calibri" panose="020F0502020204030204" pitchFamily="34" charset="0"/>
+                            </a:rPr>
+                            <a:t>Особенности</a:t>
+                          </a:r>
+                        </a:p>
+                      </a:txBody>
+                      <a:tcPr marL="9525" marR="9525" marT="9525" marB="0" anchor="ctr">
+                        <a:lnL w="12700" cap="flat" cmpd="sng" algn="ctr">
+                          <a:solidFill>
+                            <a:schemeClr val="tx1"/>
+                          </a:solidFill>
+                          <a:prstDash val="solid"/>
+                          <a:round/>
+                          <a:headEnd type="none" w="med" len="med"/>
+                          <a:tailEnd type="none" w="med" len="med"/>
+                        </a:lnL>
+                        <a:lnR w="12700" cap="flat" cmpd="sng" algn="ctr">
+                          <a:solidFill>
+                            <a:schemeClr val="tx1"/>
+                          </a:solidFill>
+                          <a:prstDash val="solid"/>
+                          <a:round/>
+                          <a:headEnd type="none" w="med" len="med"/>
+                          <a:tailEnd type="none" w="med" len="med"/>
+                        </a:lnR>
+                        <a:lnT w="12700" cap="flat" cmpd="sng" algn="ctr">
+                          <a:solidFill>
+                            <a:schemeClr val="tx1"/>
+                          </a:solidFill>
+                          <a:prstDash val="solid"/>
+                          <a:round/>
+                          <a:headEnd type="none" w="med" len="med"/>
+                          <a:tailEnd type="none" w="med" len="med"/>
+                        </a:lnT>
+                        <a:lnB w="12700" cap="flat" cmpd="sng" algn="ctr">
+                          <a:solidFill>
+                            <a:schemeClr val="tx1"/>
+                          </a:solidFill>
+                          <a:prstDash val="solid"/>
+                          <a:round/>
+                          <a:headEnd type="none" w="med" len="med"/>
+                          <a:tailEnd type="none" w="med" len="med"/>
+                        </a:lnB>
+                      </a:tcPr>
+                    </a:tc>
+                    <a:extLst>
+                      <a:ext uri="{0D108BD9-81ED-4DB2-BD59-A6C34878D82A}">
+                        <a16:rowId xmlns:a16="http://schemas.microsoft.com/office/drawing/2014/main" val="848971985"/>
+                      </a:ext>
+                    </a:extLst>
+                  </a:tr>
+                  <a:tr h="1242373">
+                    <a:tc>
+                      <a:txBody>
+                        <a:bodyPr/>
+                        <a:lstStyle/>
+                        <a:p>
+                          <a:pPr algn="ctr" fontAlgn="b"/>
+                          <a:r>
+                            <a:rPr lang="ru-RU" sz="1800" b="0" i="0" u="none" strike="noStrike" dirty="0">
+                              <a:solidFill>
+                                <a:srgbClr val="000000"/>
+                              </a:solidFill>
+                              <a:effectLst/>
+                              <a:latin typeface="Calibri" panose="020F0502020204030204" pitchFamily="34" charset="0"/>
+                            </a:rPr>
+                            <a:t>Интервальный</a:t>
+                          </a:r>
+                        </a:p>
+                      </a:txBody>
+                      <a:tcPr marL="9525" marR="9525" marT="9525" marB="0" anchor="ctr">
+                        <a:lnL w="12700" cap="flat" cmpd="sng" algn="ctr">
+                          <a:solidFill>
+                            <a:schemeClr val="tx1"/>
+                          </a:solidFill>
+                          <a:prstDash val="solid"/>
+                          <a:round/>
+                          <a:headEnd type="none" w="med" len="med"/>
+                          <a:tailEnd type="none" w="med" len="med"/>
+                        </a:lnL>
+                        <a:lnR w="12700" cap="flat" cmpd="sng" algn="ctr">
+                          <a:solidFill>
+                            <a:schemeClr val="tx1"/>
+                          </a:solidFill>
+                          <a:prstDash val="solid"/>
+                          <a:round/>
+                          <a:headEnd type="none" w="med" len="med"/>
+                          <a:tailEnd type="none" w="med" len="med"/>
+                        </a:lnR>
+                        <a:lnT w="12700" cap="flat" cmpd="sng" algn="ctr">
+                          <a:solidFill>
+                            <a:schemeClr val="tx1"/>
+                          </a:solidFill>
+                          <a:prstDash val="solid"/>
+                          <a:round/>
+                          <a:headEnd type="none" w="med" len="med"/>
+                          <a:tailEnd type="none" w="med" len="med"/>
+                        </a:lnT>
+                        <a:lnB w="12700" cap="flat" cmpd="sng" algn="ctr">
+                          <a:solidFill>
+                            <a:schemeClr val="tx1"/>
+                          </a:solidFill>
+                          <a:prstDash val="solid"/>
+                          <a:round/>
+                          <a:headEnd type="none" w="med" len="med"/>
+                          <a:tailEnd type="none" w="med" len="med"/>
+                        </a:lnB>
+                      </a:tcPr>
+                    </a:tc>
+                    <a:tc>
+                      <a:txBody>
+                        <a:bodyPr/>
+                        <a:lstStyle/>
+                        <a:p>
+                          <a:endParaRPr lang="ru-RU"/>
+                        </a:p>
+                      </a:txBody>
+                      <a:tcPr marL="9525" marR="9525" marT="9525" marB="0" anchor="ctr">
+                        <a:lnL w="12700" cap="flat" cmpd="sng" algn="ctr">
+                          <a:solidFill>
+                            <a:schemeClr val="tx1"/>
+                          </a:solidFill>
+                          <a:prstDash val="solid"/>
+                          <a:round/>
+                          <a:headEnd type="none" w="med" len="med"/>
+                          <a:tailEnd type="none" w="med" len="med"/>
+                        </a:lnL>
+                        <a:lnR w="12700" cap="flat" cmpd="sng" algn="ctr">
+                          <a:solidFill>
+                            <a:schemeClr val="tx1"/>
+                          </a:solidFill>
+                          <a:prstDash val="solid"/>
+                          <a:round/>
+                          <a:headEnd type="none" w="med" len="med"/>
+                          <a:tailEnd type="none" w="med" len="med"/>
+                        </a:lnR>
+                        <a:lnT w="12700" cap="flat" cmpd="sng" algn="ctr">
+                          <a:solidFill>
+                            <a:schemeClr val="tx1"/>
+                          </a:solidFill>
+                          <a:prstDash val="solid"/>
+                          <a:round/>
+                          <a:headEnd type="none" w="med" len="med"/>
+                          <a:tailEnd type="none" w="med" len="med"/>
+                        </a:lnT>
+                        <a:lnB w="12700" cap="flat" cmpd="sng" algn="ctr">
+                          <a:solidFill>
+                            <a:schemeClr val="tx1"/>
+                          </a:solidFill>
+                          <a:prstDash val="solid"/>
+                          <a:round/>
+                          <a:headEnd type="none" w="med" len="med"/>
+                          <a:tailEnd type="none" w="med" len="med"/>
+                        </a:lnB>
+                        <a:blipFill>
+                          <a:blip r:embed="rId3"/>
+                          <a:stretch>
+                            <a:fillRect l="-63433" t="-31863" r="-303731" b="-134314"/>
+                          </a:stretch>
+                        </a:blipFill>
+                      </a:tcPr>
+                    </a:tc>
+                    <a:tc>
+                      <a:txBody>
+                        <a:bodyPr/>
+                        <a:lstStyle/>
+                        <a:p>
+                          <a:pPr algn="ctr" fontAlgn="b"/>
+                          <a:r>
+                            <a:rPr lang="ru-RU" sz="1800" b="0" i="0" u="none" strike="noStrike" dirty="0">
+                              <a:solidFill>
+                                <a:srgbClr val="000000"/>
+                              </a:solidFill>
+                              <a:effectLst/>
+                              <a:latin typeface="Calibri" panose="020F0502020204030204" pitchFamily="34" charset="0"/>
+                            </a:rPr>
+                            <a:t>Определить</a:t>
+                          </a:r>
+                          <a:r>
+                            <a:rPr lang="ru-RU" sz="1800" b="0" i="0" u="none" strike="noStrike" baseline="0" dirty="0">
+                              <a:solidFill>
+                                <a:srgbClr val="000000"/>
+                              </a:solidFill>
+                              <a:effectLst/>
+                              <a:latin typeface="Calibri" panose="020F0502020204030204" pitchFamily="34" charset="0"/>
+                            </a:rPr>
+                            <a:t> ш</a:t>
+                          </a:r>
+                          <a:r>
+                            <a:rPr lang="ru-RU" sz="1800" b="0" i="0" u="none" strike="noStrike" dirty="0">
+                              <a:solidFill>
+                                <a:srgbClr val="000000"/>
+                              </a:solidFill>
+                              <a:effectLst/>
+                              <a:latin typeface="Calibri" panose="020F0502020204030204" pitchFamily="34" charset="0"/>
+                            </a:rPr>
+                            <a:t>ирину и покрытие интервалов </a:t>
+                          </a:r>
+                        </a:p>
+                      </a:txBody>
+                      <a:tcPr marL="9525" marR="9525" marT="9525" marB="0" anchor="ctr">
+                        <a:lnL w="12700" cap="flat" cmpd="sng" algn="ctr">
+                          <a:solidFill>
+                            <a:schemeClr val="tx1"/>
+                          </a:solidFill>
+                          <a:prstDash val="solid"/>
+                          <a:round/>
+                          <a:headEnd type="none" w="med" len="med"/>
+                          <a:tailEnd type="none" w="med" len="med"/>
+                        </a:lnL>
+                        <a:lnR w="12700" cap="flat" cmpd="sng" algn="ctr">
+                          <a:solidFill>
+                            <a:schemeClr val="tx1"/>
+                          </a:solidFill>
+                          <a:prstDash val="solid"/>
+                          <a:round/>
+                          <a:headEnd type="none" w="med" len="med"/>
+                          <a:tailEnd type="none" w="med" len="med"/>
+                        </a:lnR>
+                        <a:lnT w="12700" cap="flat" cmpd="sng" algn="ctr">
+                          <a:solidFill>
+                            <a:schemeClr val="tx1"/>
+                          </a:solidFill>
+                          <a:prstDash val="solid"/>
+                          <a:round/>
+                          <a:headEnd type="none" w="med" len="med"/>
+                          <a:tailEnd type="none" w="med" len="med"/>
+                        </a:lnT>
+                        <a:lnB w="12700" cap="flat" cmpd="sng" algn="ctr">
+                          <a:solidFill>
+                            <a:schemeClr val="tx1"/>
+                          </a:solidFill>
+                          <a:prstDash val="solid"/>
+                          <a:round/>
+                          <a:headEnd type="none" w="med" len="med"/>
+                          <a:tailEnd type="none" w="med" len="med"/>
+                        </a:lnB>
+                      </a:tcPr>
+                    </a:tc>
+                    <a:tc>
+                      <a:txBody>
+                        <a:bodyPr/>
+                        <a:lstStyle/>
+                        <a:p>
+                          <a:pPr algn="ctr" fontAlgn="b"/>
+                          <a:r>
+                            <a:rPr lang="en-US" sz="1800" b="0" i="0" u="none" strike="noStrike" dirty="0">
+                              <a:solidFill>
+                                <a:srgbClr val="000000"/>
+                              </a:solidFill>
+                              <a:effectLst/>
+                              <a:latin typeface="Calibri" panose="020F0502020204030204" pitchFamily="34" charset="0"/>
+                            </a:rPr>
+                            <a:t>Coverage, Mean Width</a:t>
+                          </a:r>
+                        </a:p>
+                      </a:txBody>
+                      <a:tcPr marL="9525" marR="9525" marT="9525" marB="0" anchor="ctr">
+                        <a:lnL w="12700" cap="flat" cmpd="sng" algn="ctr">
+                          <a:solidFill>
+                            <a:schemeClr val="tx1"/>
+                          </a:solidFill>
+                          <a:prstDash val="solid"/>
+                          <a:round/>
+                          <a:headEnd type="none" w="med" len="med"/>
+                          <a:tailEnd type="none" w="med" len="med"/>
+                        </a:lnL>
+                        <a:lnR w="12700" cap="flat" cmpd="sng" algn="ctr">
+                          <a:solidFill>
+                            <a:schemeClr val="tx1"/>
+                          </a:solidFill>
+                          <a:prstDash val="solid"/>
+                          <a:round/>
+                          <a:headEnd type="none" w="med" len="med"/>
+                          <a:tailEnd type="none" w="med" len="med"/>
+                        </a:lnR>
+                        <a:lnT w="12700" cap="flat" cmpd="sng" algn="ctr">
+                          <a:solidFill>
+                            <a:schemeClr val="tx1"/>
+                          </a:solidFill>
+                          <a:prstDash val="solid"/>
+                          <a:round/>
+                          <a:headEnd type="none" w="med" len="med"/>
+                          <a:tailEnd type="none" w="med" len="med"/>
+                        </a:lnT>
+                        <a:lnB w="12700" cap="flat" cmpd="sng" algn="ctr">
+                          <a:solidFill>
+                            <a:schemeClr val="tx1"/>
+                          </a:solidFill>
+                          <a:prstDash val="solid"/>
+                          <a:round/>
+                          <a:headEnd type="none" w="med" len="med"/>
+                          <a:tailEnd type="none" w="med" len="med"/>
+                        </a:lnB>
+                      </a:tcPr>
+                    </a:tc>
+                    <a:tc>
+                      <a:txBody>
+                        <a:bodyPr/>
+                        <a:lstStyle/>
+                        <a:p>
+                          <a:pPr algn="ctr" fontAlgn="b"/>
+                          <a:r>
+                            <a:rPr lang="ru-RU" sz="1800" b="0" i="0" u="none" strike="noStrike" dirty="0">
+                              <a:solidFill>
+                                <a:srgbClr val="000000"/>
+                              </a:solidFill>
+                              <a:effectLst/>
+                              <a:latin typeface="Calibri" panose="020F0502020204030204" pitchFamily="34" charset="0"/>
+                            </a:rPr>
+                            <a:t>Легко интерпретировать, но не покрывает выбросы</a:t>
+                          </a:r>
+                          <a:endParaRPr lang="en-US" sz="1800" b="0" i="0" u="none" strike="noStrike" dirty="0">
+                            <a:solidFill>
+                              <a:srgbClr val="000000"/>
+                            </a:solidFill>
+                            <a:effectLst/>
+                            <a:latin typeface="Calibri" panose="020F0502020204030204" pitchFamily="34" charset="0"/>
+                          </a:endParaRPr>
+                        </a:p>
+                      </a:txBody>
+                      <a:tcPr marL="9525" marR="9525" marT="9525" marB="0" anchor="ctr">
+                        <a:lnL w="12700" cap="flat" cmpd="sng" algn="ctr">
+                          <a:solidFill>
+                            <a:schemeClr val="tx1"/>
+                          </a:solidFill>
+                          <a:prstDash val="solid"/>
+                          <a:round/>
+                          <a:headEnd type="none" w="med" len="med"/>
+                          <a:tailEnd type="none" w="med" len="med"/>
+                        </a:lnL>
+                        <a:lnR w="12700" cap="flat" cmpd="sng" algn="ctr">
+                          <a:solidFill>
+                            <a:schemeClr val="tx1"/>
+                          </a:solidFill>
+                          <a:prstDash val="solid"/>
+                          <a:round/>
+                          <a:headEnd type="none" w="med" len="med"/>
+                          <a:tailEnd type="none" w="med" len="med"/>
+                        </a:lnR>
+                        <a:lnT w="12700" cap="flat" cmpd="sng" algn="ctr">
+                          <a:solidFill>
+                            <a:schemeClr val="tx1"/>
+                          </a:solidFill>
+                          <a:prstDash val="solid"/>
+                          <a:round/>
+                          <a:headEnd type="none" w="med" len="med"/>
+                          <a:tailEnd type="none" w="med" len="med"/>
+                        </a:lnT>
+                        <a:lnB w="12700" cap="flat" cmpd="sng" algn="ctr">
+                          <a:solidFill>
+                            <a:schemeClr val="tx1"/>
+                          </a:solidFill>
+                          <a:prstDash val="solid"/>
+                          <a:round/>
+                          <a:headEnd type="none" w="med" len="med"/>
+                          <a:tailEnd type="none" w="med" len="med"/>
+                        </a:lnB>
+                      </a:tcPr>
+                    </a:tc>
+                    <a:extLst>
+                      <a:ext uri="{0D108BD9-81ED-4DB2-BD59-A6C34878D82A}">
+                        <a16:rowId xmlns:a16="http://schemas.microsoft.com/office/drawing/2014/main" val="3874609934"/>
+                      </a:ext>
+                    </a:extLst>
+                  </a:tr>
+                  <a:tr h="934452">
+                    <a:tc>
+                      <a:txBody>
+                        <a:bodyPr/>
+                        <a:lstStyle/>
+                        <a:p>
+                          <a:pPr algn="ctr" fontAlgn="b"/>
+                          <a:r>
+                            <a:rPr lang="ru-RU" sz="1800" b="0" i="0" u="none" strike="noStrike">
+                              <a:solidFill>
+                                <a:srgbClr val="000000"/>
+                              </a:solidFill>
+                              <a:effectLst/>
+                              <a:latin typeface="Calibri" panose="020F0502020204030204" pitchFamily="34" charset="0"/>
+                            </a:rPr>
+                            <a:t>Квантильный</a:t>
+                          </a:r>
+                        </a:p>
+                      </a:txBody>
+                      <a:tcPr marL="9525" marR="9525" marT="9525" marB="0" anchor="ctr">
+                        <a:lnL w="12700" cap="flat" cmpd="sng" algn="ctr">
+                          <a:solidFill>
+                            <a:schemeClr val="tx1"/>
+                          </a:solidFill>
+                          <a:prstDash val="solid"/>
+                          <a:round/>
+                          <a:headEnd type="none" w="med" len="med"/>
+                          <a:tailEnd type="none" w="med" len="med"/>
+                        </a:lnL>
+                        <a:lnR w="12700" cap="flat" cmpd="sng" algn="ctr">
+                          <a:solidFill>
+                            <a:schemeClr val="tx1"/>
+                          </a:solidFill>
+                          <a:prstDash val="solid"/>
+                          <a:round/>
+                          <a:headEnd type="none" w="med" len="med"/>
+                          <a:tailEnd type="none" w="med" len="med"/>
+                        </a:lnR>
+                        <a:lnT w="12700" cap="flat" cmpd="sng" algn="ctr">
+                          <a:solidFill>
+                            <a:schemeClr val="tx1"/>
+                          </a:solidFill>
+                          <a:prstDash val="solid"/>
+                          <a:round/>
+                          <a:headEnd type="none" w="med" len="med"/>
+                          <a:tailEnd type="none" w="med" len="med"/>
+                        </a:lnT>
+                        <a:lnB w="12700" cap="flat" cmpd="sng" algn="ctr">
+                          <a:solidFill>
+                            <a:schemeClr val="tx1"/>
+                          </a:solidFill>
+                          <a:prstDash val="solid"/>
+                          <a:round/>
+                          <a:headEnd type="none" w="med" len="med"/>
+                          <a:tailEnd type="none" w="med" len="med"/>
+                        </a:lnB>
+                      </a:tcPr>
+                    </a:tc>
+                    <a:tc>
+                      <a:txBody>
+                        <a:bodyPr/>
+                        <a:lstStyle/>
+                        <a:p>
+                          <a:endParaRPr lang="ru-RU"/>
+                        </a:p>
+                      </a:txBody>
+                      <a:tcPr marL="9525" marR="9525" marT="9525" marB="0" anchor="ctr">
+                        <a:lnL w="12700" cap="flat" cmpd="sng" algn="ctr">
+                          <a:solidFill>
+                            <a:schemeClr val="tx1"/>
+                          </a:solidFill>
+                          <a:prstDash val="solid"/>
+                          <a:round/>
+                          <a:headEnd type="none" w="med" len="med"/>
+                          <a:tailEnd type="none" w="med" len="med"/>
+                        </a:lnL>
+                        <a:lnR w="12700" cap="flat" cmpd="sng" algn="ctr">
+                          <a:solidFill>
+                            <a:schemeClr val="tx1"/>
+                          </a:solidFill>
+                          <a:prstDash val="solid"/>
+                          <a:round/>
+                          <a:headEnd type="none" w="med" len="med"/>
+                          <a:tailEnd type="none" w="med" len="med"/>
+                        </a:lnR>
+                        <a:lnT w="12700" cap="flat" cmpd="sng" algn="ctr">
+                          <a:solidFill>
+                            <a:schemeClr val="tx1"/>
+                          </a:solidFill>
+                          <a:prstDash val="solid"/>
+                          <a:round/>
+                          <a:headEnd type="none" w="med" len="med"/>
+                          <a:tailEnd type="none" w="med" len="med"/>
+                        </a:lnT>
+                        <a:lnB w="12700" cap="flat" cmpd="sng" algn="ctr">
+                          <a:solidFill>
+                            <a:schemeClr val="tx1"/>
+                          </a:solidFill>
+                          <a:prstDash val="solid"/>
+                          <a:round/>
+                          <a:headEnd type="none" w="med" len="med"/>
+                          <a:tailEnd type="none" w="med" len="med"/>
+                        </a:lnB>
+                        <a:blipFill>
+                          <a:blip r:embed="rId3"/>
+                          <a:stretch>
+                            <a:fillRect l="-63433" t="-175817" r="-303731" b="-79085"/>
+                          </a:stretch>
+                        </a:blipFill>
+                      </a:tcPr>
+                    </a:tc>
+                    <a:tc>
+                      <a:txBody>
+                        <a:bodyPr/>
+                        <a:lstStyle/>
+                        <a:p>
+                          <a:pPr algn="ctr" fontAlgn="b"/>
+                          <a:r>
+                            <a:rPr lang="ru-RU" sz="1800" b="0" i="0" u="none" strike="noStrike" dirty="0">
+                              <a:solidFill>
+                                <a:srgbClr val="000000"/>
+                              </a:solidFill>
+                              <a:effectLst/>
+                              <a:latin typeface="Calibri" panose="020F0502020204030204" pitchFamily="34" charset="0"/>
+                            </a:rPr>
+                            <a:t>точность определения квантилей </a:t>
+                          </a:r>
+                        </a:p>
+                      </a:txBody>
+                      <a:tcPr marL="9525" marR="9525" marT="9525" marB="0" anchor="ctr">
+                        <a:lnL w="12700" cap="flat" cmpd="sng" algn="ctr">
+                          <a:solidFill>
+                            <a:schemeClr val="tx1"/>
+                          </a:solidFill>
+                          <a:prstDash val="solid"/>
+                          <a:round/>
+                          <a:headEnd type="none" w="med" len="med"/>
+                          <a:tailEnd type="none" w="med" len="med"/>
+                        </a:lnL>
+                        <a:lnR w="12700" cap="flat" cmpd="sng" algn="ctr">
+                          <a:solidFill>
+                            <a:schemeClr val="tx1"/>
+                          </a:solidFill>
+                          <a:prstDash val="solid"/>
+                          <a:round/>
+                          <a:headEnd type="none" w="med" len="med"/>
+                          <a:tailEnd type="none" w="med" len="med"/>
+                        </a:lnR>
+                        <a:lnT w="12700" cap="flat" cmpd="sng" algn="ctr">
+                          <a:solidFill>
+                            <a:schemeClr val="tx1"/>
+                          </a:solidFill>
+                          <a:prstDash val="solid"/>
+                          <a:round/>
+                          <a:headEnd type="none" w="med" len="med"/>
+                          <a:tailEnd type="none" w="med" len="med"/>
+                        </a:lnT>
+                        <a:lnB w="12700" cap="flat" cmpd="sng" algn="ctr">
+                          <a:solidFill>
+                            <a:schemeClr val="tx1"/>
+                          </a:solidFill>
+                          <a:prstDash val="solid"/>
+                          <a:round/>
+                          <a:headEnd type="none" w="med" len="med"/>
+                          <a:tailEnd type="none" w="med" len="med"/>
+                        </a:lnB>
+                      </a:tcPr>
+                    </a:tc>
+                    <a:tc>
+                      <a:txBody>
+                        <a:bodyPr/>
+                        <a:lstStyle/>
+                        <a:p>
+                          <a:pPr algn="ctr" fontAlgn="b"/>
+                          <a:r>
+                            <a:rPr lang="en-US" sz="1800" b="0" i="0" u="none" strike="noStrike" dirty="0">
+                              <a:solidFill>
+                                <a:srgbClr val="000000"/>
+                              </a:solidFill>
+                              <a:effectLst/>
+                              <a:latin typeface="Calibri" panose="020F0502020204030204" pitchFamily="34" charset="0"/>
+                            </a:rPr>
+                            <a:t>Pinball Loss</a:t>
+                          </a:r>
+                        </a:p>
+                      </a:txBody>
+                      <a:tcPr marL="9525" marR="9525" marT="9525" marB="0" anchor="ctr">
+                        <a:lnL w="12700" cap="flat" cmpd="sng" algn="ctr">
+                          <a:solidFill>
+                            <a:schemeClr val="tx1"/>
+                          </a:solidFill>
+                          <a:prstDash val="solid"/>
+                          <a:round/>
+                          <a:headEnd type="none" w="med" len="med"/>
+                          <a:tailEnd type="none" w="med" len="med"/>
+                        </a:lnL>
+                        <a:lnR w="12700" cap="flat" cmpd="sng" algn="ctr">
+                          <a:solidFill>
+                            <a:schemeClr val="tx1"/>
+                          </a:solidFill>
+                          <a:prstDash val="solid"/>
+                          <a:round/>
+                          <a:headEnd type="none" w="med" len="med"/>
+                          <a:tailEnd type="none" w="med" len="med"/>
+                        </a:lnR>
+                        <a:lnT w="12700" cap="flat" cmpd="sng" algn="ctr">
+                          <a:solidFill>
+                            <a:schemeClr val="tx1"/>
+                          </a:solidFill>
+                          <a:prstDash val="solid"/>
+                          <a:round/>
+                          <a:headEnd type="none" w="med" len="med"/>
+                          <a:tailEnd type="none" w="med" len="med"/>
+                        </a:lnT>
+                        <a:lnB w="12700" cap="flat" cmpd="sng" algn="ctr">
+                          <a:solidFill>
+                            <a:schemeClr val="tx1"/>
+                          </a:solidFill>
+                          <a:prstDash val="solid"/>
+                          <a:round/>
+                          <a:headEnd type="none" w="med" len="med"/>
+                          <a:tailEnd type="none" w="med" len="med"/>
+                        </a:lnB>
+                      </a:tcPr>
+                    </a:tc>
+                    <a:tc>
+                      <a:txBody>
+                        <a:bodyPr/>
+                        <a:lstStyle/>
+                        <a:p>
+                          <a:pPr algn="ctr" fontAlgn="b"/>
+                          <a:r>
+                            <a:rPr lang="ru-RU" sz="1800" b="0" i="0" u="none" strike="noStrike" dirty="0">
+                              <a:solidFill>
+                                <a:srgbClr val="000000"/>
+                              </a:solidFill>
+                              <a:effectLst/>
+                              <a:latin typeface="Calibri" panose="020F0502020204030204" pitchFamily="34" charset="0"/>
+                            </a:rPr>
+                            <a:t>Анализ</a:t>
+                          </a:r>
+                          <a:r>
+                            <a:rPr lang="ru-RU" sz="1800" b="0" i="0" u="none" strike="noStrike" baseline="0" dirty="0">
+                              <a:solidFill>
+                                <a:srgbClr val="000000"/>
+                              </a:solidFill>
+                              <a:effectLst/>
+                              <a:latin typeface="Calibri" panose="020F0502020204030204" pitchFamily="34" charset="0"/>
+                            </a:rPr>
+                            <a:t> хвостов, не покрывает интервалы</a:t>
+                          </a:r>
+                          <a:endParaRPr lang="en-US" sz="1800" b="0" i="0" u="none" strike="noStrike" dirty="0">
+                            <a:solidFill>
+                              <a:srgbClr val="000000"/>
+                            </a:solidFill>
+                            <a:effectLst/>
+                            <a:latin typeface="Calibri" panose="020F0502020204030204" pitchFamily="34" charset="0"/>
+                          </a:endParaRPr>
+                        </a:p>
+                      </a:txBody>
+                      <a:tcPr marL="9525" marR="9525" marT="9525" marB="0" anchor="ctr">
+                        <a:lnL w="12700" cap="flat" cmpd="sng" algn="ctr">
+                          <a:solidFill>
+                            <a:schemeClr val="tx1"/>
+                          </a:solidFill>
+                          <a:prstDash val="solid"/>
+                          <a:round/>
+                          <a:headEnd type="none" w="med" len="med"/>
+                          <a:tailEnd type="none" w="med" len="med"/>
+                        </a:lnL>
+                        <a:lnR w="12700" cap="flat" cmpd="sng" algn="ctr">
+                          <a:solidFill>
+                            <a:schemeClr val="tx1"/>
+                          </a:solidFill>
+                          <a:prstDash val="solid"/>
+                          <a:round/>
+                          <a:headEnd type="none" w="med" len="med"/>
+                          <a:tailEnd type="none" w="med" len="med"/>
+                        </a:lnR>
+                        <a:lnT w="12700" cap="flat" cmpd="sng" algn="ctr">
+                          <a:solidFill>
+                            <a:schemeClr val="tx1"/>
+                          </a:solidFill>
+                          <a:prstDash val="solid"/>
+                          <a:round/>
+                          <a:headEnd type="none" w="med" len="med"/>
+                          <a:tailEnd type="none" w="med" len="med"/>
+                        </a:lnT>
+                        <a:lnB w="12700" cap="flat" cmpd="sng" algn="ctr">
+                          <a:solidFill>
+                            <a:schemeClr val="tx1"/>
+                          </a:solidFill>
+                          <a:prstDash val="solid"/>
+                          <a:round/>
+                          <a:headEnd type="none" w="med" len="med"/>
+                          <a:tailEnd type="none" w="med" len="med"/>
+                        </a:lnB>
+                      </a:tcPr>
+                    </a:tc>
+                    <a:extLst>
+                      <a:ext uri="{0D108BD9-81ED-4DB2-BD59-A6C34878D82A}">
+                        <a16:rowId xmlns:a16="http://schemas.microsoft.com/office/drawing/2014/main" val="971865774"/>
+                      </a:ext>
+                    </a:extLst>
+                  </a:tr>
+                  <a:tr h="626533">
+                    <a:tc>
+                      <a:txBody>
+                        <a:bodyPr/>
+                        <a:lstStyle/>
+                        <a:p>
+                          <a:pPr algn="ctr" fontAlgn="b"/>
+                          <a:r>
+                            <a:rPr lang="ru-RU" sz="1800" b="0" i="0" u="none" strike="noStrike">
+                              <a:solidFill>
+                                <a:srgbClr val="000000"/>
+                              </a:solidFill>
+                              <a:effectLst/>
+                              <a:latin typeface="Calibri" panose="020F0502020204030204" pitchFamily="34" charset="0"/>
+                            </a:rPr>
+                            <a:t>Вероятностный</a:t>
+                          </a:r>
+                        </a:p>
+                      </a:txBody>
+                      <a:tcPr marL="9525" marR="9525" marT="9525" marB="0" anchor="ctr">
+                        <a:lnL w="12700" cap="flat" cmpd="sng" algn="ctr">
+                          <a:solidFill>
+                            <a:schemeClr val="tx1"/>
+                          </a:solidFill>
+                          <a:prstDash val="solid"/>
+                          <a:round/>
+                          <a:headEnd type="none" w="med" len="med"/>
+                          <a:tailEnd type="none" w="med" len="med"/>
+                        </a:lnL>
+                        <a:lnR w="12700" cap="flat" cmpd="sng" algn="ctr">
+                          <a:solidFill>
+                            <a:schemeClr val="tx1"/>
+                          </a:solidFill>
+                          <a:prstDash val="solid"/>
+                          <a:round/>
+                          <a:headEnd type="none" w="med" len="med"/>
+                          <a:tailEnd type="none" w="med" len="med"/>
+                        </a:lnR>
+                        <a:lnT w="12700" cap="flat" cmpd="sng" algn="ctr">
+                          <a:solidFill>
+                            <a:schemeClr val="tx1"/>
+                          </a:solidFill>
+                          <a:prstDash val="solid"/>
+                          <a:round/>
+                          <a:headEnd type="none" w="med" len="med"/>
+                          <a:tailEnd type="none" w="med" len="med"/>
+                        </a:lnT>
+                        <a:lnB w="12700" cap="flat" cmpd="sng" algn="ctr">
+                          <a:solidFill>
+                            <a:schemeClr val="tx1"/>
+                          </a:solidFill>
+                          <a:prstDash val="solid"/>
+                          <a:round/>
+                          <a:headEnd type="none" w="med" len="med"/>
+                          <a:tailEnd type="none" w="med" len="med"/>
+                        </a:lnB>
+                      </a:tcPr>
+                    </a:tc>
+                    <a:tc>
+                      <a:txBody>
+                        <a:bodyPr/>
+                        <a:lstStyle/>
+                        <a:p>
+                          <a:endParaRPr lang="ru-RU"/>
+                        </a:p>
+                      </a:txBody>
+                      <a:tcPr marL="9525" marR="9525" marT="9525" marB="0" anchor="ctr">
+                        <a:lnL w="12700" cap="flat" cmpd="sng" algn="ctr">
+                          <a:solidFill>
+                            <a:schemeClr val="tx1"/>
+                          </a:solidFill>
+                          <a:prstDash val="solid"/>
+                          <a:round/>
+                          <a:headEnd type="none" w="med" len="med"/>
+                          <a:tailEnd type="none" w="med" len="med"/>
+                        </a:lnL>
+                        <a:lnR w="12700" cap="flat" cmpd="sng" algn="ctr">
+                          <a:solidFill>
+                            <a:schemeClr val="tx1"/>
+                          </a:solidFill>
+                          <a:prstDash val="solid"/>
+                          <a:round/>
+                          <a:headEnd type="none" w="med" len="med"/>
+                          <a:tailEnd type="none" w="med" len="med"/>
+                        </a:lnR>
+                        <a:lnT w="12700" cap="flat" cmpd="sng" algn="ctr">
+                          <a:solidFill>
+                            <a:schemeClr val="tx1"/>
+                          </a:solidFill>
+                          <a:prstDash val="solid"/>
+                          <a:round/>
+                          <a:headEnd type="none" w="med" len="med"/>
+                          <a:tailEnd type="none" w="med" len="med"/>
+                        </a:lnT>
+                        <a:lnB w="12700" cap="flat" cmpd="sng" algn="ctr">
+                          <a:solidFill>
+                            <a:schemeClr val="tx1"/>
+                          </a:solidFill>
+                          <a:prstDash val="solid"/>
+                          <a:round/>
+                          <a:headEnd type="none" w="med" len="med"/>
+                          <a:tailEnd type="none" w="med" len="med"/>
+                        </a:lnB>
+                        <a:blipFill>
+                          <a:blip r:embed="rId3"/>
+                          <a:stretch>
+                            <a:fillRect l="-63433" t="-409709" r="-303731" b="-17476"/>
+                          </a:stretch>
+                        </a:blipFill>
+                      </a:tcPr>
+                    </a:tc>
+                    <a:tc>
+                      <a:txBody>
+                        <a:bodyPr/>
+                        <a:lstStyle/>
+                        <a:p>
+                          <a:pPr algn="ctr" fontAlgn="b"/>
+                          <a:r>
+                            <a:rPr lang="ru-RU" sz="1800" b="0" i="0" u="none" strike="noStrike">
+                              <a:solidFill>
+                                <a:srgbClr val="000000"/>
+                              </a:solidFill>
+                              <a:effectLst/>
+                              <a:latin typeface="Calibri" panose="020F0502020204030204" pitchFamily="34" charset="0"/>
+                            </a:rPr>
+                            <a:t>качество всего прогнозного распределения </a:t>
+                          </a:r>
+                        </a:p>
+                      </a:txBody>
+                      <a:tcPr marL="9525" marR="9525" marT="9525" marB="0" anchor="ctr">
+                        <a:lnL w="12700" cap="flat" cmpd="sng" algn="ctr">
+                          <a:solidFill>
+                            <a:schemeClr val="tx1"/>
+                          </a:solidFill>
+                          <a:prstDash val="solid"/>
+                          <a:round/>
+                          <a:headEnd type="none" w="med" len="med"/>
+                          <a:tailEnd type="none" w="med" len="med"/>
+                        </a:lnL>
+                        <a:lnR w="12700" cap="flat" cmpd="sng" algn="ctr">
+                          <a:solidFill>
+                            <a:schemeClr val="tx1"/>
+                          </a:solidFill>
+                          <a:prstDash val="solid"/>
+                          <a:round/>
+                          <a:headEnd type="none" w="med" len="med"/>
+                          <a:tailEnd type="none" w="med" len="med"/>
+                        </a:lnR>
+                        <a:lnT w="12700" cap="flat" cmpd="sng" algn="ctr">
+                          <a:solidFill>
+                            <a:schemeClr val="tx1"/>
+                          </a:solidFill>
+                          <a:prstDash val="solid"/>
+                          <a:round/>
+                          <a:headEnd type="none" w="med" len="med"/>
+                          <a:tailEnd type="none" w="med" len="med"/>
+                        </a:lnT>
+                        <a:lnB w="12700" cap="flat" cmpd="sng" algn="ctr">
+                          <a:solidFill>
+                            <a:schemeClr val="tx1"/>
+                          </a:solidFill>
+                          <a:prstDash val="solid"/>
+                          <a:round/>
+                          <a:headEnd type="none" w="med" len="med"/>
+                          <a:tailEnd type="none" w="med" len="med"/>
+                        </a:lnB>
+                      </a:tcPr>
+                    </a:tc>
+                    <a:tc>
+                      <a:txBody>
+                        <a:bodyPr/>
+                        <a:lstStyle/>
+                        <a:p>
+                          <a:pPr algn="ctr" fontAlgn="b"/>
+                          <a:r>
+                            <a:rPr lang="en-US" sz="1800" b="0" i="0" u="none" strike="noStrike" dirty="0">
+                              <a:solidFill>
+                                <a:srgbClr val="000000"/>
+                              </a:solidFill>
+                              <a:effectLst/>
+                              <a:latin typeface="Calibri" panose="020F0502020204030204" pitchFamily="34" charset="0"/>
+                            </a:rPr>
+                            <a:t>Log Score, CRPS</a:t>
+                          </a:r>
+                        </a:p>
+                      </a:txBody>
+                      <a:tcPr marL="9525" marR="9525" marT="9525" marB="0" anchor="ctr">
+                        <a:lnL w="12700" cap="flat" cmpd="sng" algn="ctr">
+                          <a:solidFill>
+                            <a:schemeClr val="tx1"/>
+                          </a:solidFill>
+                          <a:prstDash val="solid"/>
+                          <a:round/>
+                          <a:headEnd type="none" w="med" len="med"/>
+                          <a:tailEnd type="none" w="med" len="med"/>
+                        </a:lnL>
+                        <a:lnR w="12700" cap="flat" cmpd="sng" algn="ctr">
+                          <a:solidFill>
+                            <a:schemeClr val="tx1"/>
+                          </a:solidFill>
+                          <a:prstDash val="solid"/>
+                          <a:round/>
+                          <a:headEnd type="none" w="med" len="med"/>
+                          <a:tailEnd type="none" w="med" len="med"/>
+                        </a:lnR>
+                        <a:lnT w="12700" cap="flat" cmpd="sng" algn="ctr">
+                          <a:solidFill>
+                            <a:schemeClr val="tx1"/>
+                          </a:solidFill>
+                          <a:prstDash val="solid"/>
+                          <a:round/>
+                          <a:headEnd type="none" w="med" len="med"/>
+                          <a:tailEnd type="none" w="med" len="med"/>
+                        </a:lnT>
+                        <a:lnB w="12700" cap="flat" cmpd="sng" algn="ctr">
+                          <a:solidFill>
+                            <a:schemeClr val="tx1"/>
+                          </a:solidFill>
+                          <a:prstDash val="solid"/>
+                          <a:round/>
+                          <a:headEnd type="none" w="med" len="med"/>
+                          <a:tailEnd type="none" w="med" len="med"/>
+                        </a:lnB>
+                      </a:tcPr>
+                    </a:tc>
+                    <a:tc>
+                      <a:txBody>
+                        <a:bodyPr/>
+                        <a:lstStyle/>
+                        <a:p>
+                          <a:pPr algn="ctr" fontAlgn="b"/>
+                          <a:r>
+                            <a:rPr lang="ru-RU" sz="1800" b="0" i="0" u="none" strike="noStrike" dirty="0">
+                              <a:solidFill>
+                                <a:srgbClr val="000000"/>
+                              </a:solidFill>
+                              <a:effectLst/>
+                              <a:latin typeface="Calibri" panose="020F0502020204030204" pitchFamily="34" charset="0"/>
+                            </a:rPr>
+                            <a:t>Сложная</a:t>
+                          </a:r>
+                          <a:r>
+                            <a:rPr lang="ru-RU" sz="1800" b="0" i="0" u="none" strike="noStrike" baseline="0" dirty="0">
+                              <a:solidFill>
+                                <a:srgbClr val="000000"/>
+                              </a:solidFill>
+                              <a:effectLst/>
+                              <a:latin typeface="Calibri" panose="020F0502020204030204" pitchFamily="34" charset="0"/>
+                            </a:rPr>
+                            <a:t> реализация</a:t>
+                          </a:r>
+                          <a:endParaRPr lang="en-US" sz="1800" b="0" i="0" u="none" strike="noStrike" dirty="0">
+                            <a:solidFill>
+                              <a:srgbClr val="000000"/>
+                            </a:solidFill>
+                            <a:effectLst/>
+                            <a:latin typeface="Calibri" panose="020F0502020204030204" pitchFamily="34" charset="0"/>
+                          </a:endParaRPr>
+                        </a:p>
+                      </a:txBody>
+                      <a:tcPr marL="9525" marR="9525" marT="9525" marB="0" anchor="ctr">
+                        <a:lnL w="12700" cap="flat" cmpd="sng" algn="ctr">
+                          <a:solidFill>
+                            <a:schemeClr val="tx1"/>
+                          </a:solidFill>
+                          <a:prstDash val="solid"/>
+                          <a:round/>
+                          <a:headEnd type="none" w="med" len="med"/>
+                          <a:tailEnd type="none" w="med" len="med"/>
+                        </a:lnL>
+                        <a:lnR w="12700" cap="flat" cmpd="sng" algn="ctr">
+                          <a:solidFill>
+                            <a:schemeClr val="tx1"/>
+                          </a:solidFill>
+                          <a:prstDash val="solid"/>
+                          <a:round/>
+                          <a:headEnd type="none" w="med" len="med"/>
+                          <a:tailEnd type="none" w="med" len="med"/>
+                        </a:lnR>
+                        <a:lnT w="12700" cap="flat" cmpd="sng" algn="ctr">
+                          <a:solidFill>
+                            <a:schemeClr val="tx1"/>
+                          </a:solidFill>
+                          <a:prstDash val="solid"/>
+                          <a:round/>
+                          <a:headEnd type="none" w="med" len="med"/>
+                          <a:tailEnd type="none" w="med" len="med"/>
+                        </a:lnT>
+                        <a:lnB w="12700" cap="flat" cmpd="sng" algn="ctr">
+                          <a:solidFill>
+                            <a:schemeClr val="tx1"/>
+                          </a:solidFill>
+                          <a:prstDash val="solid"/>
+                          <a:round/>
+                          <a:headEnd type="none" w="med" len="med"/>
+                          <a:tailEnd type="none" w="med" len="med"/>
+                        </a:lnB>
+                      </a:tcPr>
+                    </a:tc>
+                    <a:extLst>
+                      <a:ext uri="{0D108BD9-81ED-4DB2-BD59-A6C34878D82A}">
+                        <a16:rowId xmlns:a16="http://schemas.microsoft.com/office/drawing/2014/main" val="1617014016"/>
+                      </a:ext>
+                    </a:extLst>
+                  </a:tr>
+                </a:tbl>
+              </a:graphicData>
+            </a:graphic>
+          </p:graphicFrame>
+        </mc:Fallback>
+      </mc:AlternateContent>
+      <p:sp>
+        <p:nvSpPr>
+          <p:cNvPr id="7" name="Прямоугольник 6"/>
+          <p:cNvSpPr/>
+          <p:nvPr/>
+        </p:nvSpPr>
+        <p:spPr>
+          <a:xfrm>
+            <a:off x="310896" y="5156021"/>
+            <a:ext cx="10525171" cy="1431161"/>
+          </a:xfrm>
+          <a:prstGeom prst="rect">
+            <a:avLst/>
+          </a:prstGeom>
+        </p:spPr>
+        <p:txBody>
+          <a:bodyPr wrap="square">
+            <a:spAutoFit/>
+          </a:bodyPr>
+          <a:lstStyle/>
+          <a:p>
+            <a:pPr>
+              <a:spcBef>
+                <a:spcPts val="600"/>
+              </a:spcBef>
+            </a:pPr>
+            <a:r>
+              <a:rPr lang="ru-RU" dirty="0">
+                <a:solidFill>
+                  <a:srgbClr val="2C2C36"/>
+                </a:solidFill>
+              </a:rPr>
+              <a:t>Распределения могут быть представлены как:</a:t>
+            </a:r>
+          </a:p>
+          <a:p>
+            <a:pPr>
+              <a:spcBef>
+                <a:spcPts val="600"/>
+              </a:spcBef>
+              <a:buFont typeface="Arial" panose="020B0604020202020204" pitchFamily="34" charset="0"/>
+              <a:buChar char="•"/>
+            </a:pPr>
+            <a:r>
+              <a:rPr lang="ru-RU" dirty="0">
+                <a:solidFill>
+                  <a:srgbClr val="2C2C36"/>
+                </a:solidFill>
+              </a:rPr>
+              <a:t>Параметрические распределения (например, нормальное с </a:t>
+            </a:r>
+            <a:r>
+              <a:rPr lang="ru-RU" i="1" dirty="0">
+                <a:solidFill>
+                  <a:srgbClr val="2C2C36"/>
+                </a:solidFill>
+              </a:rPr>
+              <a:t>μ</a:t>
+            </a:r>
+            <a:r>
+              <a:rPr lang="ru-RU" dirty="0">
+                <a:solidFill>
+                  <a:srgbClr val="2C2C36"/>
+                </a:solidFill>
+              </a:rPr>
+              <a:t> и </a:t>
+            </a:r>
+            <a:r>
+              <a:rPr lang="ru-RU" i="1" dirty="0">
+                <a:solidFill>
+                  <a:srgbClr val="2C2C36"/>
+                </a:solidFill>
+              </a:rPr>
+              <a:t>σ</a:t>
+            </a:r>
+            <a:r>
+              <a:rPr lang="ru-RU" dirty="0">
+                <a:solidFill>
+                  <a:srgbClr val="2C2C36"/>
+                </a:solidFill>
+              </a:rPr>
+              <a:t> ),</a:t>
+            </a:r>
+          </a:p>
+          <a:p>
+            <a:pPr>
+              <a:spcBef>
+                <a:spcPts val="600"/>
+              </a:spcBef>
+              <a:buFont typeface="Arial" panose="020B0604020202020204" pitchFamily="34" charset="0"/>
+              <a:buChar char="•"/>
+            </a:pPr>
+            <a:r>
+              <a:rPr lang="ru-RU" dirty="0">
+                <a:solidFill>
+                  <a:srgbClr val="2C2C36"/>
+                </a:solidFill>
+              </a:rPr>
+              <a:t>Непараметрические (например, выборки из </a:t>
+            </a:r>
+            <a:r>
+              <a:rPr lang="ru-RU" dirty="0" err="1">
+                <a:solidFill>
+                  <a:srgbClr val="2C2C36"/>
+                </a:solidFill>
+              </a:rPr>
+              <a:t>бутстрепа</a:t>
+            </a:r>
+            <a:r>
+              <a:rPr lang="ru-RU" dirty="0">
+                <a:solidFill>
+                  <a:srgbClr val="2C2C36"/>
+                </a:solidFill>
+              </a:rPr>
+              <a:t> или MCMC),</a:t>
+            </a:r>
+          </a:p>
+          <a:p>
+            <a:pPr>
+              <a:spcBef>
+                <a:spcPts val="600"/>
+              </a:spcBef>
+              <a:buFont typeface="Arial" panose="020B0604020202020204" pitchFamily="34" charset="0"/>
+              <a:buChar char="•"/>
+            </a:pPr>
+            <a:r>
+              <a:rPr lang="ru-RU" dirty="0">
+                <a:solidFill>
+                  <a:srgbClr val="2C2C36"/>
+                </a:solidFill>
+              </a:rPr>
+              <a:t>Дискретные распределения (для категориальных данных).</a:t>
+            </a:r>
+            <a:endParaRPr lang="ru-RU" b="0" i="0" dirty="0">
+              <a:solidFill>
+                <a:srgbClr val="2C2C36"/>
+              </a:solidFill>
+              <a:effectLst/>
+            </a:endParaRPr>
+          </a:p>
+        </p:txBody>
+      </p:sp>
+    </p:spTree>
+    <p:extLst>
+      <p:ext uri="{BB962C8B-B14F-4D97-AF65-F5344CB8AC3E}">
+        <p14:creationId xmlns:p14="http://schemas.microsoft.com/office/powerpoint/2010/main" val="3612851467"/>
+      </p:ext>
+    </p:extLst>
+  </p:cSld>
+  <p:clrMapOvr>
+    <a:masterClrMapping/>
+  </p:clrMapOvr>
+  <p:timing>
+    <p:tnLst>
+      <p:par>
+        <p:cTn id="1" dur="indefinite" restart="never" nodeType="tmRoot"/>
+      </p:par>
+    </p:tnLst>
+  </p:timing>
+</p:sld>
+</file>
+
+<file path=ppt/slides/slide17.xml><?xml version="1.0" encoding="utf-8"?>
 <p:sld xmlns:a="http://schemas.openxmlformats.org/drawingml/2006/main" xmlns:r="http://schemas.openxmlformats.org/officeDocument/2006/relationships" xmlns:p="http://schemas.openxmlformats.org/presentationml/2006/main">
   <p:cSld>
     <p:spTree>
@@ -6238,8 +12129,8 @@
           </a:p>
         </p:txBody>
       </p:sp>
-      <mc:AlternateContent xmlns:mc="http://schemas.openxmlformats.org/markup-compatibility/2006" xmlns:a14="http://schemas.microsoft.com/office/drawing/2010/main">
-        <mc:Choice Requires="a14">
+      <mc:AlternateContent xmlns:mc="http://schemas.openxmlformats.org/markup-compatibility/2006">
+        <mc:Choice xmlns:a14="http://schemas.microsoft.com/office/drawing/2010/main" Requires="a14">
           <p:sp>
             <p:nvSpPr>
               <p:cNvPr id="3" name="Объект 2"/>
@@ -6258,7 +12149,7 @@
             </p:spPr>
             <p:txBody>
               <a:bodyPr>
-                <a:normAutofit lnSpcReduction="10000"/>
+                <a:normAutofit fontScale="92500"/>
               </a:bodyPr>
               <a:lstStyle/>
               <a:p>
@@ -6275,12 +12166,24 @@
                   <a:buNone/>
                 </a:pPr>
                 <a:r>
-                  <a:rPr lang="ru-RU" sz="2100" b="1" dirty="0" err="1"/>
+                  <a:rPr lang="ru-RU" sz="2100" b="1" dirty="0" err="1" smtClean="0"/>
                   <a:t>Нативно</a:t>
                 </a:r>
                 <a:r>
+                  <a:rPr lang="ru-RU" sz="2100" b="1" dirty="0"/>
+                  <a:t> </a:t>
+                </a:r>
+                <a:r>
+                  <a:rPr lang="ru-RU" sz="2100" b="1" dirty="0" smtClean="0"/>
+                  <a:t>(параметрические)</a:t>
+                </a:r>
+                <a:r>
+                  <a:rPr lang="ru-RU" sz="2100" dirty="0" smtClean="0"/>
+                  <a:t>: </a:t>
+                </a:r>
+                <a:r>
                   <a:rPr lang="ru-RU" sz="2100" dirty="0"/>
-                  <a:t>: Например </a:t>
+                  <a:t>Например </a:t>
                 </a:r>
                 <a:r>
                   <a:rPr lang="en-US" sz="2100" dirty="0"/>
@@ -6307,8 +12210,13 @@
                 <a:pPr lvl="1"/>
                 <a:r>
                   <a:rPr lang="ru-RU" sz="2500" dirty="0"/>
-                  <a:t>такие оценки предполагают, что остатки имеют заданное распределение, напр. нормальное.</a:t>
+                  <a:t>такие оценки предполагают, что остатки имеют заданное распределение, напр. </a:t>
                 </a:r>
+                <a:r>
+                  <a:rPr lang="ru-RU" sz="2500" dirty="0" smtClean="0"/>
+                  <a:t>нормальное (оно заложено в модели).</a:t>
+                </a:r>
+                <a:endParaRPr lang="ru-RU" sz="2500" dirty="0"/>
               </a:p>
               <a:p>
                 <a:pPr marL="1371600" lvl="3" indent="0">
@@ -6661,51 +12569,60 @@
                   <a:buNone/>
                 </a:pPr>
                 <a:r>
-                  <a:rPr lang="ru-RU" sz="2500" dirty="0"/>
-                  <a:t>Путем ассиметричной регрессии (</a:t>
-                </a:r>
-                <a:r>
-                  <a:rPr lang="ru-RU" sz="2500" b="1" dirty="0" err="1"/>
-                  <a:t>квантильные</a:t>
-                </a:r>
-                <a:r>
-                  <a:rPr lang="ru-RU" sz="2500" b="1" dirty="0"/>
-                  <a:t> оценки</a:t>
-                </a:r>
-                <a:r>
-                  <a:rPr lang="ru-RU" sz="2500" dirty="0"/>
-                  <a:t>), байесовские оценки </a:t>
-                </a:r>
-              </a:p>
-              <a:p>
-                <a:pPr marL="0" indent="0">
-                  <a:buNone/>
-                </a:pPr>
-                <a:r>
-                  <a:rPr lang="ru-RU" sz="2500" dirty="0"/>
-                  <a:t>При помощи эвристических – устойчивых техник:</a:t>
+                  <a:rPr lang="ru-RU" sz="2500" b="1" dirty="0" smtClean="0"/>
+                  <a:t>Из данных (не параметрические):</a:t>
                 </a:r>
               </a:p>
               <a:p>
                 <a:pPr lvl="1"/>
                 <a:r>
-                  <a:rPr lang="ru-RU" sz="2500" b="1" dirty="0"/>
+                  <a:rPr lang="ru-RU" sz="2100" dirty="0" smtClean="0"/>
+                  <a:t>Путем </a:t>
+                </a:r>
+                <a:r>
+                  <a:rPr lang="ru-RU" sz="2100" dirty="0"/>
+                  <a:t>ассиметричной регрессии (</a:t>
+                </a:r>
+                <a:r>
+                  <a:rPr lang="ru-RU" sz="2100" b="1" dirty="0" err="1"/>
+                  <a:t>квантильные</a:t>
+                </a:r>
+                <a:r>
+                  <a:rPr lang="ru-RU" sz="2100" b="1" dirty="0"/>
+                  <a:t> оценки</a:t>
+                </a:r>
+                <a:r>
+                  <a:rPr lang="ru-RU" sz="2100" dirty="0"/>
+                  <a:t>), байесовские оценки </a:t>
+                </a:r>
+              </a:p>
+              <a:p>
+                <a:pPr lvl="1"/>
+                <a:r>
+                  <a:rPr lang="ru-RU" sz="2100" dirty="0"/>
+                  <a:t>При помощи эвристических – устойчивых техник:</a:t>
+                </a:r>
+              </a:p>
+              <a:p>
+                <a:pPr lvl="2"/>
+                <a:r>
+                  <a:rPr lang="ru-RU" sz="2100" b="1" dirty="0"/>
                   <a:t>Бут-</a:t>
                 </a:r>
                 <a:r>
-                  <a:rPr lang="ru-RU" sz="2500" b="1" dirty="0" err="1"/>
+                  <a:rPr lang="ru-RU" sz="2100" b="1" dirty="0" err="1"/>
                   <a:t>стреп</a:t>
                 </a:r>
                 <a:r>
-                  <a:rPr lang="ru-RU" sz="2500" b="1" dirty="0"/>
+                  <a:rPr lang="ru-RU" sz="2100" b="1" dirty="0"/>
                   <a:t> и </a:t>
                 </a:r>
                 <a:r>
-                  <a:rPr lang="ru-RU" sz="2500" b="1" dirty="0" err="1"/>
+                  <a:rPr lang="ru-RU" sz="2100" b="1" dirty="0" err="1"/>
                   <a:t>Комформные</a:t>
                 </a:r>
                 <a:r>
-                  <a:rPr lang="ru-RU" sz="2500" b="1" dirty="0"/>
+                  <a:rPr lang="ru-RU" sz="2100" b="1" dirty="0"/>
                   <a:t> предсказания</a:t>
                 </a:r>
               </a:p>
@@ -6720,7 +12637,7 @@
             </p:txBody>
           </p:sp>
         </mc:Choice>
-        <mc:Fallback xmlns="">
+        <mc:Fallback>
           <p:sp>
             <p:nvSpPr>
               <p:cNvPr id="3" name="Объект 2"/>
@@ -6739,7 +12656,7 @@
               <a:blipFill>
                 <a:blip r:embed="rId2"/>
                 <a:stretch>
-                  <a:fillRect l="-885" t="-1987" r="-1302"/>
+                  <a:fillRect l="-781" t="-1325" r="-469"/>
                 </a:stretch>
               </a:blipFill>
             </p:spPr>
@@ -6958,10 +12875,17 @@
   <p:clrMapOvr>
     <a:masterClrMapping/>
   </p:clrMapOvr>
+  <p:timing>
+    <p:tnLst>
+      <p:par>
+        <p:cTn id="1" dur="indefinite" restart="never" nodeType="tmRoot"/>
+      </p:par>
+    </p:tnLst>
+  </p:timing>
 </p:sld>
 </file>
 
-<file path=ppt/slides/slide17.xml><?xml version="1.0" encoding="utf-8"?>
+<file path=ppt/slides/slide18.xml><?xml version="1.0" encoding="utf-8"?>
 <p:sld xmlns:a="http://schemas.openxmlformats.org/drawingml/2006/main" xmlns:r="http://schemas.openxmlformats.org/officeDocument/2006/relationships" xmlns:p="http://schemas.openxmlformats.org/presentationml/2006/main">
   <p:cSld>
     <p:spTree>
@@ -7411,7 +13335,19 @@
             </a:r>
             <a:r>
               <a:rPr lang="ru-RU" sz="2400" dirty="0"/>
-              <a:t> – </a:t>
+              <a:t> </a:t>
+            </a:r>
+            <a:r>
+              <a:rPr lang="ru-RU" sz="2400" b="1" dirty="0" smtClean="0"/>
+              <a:t>ВР </a:t>
+            </a:r>
+            <a:r>
+              <a:rPr lang="ru-RU" sz="2400" dirty="0" smtClean="0"/>
+              <a:t>– </a:t>
+            </a:r>
+            <a:r>
+              <a:rPr lang="ru-RU" sz="2400" dirty="0"/>
+              <a:t/>
             </a:r>
             <a:br>
               <a:rPr lang="ru-RU" sz="2400" dirty="0"/>
@@ -7504,6 +13440,36 @@
           </a:extLst>
         </p:spPr>
       </p:pic>
+      <p:cxnSp>
+        <p:nvCxnSpPr>
+          <p:cNvPr id="8" name="Прямая соединительная линия 7"/>
+          <p:cNvCxnSpPr/>
+          <p:nvPr/>
+        </p:nvCxnSpPr>
+        <p:spPr>
+          <a:xfrm>
+            <a:off x="5164455" y="795072"/>
+            <a:ext cx="0" cy="5554928"/>
+          </a:xfrm>
+          <a:prstGeom prst="line">
+            <a:avLst/>
+          </a:prstGeom>
+        </p:spPr>
+        <p:style>
+          <a:lnRef idx="1">
+            <a:schemeClr val="accent1"/>
+          </a:lnRef>
+          <a:fillRef idx="0">
+            <a:schemeClr val="accent1"/>
+          </a:fillRef>
+          <a:effectRef idx="0">
+            <a:schemeClr val="accent1"/>
+          </a:effectRef>
+          <a:fontRef idx="minor">
+            <a:schemeClr val="tx1"/>
+          </a:fontRef>
+        </p:style>
+      </p:cxnSp>
     </p:spTree>
     <p:extLst>
       <p:ext uri="{BB962C8B-B14F-4D97-AF65-F5344CB8AC3E}">
@@ -7514,10 +13480,17 @@
   <p:clrMapOvr>
     <a:masterClrMapping/>
   </p:clrMapOvr>
+  <p:timing>
+    <p:tnLst>
+      <p:par>
+        <p:cTn id="1" dur="indefinite" restart="never" nodeType="tmRoot"/>
+      </p:par>
+    </p:tnLst>
+  </p:timing>
 </p:sld>
 </file>
 
-<file path=ppt/slides/slide18.xml><?xml version="1.0" encoding="utf-8"?>
+<file path=ppt/slides/slide19.xml><?xml version="1.0" encoding="utf-8"?>
 <p:sld xmlns:a="http://schemas.openxmlformats.org/drawingml/2006/main" xmlns:r="http://schemas.openxmlformats.org/officeDocument/2006/relationships" xmlns:p="http://schemas.openxmlformats.org/presentationml/2006/main">
   <p:cSld>
     <p:spTree>
@@ -8862,7 +14835,7 @@
                                   </a:solidFill>
                                   <a:latin typeface="Cambria Math" panose="02040503050406030204" pitchFamily="18" charset="0"/>
                                 </a:rPr>
-                                <m:t> −нормиров</m:t>
+                                <m:t> −нормирован</m:t>
                               </m:r>
                               <m:r>
                                 <a:rPr lang="ru-RU" sz="1900" dirty="0">
@@ -8871,7 +14844,7 @@
                                   </a:solidFill>
                                   <a:latin typeface="Cambria Math" panose="02040503050406030204" pitchFamily="18" charset="0"/>
                                 </a:rPr>
-                                <m:t>анная ширина интервала</m:t>
+                                <m:t>ная ширина интервала</m:t>
                               </m:r>
                             </m:oMath>
                           </a14:m>
@@ -10795,10 +16768,542 @@
   <p:clrMapOvr>
     <a:masterClrMapping/>
   </p:clrMapOvr>
+  <p:timing>
+    <p:tnLst>
+      <p:par>
+        <p:cTn id="1" dur="indefinite" restart="never" nodeType="tmRoot"/>
+      </p:par>
+    </p:tnLst>
+  </p:timing>
 </p:sld>
 </file>
 
-<file path=ppt/slides/slide19.xml><?xml version="1.0" encoding="utf-8"?>
+<file path=ppt/slides/slide2.xml><?xml version="1.0" encoding="utf-8"?>
+<p:sld xmlns:a="http://schemas.openxmlformats.org/drawingml/2006/main" xmlns:r="http://schemas.openxmlformats.org/officeDocument/2006/relationships" xmlns:p="http://schemas.openxmlformats.org/presentationml/2006/main">
+  <p:cSld>
+    <p:spTree>
+      <p:nvGrpSpPr>
+        <p:cNvPr id="1" name=""/>
+        <p:cNvGrpSpPr/>
+        <p:nvPr/>
+      </p:nvGrpSpPr>
+      <p:grpSpPr>
+        <a:xfrm>
+          <a:off x="0" y="0"/>
+          <a:ext cx="0" cy="0"/>
+          <a:chOff x="0" y="0"/>
+          <a:chExt cx="0" cy="0"/>
+        </a:xfrm>
+      </p:grpSpPr>
+      <p:sp>
+        <p:nvSpPr>
+          <p:cNvPr id="2" name="Заголовок 1"/>
+          <p:cNvSpPr>
+            <a:spLocks noGrp="1"/>
+          </p:cNvSpPr>
+          <p:nvPr>
+            <p:ph type="title"/>
+          </p:nvPr>
+        </p:nvSpPr>
+        <p:spPr>
+          <a:xfrm>
+            <a:off x="171450" y="161925"/>
+            <a:ext cx="11403106" cy="660827"/>
+          </a:xfrm>
+        </p:spPr>
+        <p:txBody>
+          <a:bodyPr>
+            <a:normAutofit fontScale="90000"/>
+          </a:bodyPr>
+          <a:lstStyle/>
+          <a:p>
+            <a:r>
+              <a:rPr lang="ru-RU" dirty="0"/>
+              <a:t>Надёжность предсказания временных рядов</a:t>
+            </a:r>
+          </a:p>
+        </p:txBody>
+      </p:sp>
+      <mc:AlternateContent xmlns:mc="http://schemas.openxmlformats.org/markup-compatibility/2006" xmlns:a14="http://schemas.microsoft.com/office/drawing/2010/main">
+        <mc:Choice Requires="a14">
+          <p:sp>
+            <p:nvSpPr>
+              <p:cNvPr id="3" name="Объект 2"/>
+              <p:cNvSpPr>
+                <a:spLocks noGrp="1"/>
+              </p:cNvSpPr>
+              <p:nvPr>
+                <p:ph idx="1"/>
+              </p:nvPr>
+            </p:nvSpPr>
+            <p:spPr>
+              <a:xfrm>
+                <a:off x="171450" y="822752"/>
+                <a:ext cx="11733519" cy="5780955"/>
+              </a:xfrm>
+            </p:spPr>
+            <p:txBody>
+              <a:bodyPr>
+                <a:normAutofit/>
+              </a:bodyPr>
+              <a:lstStyle/>
+              <a:p>
+                <a:pPr marL="0" indent="0">
+                  <a:buNone/>
+                </a:pPr>
+                <a:r>
+                  <a:rPr lang="ru-RU" sz="2400" b="1" dirty="0"/>
+                  <a:t>Надёжность предсказания временных рядов </a:t>
+                </a:r>
+                <a:r>
+                  <a:rPr lang="ru-RU" sz="2400" dirty="0"/>
+                  <a:t>— это мера, характеризующая степень уверенности в том, что реальное будущее значение временного ряда окажется в достаточно близко к предсезонному значению.</a:t>
+                </a:r>
+              </a:p>
+              <a:p>
+                <a:pPr marL="0" indent="0">
+                  <a:buNone/>
+                </a:pPr>
+                <a:r>
+                  <a:rPr lang="ru-RU" sz="2400" dirty="0"/>
+                  <a:t>	То есть в интервале </a:t>
+                </a:r>
+                <a:r>
+                  <a:rPr lang="ru-RU" sz="2400" dirty="0" err="1"/>
+                  <a:t>отн</a:t>
+                </a:r>
+                <a:r>
+                  <a:rPr lang="ru-RU" sz="2400" dirty="0"/>
+                  <a:t>. Средней оценке </a:t>
+                </a:r>
+                <a14:m>
+                  <m:oMath xmlns:m="http://schemas.openxmlformats.org/officeDocument/2006/math">
+                    <m:sSub>
+                      <m:sSubPr>
+                        <m:ctrlPr>
+                          <a:rPr lang="en-US" sz="2400" b="0" i="1" smtClean="0">
+                            <a:latin typeface="Cambria Math" panose="02040503050406030204" pitchFamily="18" charset="0"/>
+                          </a:rPr>
+                        </m:ctrlPr>
+                      </m:sSubPr>
+                      <m:e>
+                        <m:r>
+                          <a:rPr lang="en-US" sz="2400" b="0" i="1" smtClean="0">
+                            <a:latin typeface="Cambria Math" panose="02040503050406030204" pitchFamily="18" charset="0"/>
+                          </a:rPr>
+                          <m:t>𝑦</m:t>
+                        </m:r>
+                      </m:e>
+                      <m:sub>
+                        <m:r>
+                          <a:rPr lang="en-US" sz="2400" b="0" i="1" smtClean="0">
+                            <a:latin typeface="Cambria Math" panose="02040503050406030204" pitchFamily="18" charset="0"/>
+                          </a:rPr>
+                          <m:t>𝑇</m:t>
+                        </m:r>
+                      </m:sub>
+                    </m:sSub>
+                    <m:r>
+                      <a:rPr lang="en-US" sz="2400" b="0" i="1" smtClean="0">
+                        <a:latin typeface="Cambria Math" panose="02040503050406030204" pitchFamily="18" charset="0"/>
+                      </a:rPr>
+                      <m:t>∈[</m:t>
+                    </m:r>
+                    <m:sSub>
+                      <m:sSubPr>
+                        <m:ctrlPr>
+                          <a:rPr lang="en-US" sz="2400" b="0" i="1" smtClean="0">
+                            <a:latin typeface="Cambria Math" panose="02040503050406030204" pitchFamily="18" charset="0"/>
+                          </a:rPr>
+                        </m:ctrlPr>
+                      </m:sSubPr>
+                      <m:e>
+                        <m:sSub>
+                          <m:sSubPr>
+                            <m:ctrlPr>
+                              <a:rPr lang="en-US" sz="2400" i="1">
+                                <a:latin typeface="Cambria Math" panose="02040503050406030204" pitchFamily="18" charset="0"/>
+                              </a:rPr>
+                            </m:ctrlPr>
+                          </m:sSubPr>
+                          <m:e>
+                            <m:acc>
+                              <m:accPr>
+                                <m:chr m:val="̂"/>
+                                <m:ctrlPr>
+                                  <a:rPr lang="en-US" sz="2400" i="1">
+                                    <a:latin typeface="Cambria Math" panose="02040503050406030204" pitchFamily="18" charset="0"/>
+                                  </a:rPr>
+                                </m:ctrlPr>
+                              </m:accPr>
+                              <m:e>
+                                <m:r>
+                                  <a:rPr lang="en-US" sz="2400" i="1">
+                                    <a:latin typeface="Cambria Math" panose="02040503050406030204" pitchFamily="18" charset="0"/>
+                                  </a:rPr>
+                                  <m:t>𝑦</m:t>
+                                </m:r>
+                              </m:e>
+                            </m:acc>
+                          </m:e>
+                          <m:sub>
+                            <m:r>
+                              <a:rPr lang="en-US" sz="2400" i="1">
+                                <a:latin typeface="Cambria Math" panose="02040503050406030204" pitchFamily="18" charset="0"/>
+                              </a:rPr>
+                              <m:t>𝑇</m:t>
+                            </m:r>
+                          </m:sub>
+                        </m:sSub>
+                      </m:e>
+                      <m:sub>
+                        <m:r>
+                          <a:rPr lang="en-US" sz="2400" b="0" i="1" smtClean="0">
+                            <a:latin typeface="Cambria Math" panose="02040503050406030204" pitchFamily="18" charset="0"/>
+                          </a:rPr>
+                          <m:t>𝑙𝑜𝑤</m:t>
+                        </m:r>
+                      </m:sub>
+                    </m:sSub>
+                    <m:r>
+                      <a:rPr lang="en-US" sz="2400" b="0" i="1" smtClean="0">
+                        <a:latin typeface="Cambria Math" panose="02040503050406030204" pitchFamily="18" charset="0"/>
+                      </a:rPr>
+                      <m:t>,</m:t>
+                    </m:r>
+                    <m:sSub>
+                      <m:sSubPr>
+                        <m:ctrlPr>
+                          <a:rPr lang="en-US" sz="2400" i="1">
+                            <a:latin typeface="Cambria Math" panose="02040503050406030204" pitchFamily="18" charset="0"/>
+                          </a:rPr>
+                        </m:ctrlPr>
+                      </m:sSubPr>
+                      <m:e>
+                        <m:sSub>
+                          <m:sSubPr>
+                            <m:ctrlPr>
+                              <a:rPr lang="en-US" sz="2400" i="1">
+                                <a:latin typeface="Cambria Math" panose="02040503050406030204" pitchFamily="18" charset="0"/>
+                              </a:rPr>
+                            </m:ctrlPr>
+                          </m:sSubPr>
+                          <m:e>
+                            <m:acc>
+                              <m:accPr>
+                                <m:chr m:val="̂"/>
+                                <m:ctrlPr>
+                                  <a:rPr lang="en-US" sz="2400" i="1">
+                                    <a:latin typeface="Cambria Math" panose="02040503050406030204" pitchFamily="18" charset="0"/>
+                                  </a:rPr>
+                                </m:ctrlPr>
+                              </m:accPr>
+                              <m:e>
+                                <m:r>
+                                  <a:rPr lang="en-US" sz="2400" i="1">
+                                    <a:latin typeface="Cambria Math" panose="02040503050406030204" pitchFamily="18" charset="0"/>
+                                  </a:rPr>
+                                  <m:t>𝑦</m:t>
+                                </m:r>
+                              </m:e>
+                            </m:acc>
+                          </m:e>
+                          <m:sub>
+                            <m:r>
+                              <a:rPr lang="en-US" sz="2400" i="1">
+                                <a:latin typeface="Cambria Math" panose="02040503050406030204" pitchFamily="18" charset="0"/>
+                              </a:rPr>
+                              <m:t>𝑇</m:t>
+                            </m:r>
+                          </m:sub>
+                        </m:sSub>
+                      </m:e>
+                      <m:sub>
+                        <m:r>
+                          <a:rPr lang="en-US" sz="2400" b="0" i="1" smtClean="0">
+                            <a:latin typeface="Cambria Math" panose="02040503050406030204" pitchFamily="18" charset="0"/>
+                          </a:rPr>
+                          <m:t>h𝑖𝑔h</m:t>
+                        </m:r>
+                      </m:sub>
+                    </m:sSub>
+                    <m:r>
+                      <a:rPr lang="en-US" sz="2400" b="0" i="1" smtClean="0">
+                        <a:latin typeface="Cambria Math" panose="02040503050406030204" pitchFamily="18" charset="0"/>
+                      </a:rPr>
+                      <m:t>]</m:t>
+                    </m:r>
+                  </m:oMath>
+                </a14:m>
+                <a:endParaRPr lang="ru-RU" sz="2400" dirty="0"/>
+              </a:p>
+              <a:p>
+                <a:pPr marL="0" indent="0">
+                  <a:buNone/>
+                </a:pPr>
+                <a:r>
+                  <a:rPr lang="ru-RU" sz="2400" dirty="0"/>
+                  <a:t>		где </a:t>
+                </a:r>
+                <a14:m>
+                  <m:oMath xmlns:m="http://schemas.openxmlformats.org/officeDocument/2006/math">
+                    <m:sSub>
+                      <m:sSubPr>
+                        <m:ctrlPr>
+                          <a:rPr lang="en-US" sz="2400" i="1">
+                            <a:latin typeface="Cambria Math" panose="02040503050406030204" pitchFamily="18" charset="0"/>
+                          </a:rPr>
+                        </m:ctrlPr>
+                      </m:sSubPr>
+                      <m:e>
+                        <m:sSub>
+                          <m:sSubPr>
+                            <m:ctrlPr>
+                              <a:rPr lang="en-US" sz="2400" i="1">
+                                <a:latin typeface="Cambria Math" panose="02040503050406030204" pitchFamily="18" charset="0"/>
+                              </a:rPr>
+                            </m:ctrlPr>
+                          </m:sSubPr>
+                          <m:e>
+                            <m:acc>
+                              <m:accPr>
+                                <m:chr m:val="̂"/>
+                                <m:ctrlPr>
+                                  <a:rPr lang="en-US" sz="2400" i="1">
+                                    <a:latin typeface="Cambria Math" panose="02040503050406030204" pitchFamily="18" charset="0"/>
+                                  </a:rPr>
+                                </m:ctrlPr>
+                              </m:accPr>
+                              <m:e>
+                                <m:r>
+                                  <a:rPr lang="en-US" sz="2400" i="1">
+                                    <a:latin typeface="Cambria Math" panose="02040503050406030204" pitchFamily="18" charset="0"/>
+                                  </a:rPr>
+                                  <m:t>𝑦</m:t>
+                                </m:r>
+                              </m:e>
+                            </m:acc>
+                          </m:e>
+                          <m:sub>
+                            <m:r>
+                              <a:rPr lang="en-US" sz="2400" i="1">
+                                <a:latin typeface="Cambria Math" panose="02040503050406030204" pitchFamily="18" charset="0"/>
+                              </a:rPr>
+                              <m:t>𝑇</m:t>
+                            </m:r>
+                          </m:sub>
+                        </m:sSub>
+                      </m:e>
+                      <m:sub>
+                        <m:r>
+                          <a:rPr lang="en-US" sz="2400" i="1">
+                            <a:latin typeface="Cambria Math" panose="02040503050406030204" pitchFamily="18" charset="0"/>
+                          </a:rPr>
+                          <m:t>𝑙𝑜𝑤</m:t>
+                        </m:r>
+                      </m:sub>
+                    </m:sSub>
+                    <m:r>
+                      <a:rPr lang="en-US" sz="2400" i="1">
+                        <a:latin typeface="Cambria Math" panose="02040503050406030204" pitchFamily="18" charset="0"/>
+                      </a:rPr>
+                      <m:t>,</m:t>
+                    </m:r>
+                    <m:sSub>
+                      <m:sSubPr>
+                        <m:ctrlPr>
+                          <a:rPr lang="en-US" sz="2400" i="1">
+                            <a:latin typeface="Cambria Math" panose="02040503050406030204" pitchFamily="18" charset="0"/>
+                          </a:rPr>
+                        </m:ctrlPr>
+                      </m:sSubPr>
+                      <m:e>
+                        <m:sSub>
+                          <m:sSubPr>
+                            <m:ctrlPr>
+                              <a:rPr lang="en-US" sz="2400" i="1">
+                                <a:latin typeface="Cambria Math" panose="02040503050406030204" pitchFamily="18" charset="0"/>
+                              </a:rPr>
+                            </m:ctrlPr>
+                          </m:sSubPr>
+                          <m:e>
+                            <m:acc>
+                              <m:accPr>
+                                <m:chr m:val="̂"/>
+                                <m:ctrlPr>
+                                  <a:rPr lang="en-US" sz="2400" i="1">
+                                    <a:latin typeface="Cambria Math" panose="02040503050406030204" pitchFamily="18" charset="0"/>
+                                  </a:rPr>
+                                </m:ctrlPr>
+                              </m:accPr>
+                              <m:e>
+                                <m:r>
+                                  <a:rPr lang="en-US" sz="2400" i="1">
+                                    <a:latin typeface="Cambria Math" panose="02040503050406030204" pitchFamily="18" charset="0"/>
+                                  </a:rPr>
+                                  <m:t>𝑦</m:t>
+                                </m:r>
+                              </m:e>
+                            </m:acc>
+                          </m:e>
+                          <m:sub>
+                            <m:r>
+                              <a:rPr lang="en-US" sz="2400" i="1">
+                                <a:latin typeface="Cambria Math" panose="02040503050406030204" pitchFamily="18" charset="0"/>
+                              </a:rPr>
+                              <m:t>𝑇</m:t>
+                            </m:r>
+                          </m:sub>
+                        </m:sSub>
+                      </m:e>
+                      <m:sub>
+                        <m:r>
+                          <a:rPr lang="en-US" sz="2400" i="1">
+                            <a:latin typeface="Cambria Math" panose="02040503050406030204" pitchFamily="18" charset="0"/>
+                          </a:rPr>
+                          <m:t>h𝑖𝑔h</m:t>
+                        </m:r>
+                      </m:sub>
+                    </m:sSub>
+                  </m:oMath>
+                </a14:m>
+                <a:r>
+                  <a:rPr lang="ru-RU" sz="2400" dirty="0"/>
+                  <a:t> - оценки нижней и верхней границ интервала.</a:t>
+                </a:r>
+              </a:p>
+              <a:p>
+                <a:pPr marL="0" indent="0">
+                  <a:buNone/>
+                </a:pPr>
+                <a:r>
+                  <a:rPr lang="ru-RU" sz="2400" b="1" dirty="0"/>
+                  <a:t>Прогнозы всегда содержат неопределенность. </a:t>
+                </a:r>
+                <a:r>
+                  <a:rPr lang="ru-RU" sz="2400" dirty="0"/>
+                  <a:t>Надежный прогноз позволяет:</a:t>
+                </a:r>
+              </a:p>
+              <a:p>
+                <a:pPr lvl="1"/>
+                <a:r>
+                  <a:rPr lang="ru-RU" dirty="0"/>
+                  <a:t>Управлять рисками</a:t>
+                </a:r>
+              </a:p>
+              <a:p>
+                <a:pPr lvl="2"/>
+                <a:r>
+                  <a:rPr lang="ru-RU" dirty="0"/>
+                  <a:t>Пример: прогноз энергопотребления с учетом возможного пика</a:t>
+                </a:r>
+              </a:p>
+              <a:p>
+                <a:pPr lvl="1"/>
+                <a:r>
+                  <a:rPr lang="ru-RU" dirty="0"/>
+                  <a:t>Планировать сценарии развития</a:t>
+                </a:r>
+              </a:p>
+              <a:p>
+                <a:pPr lvl="2"/>
+                <a:r>
+                  <a:rPr lang="ru-RU" dirty="0"/>
+                  <a:t>Пример: управление запасами на складе</a:t>
+                </a:r>
+              </a:p>
+              <a:p>
+                <a:pPr lvl="1"/>
+                <a:r>
+                  <a:rPr lang="ru-RU" dirty="0"/>
+                  <a:t>Повышать доверие к модели</a:t>
+                </a:r>
+              </a:p>
+              <a:p>
+                <a:pPr lvl="2"/>
+                <a:r>
+                  <a:rPr lang="ru-RU" dirty="0"/>
+                  <a:t>Пример: выбор между моделью с высокой точностью (низкое </a:t>
+                </a:r>
+                <a:r>
+                  <a:rPr lang="ru-RU" dirty="0" err="1"/>
+                  <a:t>смещние</a:t>
+                </a:r>
+                <a:r>
+                  <a:rPr lang="ru-RU" dirty="0"/>
+                  <a:t>) и высоким разбросом и наоборот</a:t>
+                </a:r>
+              </a:p>
+              <a:p>
+                <a:pPr lvl="2"/>
+                <a:endParaRPr lang="ru-RU" dirty="0"/>
+              </a:p>
+              <a:p>
+                <a:endParaRPr lang="ru-RU" dirty="0"/>
+              </a:p>
+            </p:txBody>
+          </p:sp>
+        </mc:Choice>
+        <mc:Fallback xmlns="">
+          <p:sp>
+            <p:nvSpPr>
+              <p:cNvPr id="3" name="Объект 2"/>
+              <p:cNvSpPr>
+                <a:spLocks noGrp="1" noRot="1" noChangeAspect="1" noMove="1" noResize="1" noEditPoints="1" noAdjustHandles="1" noChangeArrowheads="1" noChangeShapeType="1" noTextEdit="1"/>
+              </p:cNvSpPr>
+              <p:nvPr>
+                <p:ph idx="1"/>
+              </p:nvPr>
+            </p:nvSpPr>
+            <p:spPr>
+              <a:xfrm>
+                <a:off x="171450" y="822752"/>
+                <a:ext cx="11733519" cy="5780955"/>
+              </a:xfrm>
+              <a:blipFill>
+                <a:blip r:embed="rId2"/>
+                <a:stretch>
+                  <a:fillRect l="-779" t="-1477" r="-104"/>
+                </a:stretch>
+              </a:blipFill>
+            </p:spPr>
+            <p:txBody>
+              <a:bodyPr/>
+              <a:lstStyle/>
+              <a:p>
+                <a:r>
+                  <a:rPr lang="ru-RU">
+                    <a:noFill/>
+                  </a:rPr>
+                  <a:t> </a:t>
+                </a:r>
+              </a:p>
+            </p:txBody>
+          </p:sp>
+        </mc:Fallback>
+      </mc:AlternateContent>
+    </p:spTree>
+    <p:extLst>
+      <p:ext uri="{BB962C8B-B14F-4D97-AF65-F5344CB8AC3E}">
+        <p14:creationId xmlns:p14="http://schemas.microsoft.com/office/powerpoint/2010/main" val="1104299574"/>
+      </p:ext>
+    </p:extLst>
+  </p:cSld>
+  <p:clrMapOvr>
+    <a:masterClrMapping/>
+  </p:clrMapOvr>
+  <p:timing>
+    <p:tnLst>
+      <p:par>
+        <p:cTn id="1" dur="indefinite" restart="never" nodeType="tmRoot"/>
+      </p:par>
+    </p:tnLst>
+  </p:timing>
+</p:sld>
+</file>
+
+<file path=ppt/slides/slide20.xml><?xml version="1.0" encoding="utf-8"?>
 <p:sld xmlns:a="http://schemas.openxmlformats.org/drawingml/2006/main" xmlns:r="http://schemas.openxmlformats.org/officeDocument/2006/relationships" xmlns:p="http://schemas.openxmlformats.org/presentationml/2006/main">
   <p:cSld>
     <p:spTree>
@@ -14250,528 +20755,17 @@
   <p:clrMapOvr>
     <a:masterClrMapping/>
   </p:clrMapOvr>
+  <p:timing>
+    <p:tnLst>
+      <p:par>
+        <p:cTn id="1" dur="indefinite" restart="never" nodeType="tmRoot"/>
+      </p:par>
+    </p:tnLst>
+  </p:timing>
 </p:sld>
 </file>
 
-<file path=ppt/slides/slide2.xml><?xml version="1.0" encoding="utf-8"?>
-<p:sld xmlns:a="http://schemas.openxmlformats.org/drawingml/2006/main" xmlns:r="http://schemas.openxmlformats.org/officeDocument/2006/relationships" xmlns:p="http://schemas.openxmlformats.org/presentationml/2006/main">
-  <p:cSld>
-    <p:spTree>
-      <p:nvGrpSpPr>
-        <p:cNvPr id="1" name=""/>
-        <p:cNvGrpSpPr/>
-        <p:nvPr/>
-      </p:nvGrpSpPr>
-      <p:grpSpPr>
-        <a:xfrm>
-          <a:off x="0" y="0"/>
-          <a:ext cx="0" cy="0"/>
-          <a:chOff x="0" y="0"/>
-          <a:chExt cx="0" cy="0"/>
-        </a:xfrm>
-      </p:grpSpPr>
-      <p:sp>
-        <p:nvSpPr>
-          <p:cNvPr id="2" name="Заголовок 1"/>
-          <p:cNvSpPr>
-            <a:spLocks noGrp="1"/>
-          </p:cNvSpPr>
-          <p:nvPr>
-            <p:ph type="title"/>
-          </p:nvPr>
-        </p:nvSpPr>
-        <p:spPr>
-          <a:xfrm>
-            <a:off x="171450" y="161925"/>
-            <a:ext cx="11403106" cy="660827"/>
-          </a:xfrm>
-        </p:spPr>
-        <p:txBody>
-          <a:bodyPr>
-            <a:normAutofit fontScale="90000"/>
-          </a:bodyPr>
-          <a:lstStyle/>
-          <a:p>
-            <a:r>
-              <a:rPr lang="ru-RU" dirty="0"/>
-              <a:t>Надёжность предсказания временных рядов</a:t>
-            </a:r>
-          </a:p>
-        </p:txBody>
-      </p:sp>
-      <mc:AlternateContent xmlns:mc="http://schemas.openxmlformats.org/markup-compatibility/2006" xmlns:a14="http://schemas.microsoft.com/office/drawing/2010/main">
-        <mc:Choice Requires="a14">
-          <p:sp>
-            <p:nvSpPr>
-              <p:cNvPr id="3" name="Объект 2"/>
-              <p:cNvSpPr>
-                <a:spLocks noGrp="1"/>
-              </p:cNvSpPr>
-              <p:nvPr>
-                <p:ph idx="1"/>
-              </p:nvPr>
-            </p:nvSpPr>
-            <p:spPr>
-              <a:xfrm>
-                <a:off x="171450" y="822752"/>
-                <a:ext cx="11733519" cy="5780955"/>
-              </a:xfrm>
-            </p:spPr>
-            <p:txBody>
-              <a:bodyPr>
-                <a:normAutofit/>
-              </a:bodyPr>
-              <a:lstStyle/>
-              <a:p>
-                <a:pPr marL="0" indent="0">
-                  <a:buNone/>
-                </a:pPr>
-                <a:r>
-                  <a:rPr lang="ru-RU" sz="2400" b="1" dirty="0"/>
-                  <a:t>Надёжность предсказания временных рядов </a:t>
-                </a:r>
-                <a:r>
-                  <a:rPr lang="ru-RU" sz="2400" dirty="0"/>
-                  <a:t>— это мера, характеризующая степень уверенности в том, что реальное будущее значение временного ряда окажется в достаточно близко к предсезонному значению.</a:t>
-                </a:r>
-              </a:p>
-              <a:p>
-                <a:pPr marL="0" indent="0">
-                  <a:buNone/>
-                </a:pPr>
-                <a:r>
-                  <a:rPr lang="ru-RU" sz="2400" dirty="0"/>
-                  <a:t>	То есть в интервале </a:t>
-                </a:r>
-                <a:r>
-                  <a:rPr lang="ru-RU" sz="2400" dirty="0" err="1"/>
-                  <a:t>отн</a:t>
-                </a:r>
-                <a:r>
-                  <a:rPr lang="ru-RU" sz="2400" dirty="0"/>
-                  <a:t>. Средней оценке </a:t>
-                </a:r>
-                <a14:m>
-                  <m:oMath xmlns:m="http://schemas.openxmlformats.org/officeDocument/2006/math">
-                    <m:sSub>
-                      <m:sSubPr>
-                        <m:ctrlPr>
-                          <a:rPr lang="en-US" sz="2400" b="0" i="1" smtClean="0">
-                            <a:latin typeface="Cambria Math" panose="02040503050406030204" pitchFamily="18" charset="0"/>
-                          </a:rPr>
-                        </m:ctrlPr>
-                      </m:sSubPr>
-                      <m:e>
-                        <m:r>
-                          <a:rPr lang="en-US" sz="2400" b="0" i="1" smtClean="0">
-                            <a:latin typeface="Cambria Math" panose="02040503050406030204" pitchFamily="18" charset="0"/>
-                          </a:rPr>
-                          <m:t>𝑦</m:t>
-                        </m:r>
-                      </m:e>
-                      <m:sub>
-                        <m:r>
-                          <a:rPr lang="en-US" sz="2400" b="0" i="1" smtClean="0">
-                            <a:latin typeface="Cambria Math" panose="02040503050406030204" pitchFamily="18" charset="0"/>
-                          </a:rPr>
-                          <m:t>𝑇</m:t>
-                        </m:r>
-                      </m:sub>
-                    </m:sSub>
-                    <m:r>
-                      <a:rPr lang="en-US" sz="2400" b="0" i="1" smtClean="0">
-                        <a:latin typeface="Cambria Math" panose="02040503050406030204" pitchFamily="18" charset="0"/>
-                      </a:rPr>
-                      <m:t>∈[</m:t>
-                    </m:r>
-                    <m:sSub>
-                      <m:sSubPr>
-                        <m:ctrlPr>
-                          <a:rPr lang="en-US" sz="2400" b="0" i="1" smtClean="0">
-                            <a:latin typeface="Cambria Math" panose="02040503050406030204" pitchFamily="18" charset="0"/>
-                          </a:rPr>
-                        </m:ctrlPr>
-                      </m:sSubPr>
-                      <m:e>
-                        <m:sSub>
-                          <m:sSubPr>
-                            <m:ctrlPr>
-                              <a:rPr lang="en-US" sz="2400" i="1">
-                                <a:latin typeface="Cambria Math" panose="02040503050406030204" pitchFamily="18" charset="0"/>
-                              </a:rPr>
-                            </m:ctrlPr>
-                          </m:sSubPr>
-                          <m:e>
-                            <m:acc>
-                              <m:accPr>
-                                <m:chr m:val="̂"/>
-                                <m:ctrlPr>
-                                  <a:rPr lang="en-US" sz="2400" i="1">
-                                    <a:latin typeface="Cambria Math" panose="02040503050406030204" pitchFamily="18" charset="0"/>
-                                  </a:rPr>
-                                </m:ctrlPr>
-                              </m:accPr>
-                              <m:e>
-                                <m:r>
-                                  <a:rPr lang="en-US" sz="2400" i="1">
-                                    <a:latin typeface="Cambria Math" panose="02040503050406030204" pitchFamily="18" charset="0"/>
-                                  </a:rPr>
-                                  <m:t>𝑦</m:t>
-                                </m:r>
-                              </m:e>
-                            </m:acc>
-                          </m:e>
-                          <m:sub>
-                            <m:r>
-                              <a:rPr lang="en-US" sz="2400" i="1">
-                                <a:latin typeface="Cambria Math" panose="02040503050406030204" pitchFamily="18" charset="0"/>
-                              </a:rPr>
-                              <m:t>𝑇</m:t>
-                            </m:r>
-                          </m:sub>
-                        </m:sSub>
-                      </m:e>
-                      <m:sub>
-                        <m:r>
-                          <a:rPr lang="en-US" sz="2400" b="0" i="1" smtClean="0">
-                            <a:latin typeface="Cambria Math" panose="02040503050406030204" pitchFamily="18" charset="0"/>
-                          </a:rPr>
-                          <m:t>𝑙𝑜𝑤</m:t>
-                        </m:r>
-                      </m:sub>
-                    </m:sSub>
-                    <m:r>
-                      <a:rPr lang="en-US" sz="2400" b="0" i="1" smtClean="0">
-                        <a:latin typeface="Cambria Math" panose="02040503050406030204" pitchFamily="18" charset="0"/>
-                      </a:rPr>
-                      <m:t>,</m:t>
-                    </m:r>
-                    <m:sSub>
-                      <m:sSubPr>
-                        <m:ctrlPr>
-                          <a:rPr lang="en-US" sz="2400" i="1">
-                            <a:latin typeface="Cambria Math" panose="02040503050406030204" pitchFamily="18" charset="0"/>
-                          </a:rPr>
-                        </m:ctrlPr>
-                      </m:sSubPr>
-                      <m:e>
-                        <m:sSub>
-                          <m:sSubPr>
-                            <m:ctrlPr>
-                              <a:rPr lang="en-US" sz="2400" i="1">
-                                <a:latin typeface="Cambria Math" panose="02040503050406030204" pitchFamily="18" charset="0"/>
-                              </a:rPr>
-                            </m:ctrlPr>
-                          </m:sSubPr>
-                          <m:e>
-                            <m:acc>
-                              <m:accPr>
-                                <m:chr m:val="̂"/>
-                                <m:ctrlPr>
-                                  <a:rPr lang="en-US" sz="2400" i="1">
-                                    <a:latin typeface="Cambria Math" panose="02040503050406030204" pitchFamily="18" charset="0"/>
-                                  </a:rPr>
-                                </m:ctrlPr>
-                              </m:accPr>
-                              <m:e>
-                                <m:r>
-                                  <a:rPr lang="en-US" sz="2400" i="1">
-                                    <a:latin typeface="Cambria Math" panose="02040503050406030204" pitchFamily="18" charset="0"/>
-                                  </a:rPr>
-                                  <m:t>𝑦</m:t>
-                                </m:r>
-                              </m:e>
-                            </m:acc>
-                          </m:e>
-                          <m:sub>
-                            <m:r>
-                              <a:rPr lang="en-US" sz="2400" i="1">
-                                <a:latin typeface="Cambria Math" panose="02040503050406030204" pitchFamily="18" charset="0"/>
-                              </a:rPr>
-                              <m:t>𝑇</m:t>
-                            </m:r>
-                          </m:sub>
-                        </m:sSub>
-                      </m:e>
-                      <m:sub>
-                        <m:r>
-                          <a:rPr lang="en-US" sz="2400" b="0" i="1" smtClean="0">
-                            <a:latin typeface="Cambria Math" panose="02040503050406030204" pitchFamily="18" charset="0"/>
-                          </a:rPr>
-                          <m:t>h𝑖𝑔h</m:t>
-                        </m:r>
-                      </m:sub>
-                    </m:sSub>
-                    <m:r>
-                      <a:rPr lang="en-US" sz="2400" b="0" i="1" smtClean="0">
-                        <a:latin typeface="Cambria Math" panose="02040503050406030204" pitchFamily="18" charset="0"/>
-                      </a:rPr>
-                      <m:t>]</m:t>
-                    </m:r>
-                  </m:oMath>
-                </a14:m>
-                <a:endParaRPr lang="ru-RU" sz="2400" dirty="0"/>
-              </a:p>
-              <a:p>
-                <a:pPr marL="0" indent="0">
-                  <a:buNone/>
-                </a:pPr>
-                <a:r>
-                  <a:rPr lang="ru-RU" sz="2400" dirty="0"/>
-                  <a:t>		где </a:t>
-                </a:r>
-                <a14:m>
-                  <m:oMath xmlns:m="http://schemas.openxmlformats.org/officeDocument/2006/math">
-                    <m:sSub>
-                      <m:sSubPr>
-                        <m:ctrlPr>
-                          <a:rPr lang="en-US" sz="2400" i="1">
-                            <a:latin typeface="Cambria Math" panose="02040503050406030204" pitchFamily="18" charset="0"/>
-                          </a:rPr>
-                        </m:ctrlPr>
-                      </m:sSubPr>
-                      <m:e>
-                        <m:sSub>
-                          <m:sSubPr>
-                            <m:ctrlPr>
-                              <a:rPr lang="en-US" sz="2400" i="1">
-                                <a:latin typeface="Cambria Math" panose="02040503050406030204" pitchFamily="18" charset="0"/>
-                              </a:rPr>
-                            </m:ctrlPr>
-                          </m:sSubPr>
-                          <m:e>
-                            <m:acc>
-                              <m:accPr>
-                                <m:chr m:val="̂"/>
-                                <m:ctrlPr>
-                                  <a:rPr lang="en-US" sz="2400" i="1">
-                                    <a:latin typeface="Cambria Math" panose="02040503050406030204" pitchFamily="18" charset="0"/>
-                                  </a:rPr>
-                                </m:ctrlPr>
-                              </m:accPr>
-                              <m:e>
-                                <m:r>
-                                  <a:rPr lang="en-US" sz="2400" i="1">
-                                    <a:latin typeface="Cambria Math" panose="02040503050406030204" pitchFamily="18" charset="0"/>
-                                  </a:rPr>
-                                  <m:t>𝑦</m:t>
-                                </m:r>
-                              </m:e>
-                            </m:acc>
-                          </m:e>
-                          <m:sub>
-                            <m:r>
-                              <a:rPr lang="en-US" sz="2400" i="1">
-                                <a:latin typeface="Cambria Math" panose="02040503050406030204" pitchFamily="18" charset="0"/>
-                              </a:rPr>
-                              <m:t>𝑇</m:t>
-                            </m:r>
-                          </m:sub>
-                        </m:sSub>
-                      </m:e>
-                      <m:sub>
-                        <m:r>
-                          <a:rPr lang="en-US" sz="2400" i="1">
-                            <a:latin typeface="Cambria Math" panose="02040503050406030204" pitchFamily="18" charset="0"/>
-                          </a:rPr>
-                          <m:t>𝑙𝑜𝑤</m:t>
-                        </m:r>
-                      </m:sub>
-                    </m:sSub>
-                    <m:r>
-                      <a:rPr lang="en-US" sz="2400" i="1">
-                        <a:latin typeface="Cambria Math" panose="02040503050406030204" pitchFamily="18" charset="0"/>
-                      </a:rPr>
-                      <m:t>,</m:t>
-                    </m:r>
-                    <m:sSub>
-                      <m:sSubPr>
-                        <m:ctrlPr>
-                          <a:rPr lang="en-US" sz="2400" i="1">
-                            <a:latin typeface="Cambria Math" panose="02040503050406030204" pitchFamily="18" charset="0"/>
-                          </a:rPr>
-                        </m:ctrlPr>
-                      </m:sSubPr>
-                      <m:e>
-                        <m:sSub>
-                          <m:sSubPr>
-                            <m:ctrlPr>
-                              <a:rPr lang="en-US" sz="2400" i="1">
-                                <a:latin typeface="Cambria Math" panose="02040503050406030204" pitchFamily="18" charset="0"/>
-                              </a:rPr>
-                            </m:ctrlPr>
-                          </m:sSubPr>
-                          <m:e>
-                            <m:acc>
-                              <m:accPr>
-                                <m:chr m:val="̂"/>
-                                <m:ctrlPr>
-                                  <a:rPr lang="en-US" sz="2400" i="1">
-                                    <a:latin typeface="Cambria Math" panose="02040503050406030204" pitchFamily="18" charset="0"/>
-                                  </a:rPr>
-                                </m:ctrlPr>
-                              </m:accPr>
-                              <m:e>
-                                <m:r>
-                                  <a:rPr lang="en-US" sz="2400" i="1">
-                                    <a:latin typeface="Cambria Math" panose="02040503050406030204" pitchFamily="18" charset="0"/>
-                                  </a:rPr>
-                                  <m:t>𝑦</m:t>
-                                </m:r>
-                              </m:e>
-                            </m:acc>
-                          </m:e>
-                          <m:sub>
-                            <m:r>
-                              <a:rPr lang="en-US" sz="2400" i="1">
-                                <a:latin typeface="Cambria Math" panose="02040503050406030204" pitchFamily="18" charset="0"/>
-                              </a:rPr>
-                              <m:t>𝑇</m:t>
-                            </m:r>
-                          </m:sub>
-                        </m:sSub>
-                      </m:e>
-                      <m:sub>
-                        <m:r>
-                          <a:rPr lang="en-US" sz="2400" i="1">
-                            <a:latin typeface="Cambria Math" panose="02040503050406030204" pitchFamily="18" charset="0"/>
-                          </a:rPr>
-                          <m:t>h𝑖𝑔h</m:t>
-                        </m:r>
-                      </m:sub>
-                    </m:sSub>
-                  </m:oMath>
-                </a14:m>
-                <a:r>
-                  <a:rPr lang="ru-RU" sz="2400" dirty="0"/>
-                  <a:t> - оценки нижней и верхней границ интервала.</a:t>
-                </a:r>
-              </a:p>
-              <a:p>
-                <a:pPr marL="0" indent="0">
-                  <a:buNone/>
-                </a:pPr>
-                <a:r>
-                  <a:rPr lang="ru-RU" sz="2400" b="1" dirty="0"/>
-                  <a:t>Прогнозы всегда содержат неопределенность. </a:t>
-                </a:r>
-                <a:r>
-                  <a:rPr lang="ru-RU" sz="2400" dirty="0"/>
-                  <a:t>Надежный прогноз позволяет:</a:t>
-                </a:r>
-              </a:p>
-              <a:p>
-                <a:pPr lvl="1"/>
-                <a:r>
-                  <a:rPr lang="ru-RU" dirty="0"/>
-                  <a:t>Управлять рисками</a:t>
-                </a:r>
-              </a:p>
-              <a:p>
-                <a:pPr lvl="2"/>
-                <a:r>
-                  <a:rPr lang="ru-RU" dirty="0"/>
-                  <a:t>Пример: прогноз энергопотребления с учетом возможного пика</a:t>
-                </a:r>
-              </a:p>
-              <a:p>
-                <a:pPr lvl="1"/>
-                <a:r>
-                  <a:rPr lang="ru-RU" dirty="0"/>
-                  <a:t>Планировать сценарии развития</a:t>
-                </a:r>
-              </a:p>
-              <a:p>
-                <a:pPr lvl="2"/>
-                <a:r>
-                  <a:rPr lang="ru-RU" dirty="0"/>
-                  <a:t>Пример: управление запасами на складе</a:t>
-                </a:r>
-              </a:p>
-              <a:p>
-                <a:pPr lvl="1"/>
-                <a:r>
-                  <a:rPr lang="ru-RU" dirty="0"/>
-                  <a:t>Повышать доверие к модели</a:t>
-                </a:r>
-              </a:p>
-              <a:p>
-                <a:pPr lvl="2"/>
-                <a:r>
-                  <a:rPr lang="ru-RU" dirty="0"/>
-                  <a:t>Пример: выбор между моделью с высокой точностью (низкое </a:t>
-                </a:r>
-                <a:r>
-                  <a:rPr lang="ru-RU" dirty="0" err="1"/>
-                  <a:t>смещние</a:t>
-                </a:r>
-                <a:r>
-                  <a:rPr lang="ru-RU" dirty="0"/>
-                  <a:t>) и высоким разбросом и наоборот</a:t>
-                </a:r>
-              </a:p>
-              <a:p>
-                <a:pPr lvl="2"/>
-                <a:endParaRPr lang="ru-RU" dirty="0"/>
-              </a:p>
-              <a:p>
-                <a:endParaRPr lang="ru-RU" dirty="0"/>
-              </a:p>
-            </p:txBody>
-          </p:sp>
-        </mc:Choice>
-        <mc:Fallback xmlns="">
-          <p:sp>
-            <p:nvSpPr>
-              <p:cNvPr id="3" name="Объект 2"/>
-              <p:cNvSpPr>
-                <a:spLocks noGrp="1" noRot="1" noChangeAspect="1" noMove="1" noResize="1" noEditPoints="1" noAdjustHandles="1" noChangeArrowheads="1" noChangeShapeType="1" noTextEdit="1"/>
-              </p:cNvSpPr>
-              <p:nvPr>
-                <p:ph idx="1"/>
-              </p:nvPr>
-            </p:nvSpPr>
-            <p:spPr>
-              <a:xfrm>
-                <a:off x="171450" y="822752"/>
-                <a:ext cx="11733519" cy="5780955"/>
-              </a:xfrm>
-              <a:blipFill>
-                <a:blip r:embed="rId2"/>
-                <a:stretch>
-                  <a:fillRect l="-779" t="-1477" r="-104"/>
-                </a:stretch>
-              </a:blipFill>
-            </p:spPr>
-            <p:txBody>
-              <a:bodyPr/>
-              <a:lstStyle/>
-              <a:p>
-                <a:r>
-                  <a:rPr lang="ru-RU">
-                    <a:noFill/>
-                  </a:rPr>
-                  <a:t> </a:t>
-                </a:r>
-              </a:p>
-            </p:txBody>
-          </p:sp>
-        </mc:Fallback>
-      </mc:AlternateContent>
-    </p:spTree>
-    <p:extLst>
-      <p:ext uri="{BB962C8B-B14F-4D97-AF65-F5344CB8AC3E}">
-        <p14:creationId xmlns:p14="http://schemas.microsoft.com/office/powerpoint/2010/main" val="1104299574"/>
-      </p:ext>
-    </p:extLst>
-  </p:cSld>
-  <p:clrMapOvr>
-    <a:masterClrMapping/>
-  </p:clrMapOvr>
-</p:sld>
-</file>
-
-<file path=ppt/slides/slide20.xml><?xml version="1.0" encoding="utf-8"?>
+<file path=ppt/slides/slide21.xml><?xml version="1.0" encoding="utf-8"?>
 <p:sld xmlns:a="http://schemas.openxmlformats.org/drawingml/2006/main" xmlns:r="http://schemas.openxmlformats.org/officeDocument/2006/relationships" xmlns:p="http://schemas.openxmlformats.org/presentationml/2006/main">
   <p:cSld>
     <p:spTree>
@@ -14826,14 +20820,14 @@
             <p:ph idx="1"/>
             <p:extLst>
               <p:ext uri="{D42A27DB-BD31-4B8C-83A1-F6EECF244321}">
-                <p14:modId xmlns:p14="http://schemas.microsoft.com/office/powerpoint/2010/main" val="3735502307"/>
+                <p14:modId xmlns:p14="http://schemas.microsoft.com/office/powerpoint/2010/main" val="2477142671"/>
               </p:ext>
             </p:extLst>
           </p:nvPr>
         </p:nvGraphicFramePr>
         <p:xfrm>
           <a:off x="214312" y="1034249"/>
-          <a:ext cx="11715750" cy="4010025"/>
+          <a:ext cx="11715750" cy="4314825"/>
         </p:xfrm>
         <a:graphic>
           <a:graphicData uri="http://schemas.openxmlformats.org/drawingml/2006/table">
@@ -15066,7 +21060,59 @@
                         <a:rPr lang="ru-RU" sz="2000" u="none" strike="noStrike" dirty="0">
                           <a:effectLst/>
                         </a:rPr>
-                        <a:t>может давать широкие интервалы</a:t>
+                        <a:t>может давать широкие </a:t>
+                      </a:r>
+                      <a:r>
+                        <a:rPr lang="ru-RU" sz="2000" u="none" strike="noStrike" dirty="0" smtClean="0">
+                          <a:effectLst/>
+                        </a:rPr>
+                        <a:t>интервалы</a:t>
+                      </a:r>
+                    </a:p>
+                    <a:p>
+                      <a:pPr marL="342900" indent="-161925" algn="l" fontAlgn="b">
+                        <a:buFont typeface="Arial" panose="020B0604020202020204" pitchFamily="34" charset="0"/>
+                        <a:buChar char="•"/>
+                      </a:pPr>
+                      <a:r>
+                        <a:rPr lang="ru-RU" sz="2000" b="0" i="0" u="none" strike="noStrike" dirty="0" smtClean="0">
+                          <a:solidFill>
+                            <a:srgbClr val="000000"/>
+                          </a:solidFill>
+                          <a:effectLst/>
+                          <a:latin typeface="Calibri" panose="020F0502020204030204" pitchFamily="34" charset="0"/>
+                        </a:rPr>
+                        <a:t>Работает если тест и </a:t>
+                      </a:r>
+                      <a:r>
+                        <a:rPr lang="ru-RU" sz="2000" b="0" i="0" u="none" strike="noStrike" dirty="0" err="1" smtClean="0">
+                          <a:solidFill>
+                            <a:srgbClr val="000000"/>
+                          </a:solidFill>
+                          <a:effectLst/>
+                          <a:latin typeface="Calibri" panose="020F0502020204030204" pitchFamily="34" charset="0"/>
+                        </a:rPr>
+                        <a:t>калиб</a:t>
+                      </a:r>
+                      <a:r>
+                        <a:rPr lang="ru-RU" sz="2000" b="0" i="0" u="none" strike="noStrike" dirty="0" smtClean="0">
+                          <a:solidFill>
+                            <a:srgbClr val="000000"/>
+                          </a:solidFill>
+                          <a:effectLst/>
+                          <a:latin typeface="Calibri" panose="020F0502020204030204" pitchFamily="34" charset="0"/>
+                        </a:rPr>
+                        <a:t> </a:t>
+                      </a:r>
+                      <a:r>
+                        <a:rPr lang="ru-RU" sz="2000" b="0" i="0" u="none" strike="noStrike" dirty="0" err="1" smtClean="0">
+                          <a:solidFill>
+                            <a:srgbClr val="000000"/>
+                          </a:solidFill>
+                          <a:effectLst/>
+                          <a:latin typeface="Calibri" panose="020F0502020204030204" pitchFamily="34" charset="0"/>
+                        </a:rPr>
+                        <a:t>обменны</a:t>
                       </a:r>
                       <a:endParaRPr lang="ru-RU" sz="2000" b="0" i="0" u="none" strike="noStrike" dirty="0">
                         <a:solidFill>
@@ -15318,8 +21364,51 @@
                           <a:effectLst/>
                           <a:latin typeface="Calibri" panose="020F0502020204030204" pitchFamily="34" charset="0"/>
                         </a:rPr>
-                        <a:t>Зависит от метрики</a:t>
+                        <a:t>Зависит от </a:t>
                       </a:r>
+                      <a:r>
+                        <a:rPr lang="ru-RU" sz="2000" b="0" i="0" u="none" strike="noStrike" dirty="0" smtClean="0">
+                          <a:solidFill>
+                            <a:srgbClr val="000000"/>
+                          </a:solidFill>
+                          <a:effectLst/>
+                          <a:latin typeface="Calibri" panose="020F0502020204030204" pitchFamily="34" charset="0"/>
+                        </a:rPr>
+                        <a:t>метрики</a:t>
+                      </a:r>
+                    </a:p>
+                    <a:p>
+                      <a:pPr marL="342900" indent="-161925" algn="l" fontAlgn="b">
+                        <a:buFont typeface="Arial" panose="020B0604020202020204" pitchFamily="34" charset="0"/>
+                        <a:buChar char="•"/>
+                      </a:pPr>
+                      <a:r>
+                        <a:rPr lang="ru-RU" sz="2000" b="0" i="0" u="none" strike="noStrike" dirty="0" smtClean="0">
+                          <a:solidFill>
+                            <a:srgbClr val="000000"/>
+                          </a:solidFill>
+                          <a:effectLst/>
+                          <a:latin typeface="Calibri" panose="020F0502020204030204" pitchFamily="34" charset="0"/>
+                        </a:rPr>
+                        <a:t>Только экстремальные</a:t>
+                      </a:r>
+                      <a:r>
+                        <a:rPr lang="ru-RU" sz="2000" b="0" i="0" u="none" strike="noStrike" baseline="0" dirty="0" smtClean="0">
+                          <a:solidFill>
+                            <a:srgbClr val="000000"/>
+                          </a:solidFill>
+                          <a:effectLst/>
+                          <a:latin typeface="Calibri" panose="020F0502020204030204" pitchFamily="34" charset="0"/>
+                        </a:rPr>
+                        <a:t> события</a:t>
+                      </a:r>
+                      <a:endParaRPr lang="ru-RU" sz="2000" b="0" i="0" u="none" strike="noStrike" dirty="0">
+                        <a:solidFill>
+                          <a:srgbClr val="000000"/>
+                        </a:solidFill>
+                        <a:effectLst/>
+                        <a:latin typeface="Calibri" panose="020F0502020204030204" pitchFamily="34" charset="0"/>
+                      </a:endParaRPr>
                     </a:p>
                   </a:txBody>
                   <a:tcPr marL="9525" marR="9525" marT="9525" marB="0" anchor="b"/>
@@ -15506,10 +21595,17 @@
   <p:clrMapOvr>
     <a:masterClrMapping/>
   </p:clrMapOvr>
+  <p:timing>
+    <p:tnLst>
+      <p:par>
+        <p:cTn id="1" dur="indefinite" restart="never" nodeType="tmRoot"/>
+      </p:par>
+    </p:tnLst>
+  </p:timing>
 </p:sld>
 </file>
 
-<file path=ppt/slides/slide21.xml><?xml version="1.0" encoding="utf-8"?>
+<file path=ppt/slides/slide22.xml><?xml version="1.0" encoding="utf-8"?>
 <p:sld xmlns:a="http://schemas.openxmlformats.org/drawingml/2006/main" xmlns:r="http://schemas.openxmlformats.org/officeDocument/2006/relationships" xmlns:p="http://schemas.openxmlformats.org/presentationml/2006/main">
   <p:cSld>
     <p:spTree>
@@ -15818,15 +21914,27 @@
             </a:pPr>
             <a:r>
               <a:rPr lang="ru-RU" sz="2100" dirty="0"/>
-              <a:t>Часто </a:t>
+              <a:t>Часто</a:t>
+            </a:r>
+            <a:r>
+              <a:rPr lang="ru-RU" sz="2100" b="1" dirty="0"/>
+              <a:t> </a:t>
+            </a:r>
+            <a:r>
+              <a:rPr lang="en-US" sz="2100" b="1" dirty="0"/>
+              <a:t>OOD </a:t>
             </a:r>
             <a:r>
               <a:rPr lang="en-US" sz="2100" dirty="0"/>
-              <a:t>OOD – </a:t>
+              <a:t>– </a:t>
             </a:r>
             <a:r>
               <a:rPr lang="ru-RU" sz="2100" dirty="0"/>
-              <a:t>новизна в данных.</a:t>
+              <a:t>новизна в </a:t>
+            </a:r>
+            <a:r>
+              <a:rPr lang="ru-RU" sz="2100" dirty="0" smtClean="0"/>
+              <a:t>данных (новое распределение – результат).</a:t>
             </a:r>
             <a:endParaRPr lang="en-US" sz="2100" dirty="0"/>
           </a:p>
@@ -15856,16 +21964,37 @@
               <a:t>Мониторинг входных  данных и результатов </a:t>
             </a:r>
             <a:r>
-              <a:rPr lang="ru-RU" sz="2300" dirty="0" err="1"/>
-              <a:t>предсаказания</a:t>
+              <a:rPr lang="ru-RU" sz="2300" dirty="0" smtClean="0"/>
+              <a:t>предсказания (</a:t>
+            </a:r>
+            <a:r>
+              <a:rPr lang="ru-RU" sz="2300" dirty="0" err="1" smtClean="0"/>
+              <a:t>сат.тесты</a:t>
+            </a:r>
+            <a:r>
+              <a:rPr lang="ru-RU" sz="2300" dirty="0" smtClean="0"/>
+              <a:t>)</a:t>
             </a:r>
             <a:endParaRPr lang="ru-RU" sz="2300" dirty="0"/>
           </a:p>
           <a:p>
             <a:r>
               <a:rPr lang="ru-RU" sz="2300" dirty="0"/>
-              <a:t>Обучение новых моделей по расписанию</a:t>
-            </a:r>
+              <a:t>Обучение новых моделей по </a:t>
+            </a:r>
+            <a:r>
+              <a:rPr lang="ru-RU" sz="2300" dirty="0" smtClean="0"/>
+              <a:t>расписанию (мл </a:t>
+            </a:r>
+            <a:r>
+              <a:rPr lang="ru-RU" sz="2300" dirty="0" err="1" smtClean="0"/>
+              <a:t>опс</a:t>
+            </a:r>
+            <a:r>
+              <a:rPr lang="ru-RU" sz="2300" dirty="0" smtClean="0"/>
+              <a:t>)</a:t>
+            </a:r>
+            <a:endParaRPr lang="ru-RU" sz="2300" dirty="0"/>
           </a:p>
           <a:p>
             <a:pPr marL="0" indent="0">
@@ -15924,10 +22053,17 @@
   <p:clrMapOvr>
     <a:masterClrMapping/>
   </p:clrMapOvr>
+  <p:timing>
+    <p:tnLst>
+      <p:par>
+        <p:cTn id="1" dur="indefinite" restart="never" nodeType="tmRoot"/>
+      </p:par>
+    </p:tnLst>
+  </p:timing>
 </p:sld>
 </file>
 
-<file path=ppt/slides/slide22.xml><?xml version="1.0" encoding="utf-8"?>
+<file path=ppt/slides/slide23.xml><?xml version="1.0" encoding="utf-8"?>
 <p:sld xmlns:a="http://schemas.openxmlformats.org/drawingml/2006/main" xmlns:r="http://schemas.openxmlformats.org/officeDocument/2006/relationships" xmlns:p="http://schemas.openxmlformats.org/presentationml/2006/main">
   <p:cSld>
     <p:spTree>
@@ -16022,11 +22158,7 @@
             </a:r>
             <a:r>
               <a:rPr lang="ru-RU" dirty="0" smtClean="0"/>
-              <a:t> мониторинга работы метода предсказаний ВР. Как при этом будет надежность провялятся, какие будут риски </a:t>
-            </a:r>
-            <a:r>
-              <a:rPr lang="ru-RU" smtClean="0"/>
-              <a:t>для бизнес-метрик.</a:t>
+              <a:t> мониторинга работы метода предсказаний ВР. Как при этом будет надежность провялятся, какие будут риски для бизнес-метрик.</a:t>
             </a:r>
             <a:endParaRPr lang="ru-RU" dirty="0"/>
           </a:p>
@@ -16042,10 +22174,17 @@
   <p:clrMapOvr>
     <a:masterClrMapping/>
   </p:clrMapOvr>
+  <p:timing>
+    <p:tnLst>
+      <p:par>
+        <p:cTn id="1" dur="indefinite" restart="never" nodeType="tmRoot"/>
+      </p:par>
+    </p:tnLst>
+  </p:timing>
 </p:sld>
 </file>
 
-<file path=ppt/slides/slide23.xml><?xml version="1.0" encoding="utf-8"?>
+<file path=ppt/slides/slide24.xml><?xml version="1.0" encoding="utf-8"?>
 <p:sld xmlns:a="http://schemas.openxmlformats.org/drawingml/2006/main" xmlns:r="http://schemas.openxmlformats.org/officeDocument/2006/relationships" xmlns:p="http://schemas.openxmlformats.org/presentationml/2006/main">
   <p:cSld>
     <p:spTree>
@@ -16177,10 +22316,17 @@
   <p:clrMapOvr>
     <a:masterClrMapping/>
   </p:clrMapOvr>
+  <p:timing>
+    <p:tnLst>
+      <p:par>
+        <p:cTn id="1" dur="indefinite" restart="never" nodeType="tmRoot"/>
+      </p:par>
+    </p:tnLst>
+  </p:timing>
 </p:sld>
 </file>
 
-<file path=ppt/slides/slide24.xml><?xml version="1.0" encoding="utf-8"?>
+<file path=ppt/slides/slide25.xml><?xml version="1.0" encoding="utf-8"?>
 <p:sld xmlns:a="http://schemas.openxmlformats.org/drawingml/2006/main" xmlns:r="http://schemas.openxmlformats.org/officeDocument/2006/relationships" xmlns:p="http://schemas.openxmlformats.org/presentationml/2006/main" show="0">
   <p:cSld>
     <p:spTree>
@@ -16706,10 +22852,17 @@
       <p:transition spd="slow"/>
     </mc:Fallback>
   </mc:AlternateContent>
+  <p:timing>
+    <p:tnLst>
+      <p:par>
+        <p:cTn id="1" dur="indefinite" restart="never" nodeType="tmRoot"/>
+      </p:par>
+    </p:tnLst>
+  </p:timing>
 </p:sld>
 </file>
 
-<file path=ppt/slides/slide25.xml><?xml version="1.0" encoding="utf-8"?>
+<file path=ppt/slides/slide26.xml><?xml version="1.0" encoding="utf-8"?>
 <p:sld xmlns:a="http://schemas.openxmlformats.org/drawingml/2006/main" xmlns:r="http://schemas.openxmlformats.org/officeDocument/2006/relationships" xmlns:p="http://schemas.openxmlformats.org/presentationml/2006/main" show="0">
   <p:cSld>
     <p:spTree>
@@ -16908,7 +23061,7 @@
 </p:sld>
 </file>
 
-<file path=ppt/slides/slide26.xml><?xml version="1.0" encoding="utf-8"?>
+<file path=ppt/slides/slide27.xml><?xml version="1.0" encoding="utf-8"?>
 <p:sld xmlns:a="http://schemas.openxmlformats.org/drawingml/2006/main" xmlns:r="http://schemas.openxmlformats.org/officeDocument/2006/relationships" xmlns:p="http://schemas.openxmlformats.org/presentationml/2006/main" show="0">
   <p:cSld>
     <p:spTree>
@@ -17113,7 +23266,7 @@
 </p:sld>
 </file>
 
-<file path=ppt/slides/slide27.xml><?xml version="1.0" encoding="utf-8"?>
+<file path=ppt/slides/slide28.xml><?xml version="1.0" encoding="utf-8"?>
 <p:sld xmlns:a="http://schemas.openxmlformats.org/drawingml/2006/main" xmlns:r="http://schemas.openxmlformats.org/officeDocument/2006/relationships" xmlns:p="http://schemas.openxmlformats.org/presentationml/2006/main" show="0">
   <p:cSld>
     <p:spTree>
@@ -18050,6 +24203,13 @@
   <p:clrMapOvr>
     <a:masterClrMapping/>
   </p:clrMapOvr>
+  <p:timing>
+    <p:tnLst>
+      <p:par>
+        <p:cTn id="1" dur="indefinite" restart="never" nodeType="tmRoot"/>
+      </p:par>
+    </p:tnLst>
+  </p:timing>
 </p:sld>
 </file>
 
@@ -18615,6 +24775,13 @@
   <p:clrMapOvr>
     <a:masterClrMapping/>
   </p:clrMapOvr>
+  <p:timing>
+    <p:tnLst>
+      <p:par>
+        <p:cTn id="1" dur="indefinite" restart="never" nodeType="tmRoot"/>
+      </p:par>
+    </p:tnLst>
+  </p:timing>
 </p:sld>
 </file>
 
@@ -18979,6 +25146,13 @@
   <p:clrMapOvr>
     <a:masterClrMapping/>
   </p:clrMapOvr>
+  <p:timing>
+    <p:tnLst>
+      <p:par>
+        <p:cTn id="1" dur="indefinite" restart="never" nodeType="tmRoot"/>
+      </p:par>
+    </p:tnLst>
+  </p:timing>
 </p:sld>
 </file>
 
@@ -19389,6 +25563,13 @@
   <p:clrMapOvr>
     <a:masterClrMapping/>
   </p:clrMapOvr>
+  <p:timing>
+    <p:tnLst>
+      <p:par>
+        <p:cTn id="1" dur="indefinite" restart="never" nodeType="tmRoot"/>
+      </p:par>
+    </p:tnLst>
+  </p:timing>
 </p:sld>
 </file>
 
@@ -19741,6 +25922,13 @@
   <p:clrMapOvr>
     <a:masterClrMapping/>
   </p:clrMapOvr>
+  <p:timing>
+    <p:tnLst>
+      <p:par>
+        <p:cTn id="1" dur="indefinite" restart="never" nodeType="tmRoot"/>
+      </p:par>
+    </p:tnLst>
+  </p:timing>
 </p:sld>
 </file>
 
@@ -20092,6 +26280,13 @@
   <p:clrMapOvr>
     <a:masterClrMapping/>
   </p:clrMapOvr>
+  <p:timing>
+    <p:tnLst>
+      <p:par>
+        <p:cTn id="1" dur="indefinite" restart="never" nodeType="tmRoot"/>
+      </p:par>
+    </p:tnLst>
+  </p:timing>
 </p:sld>
 </file>
 
@@ -20906,6 +27101,13 @@
   <p:clrMapOvr>
     <a:masterClrMapping/>
   </p:clrMapOvr>
+  <p:timing>
+    <p:tnLst>
+      <p:par>
+        <p:cTn id="1" dur="indefinite" restart="never" nodeType="tmRoot"/>
+      </p:par>
+    </p:tnLst>
+  </p:timing>
 </p:sld>
 </file>
 
